--- a/Marketing_ROI_Analysis.pptx
+++ b/Marketing_ROI_Analysis.pptx
@@ -7,12 +7,12 @@
   <p:sldIdLst>
     <p:sldId id="256" r:id="rId2"/>
     <p:sldId id="257" r:id="rId3"/>
-    <p:sldId id="264" r:id="rId4"/>
-    <p:sldId id="258" r:id="rId5"/>
-    <p:sldId id="268" r:id="rId6"/>
-    <p:sldId id="259" r:id="rId7"/>
-    <p:sldId id="267" r:id="rId8"/>
-    <p:sldId id="260" r:id="rId9"/>
+    <p:sldId id="258" r:id="rId4"/>
+    <p:sldId id="268" r:id="rId5"/>
+    <p:sldId id="259" r:id="rId6"/>
+    <p:sldId id="267" r:id="rId7"/>
+    <p:sldId id="260" r:id="rId8"/>
+    <p:sldId id="264" r:id="rId9"/>
     <p:sldId id="261" r:id="rId10"/>
     <p:sldId id="263" r:id="rId11"/>
   </p:sldIdLst>
@@ -10633,7 +10633,7 @@
           <a:p>
             <a:fld id="{5BCAD085-E8A6-8845-BD4E-CB4CCA059FC4}" type="datetimeFigureOut">
               <a:rPr lang="en-US" smtClean="0"/>
-              <a:t>8/19/2025</a:t>
+              <a:t>8/20/2025</a:t>
             </a:fld>
             <a:endParaRPr lang="en-US"/>
           </a:p>
@@ -10801,7 +10801,7 @@
           <a:p>
             <a:fld id="{5BCAD085-E8A6-8845-BD4E-CB4CCA059FC4}" type="datetimeFigureOut">
               <a:rPr lang="en-US" smtClean="0"/>
-              <a:t>8/19/2025</a:t>
+              <a:t>8/20/2025</a:t>
             </a:fld>
             <a:endParaRPr lang="en-US"/>
           </a:p>
@@ -10979,7 +10979,7 @@
           <a:p>
             <a:fld id="{5BCAD085-E8A6-8845-BD4E-CB4CCA059FC4}" type="datetimeFigureOut">
               <a:rPr lang="en-US" smtClean="0"/>
-              <a:t>8/19/2025</a:t>
+              <a:t>8/20/2025</a:t>
             </a:fld>
             <a:endParaRPr lang="en-US"/>
           </a:p>
@@ -11147,7 +11147,7 @@
           <a:p>
             <a:fld id="{5BCAD085-E8A6-8845-BD4E-CB4CCA059FC4}" type="datetimeFigureOut">
               <a:rPr lang="en-US" smtClean="0"/>
-              <a:t>8/19/2025</a:t>
+              <a:t>8/20/2025</a:t>
             </a:fld>
             <a:endParaRPr lang="en-US"/>
           </a:p>
@@ -11392,7 +11392,7 @@
           <a:p>
             <a:fld id="{5BCAD085-E8A6-8845-BD4E-CB4CCA059FC4}" type="datetimeFigureOut">
               <a:rPr lang="en-US" smtClean="0"/>
-              <a:t>8/19/2025</a:t>
+              <a:t>8/20/2025</a:t>
             </a:fld>
             <a:endParaRPr lang="en-US"/>
           </a:p>
@@ -11677,7 +11677,7 @@
           <a:p>
             <a:fld id="{5BCAD085-E8A6-8845-BD4E-CB4CCA059FC4}" type="datetimeFigureOut">
               <a:rPr lang="en-US" smtClean="0"/>
-              <a:t>8/19/2025</a:t>
+              <a:t>8/20/2025</a:t>
             </a:fld>
             <a:endParaRPr lang="en-US"/>
           </a:p>
@@ -12096,7 +12096,7 @@
           <a:p>
             <a:fld id="{5BCAD085-E8A6-8845-BD4E-CB4CCA059FC4}" type="datetimeFigureOut">
               <a:rPr lang="en-US" smtClean="0"/>
-              <a:t>8/19/2025</a:t>
+              <a:t>8/20/2025</a:t>
             </a:fld>
             <a:endParaRPr lang="en-US"/>
           </a:p>
@@ -12213,7 +12213,7 @@
           <a:p>
             <a:fld id="{5BCAD085-E8A6-8845-BD4E-CB4CCA059FC4}" type="datetimeFigureOut">
               <a:rPr lang="en-US" smtClean="0"/>
-              <a:t>8/19/2025</a:t>
+              <a:t>8/20/2025</a:t>
             </a:fld>
             <a:endParaRPr lang="en-US"/>
           </a:p>
@@ -12308,7 +12308,7 @@
           <a:p>
             <a:fld id="{5BCAD085-E8A6-8845-BD4E-CB4CCA059FC4}" type="datetimeFigureOut">
               <a:rPr lang="en-US" smtClean="0"/>
-              <a:t>8/19/2025</a:t>
+              <a:t>8/20/2025</a:t>
             </a:fld>
             <a:endParaRPr lang="en-US"/>
           </a:p>
@@ -12583,7 +12583,7 @@
           <a:p>
             <a:fld id="{5BCAD085-E8A6-8845-BD4E-CB4CCA059FC4}" type="datetimeFigureOut">
               <a:rPr lang="en-US" smtClean="0"/>
-              <a:t>8/19/2025</a:t>
+              <a:t>8/20/2025</a:t>
             </a:fld>
             <a:endParaRPr lang="en-US"/>
           </a:p>
@@ -12835,7 +12835,7 @@
           <a:p>
             <a:fld id="{5BCAD085-E8A6-8845-BD4E-CB4CCA059FC4}" type="datetimeFigureOut">
               <a:rPr lang="en-US" smtClean="0"/>
-              <a:t>8/19/2025</a:t>
+              <a:t>8/20/2025</a:t>
             </a:fld>
             <a:endParaRPr lang="en-US"/>
           </a:p>
@@ -13046,7 +13046,7 @@
           <a:p>
             <a:fld id="{5BCAD085-E8A6-8845-BD4E-CB4CCA059FC4}" type="datetimeFigureOut">
               <a:rPr lang="en-US" smtClean="0"/>
-              <a:t>8/19/2025</a:t>
+              <a:t>8/20/2025</a:t>
             </a:fld>
             <a:endParaRPr lang="en-US"/>
           </a:p>
@@ -13901,15 +13901,20 @@
           <a:lstStyle/>
           <a:p>
             <a:r>
-              <a:rPr lang="en-US" sz="1700"/>
+              <a:rPr lang="en-US" sz="1700" dirty="0"/>
               <a:t>Identify saturated channels and reallocate budget to maximize incremental impact.</a:t>
             </a:r>
           </a:p>
           <a:p>
             <a:r>
+              <a:rPr lang="en-US" sz="1700" dirty="0"/>
+              <a:t>Find collinear channels and see if there is an optimal allocation of spend to a combination </a:t>
+            </a:r>
+            <a:r>
               <a:rPr lang="en-US" sz="1700"/>
-              <a:t>Find collinear channels and see if there is an optimal amount of spend to allocate to a combination of them</a:t>
+              <a:t>of channels.</a:t>
             </a:r>
+            <a:endParaRPr lang="en-US" sz="1700" dirty="0"/>
           </a:p>
         </p:txBody>
       </p:sp>
@@ -14364,6 +14369,1907 @@
 </file>
 
 <file path=ppt/slides/slide3.xml><?xml version="1.0" encoding="utf-8"?>
+<p:sld xmlns:a="http://schemas.openxmlformats.org/drawingml/2006/main" xmlns:r="http://schemas.openxmlformats.org/officeDocument/2006/relationships" xmlns:p="http://schemas.openxmlformats.org/presentationml/2006/main">
+  <p:cSld>
+    <p:bg>
+      <p:bgPr>
+        <a:solidFill>
+          <a:schemeClr val="bg1"/>
+        </a:solidFill>
+        <a:effectLst/>
+      </p:bgPr>
+    </p:bg>
+    <p:spTree>
+      <p:nvGrpSpPr>
+        <p:cNvPr id="1" name=""/>
+        <p:cNvGrpSpPr/>
+        <p:nvPr/>
+      </p:nvGrpSpPr>
+      <p:grpSpPr>
+        <a:xfrm>
+          <a:off x="0" y="0"/>
+          <a:ext cx="0" cy="0"/>
+          <a:chOff x="0" y="0"/>
+          <a:chExt cx="0" cy="0"/>
+        </a:xfrm>
+      </p:grpSpPr>
+      <p:sp useBgFill="1">
+        <p:nvSpPr>
+          <p:cNvPr id="91" name="Rectangle 90">
+            <a:extLst>
+              <a:ext uri="{FF2B5EF4-FFF2-40B4-BE49-F238E27FC236}">
+                <a16:creationId xmlns:a16="http://schemas.microsoft.com/office/drawing/2014/main" id="{2659FDB4-FCBE-4A89-B46D-43D4FA54464D}"/>
+              </a:ext>
+              <a:ext uri="{C183D7F6-B498-43B3-948B-1728B52AA6E4}">
+                <adec:decorative xmlns:adec="http://schemas.microsoft.com/office/drawing/2017/decorative" val="1"/>
+              </a:ext>
+            </a:extLst>
+          </p:cNvPr>
+          <p:cNvSpPr>
+            <a:spLocks noGrp="1" noRot="1" noChangeAspect="1" noMove="1" noResize="1" noEditPoints="1" noAdjustHandles="1" noChangeArrowheads="1" noChangeShapeType="1" noTextEdit="1"/>
+          </p:cNvSpPr>
+          <p:nvPr>
+            <p:extLst>
+              <p:ext uri="{386F3935-93C4-4BCD-93E2-E3B085C9AB24}">
+                <p16:designElem xmlns:p16="http://schemas.microsoft.com/office/powerpoint/2015/main" val="1"/>
+              </p:ext>
+            </p:extLst>
+          </p:nvPr>
+        </p:nvSpPr>
+        <p:spPr>
+          <a:xfrm>
+            <a:off x="0" y="8313"/>
+            <a:ext cx="9144000" cy="6858000"/>
+          </a:xfrm>
+          <a:prstGeom prst="rect">
+            <a:avLst/>
+          </a:prstGeom>
+          <a:ln>
+            <a:noFill/>
+          </a:ln>
+        </p:spPr>
+        <p:style>
+          <a:lnRef idx="2">
+            <a:schemeClr val="accent1">
+              <a:shade val="50000"/>
+            </a:schemeClr>
+          </a:lnRef>
+          <a:fillRef idx="1">
+            <a:schemeClr val="accent1"/>
+          </a:fillRef>
+          <a:effectRef idx="0">
+            <a:schemeClr val="accent1"/>
+          </a:effectRef>
+          <a:fontRef idx="minor">
+            <a:schemeClr val="lt1"/>
+          </a:fontRef>
+        </p:style>
+        <p:txBody>
+          <a:bodyPr rtlCol="0" anchor="ctr"/>
+          <a:lstStyle/>
+          <a:p>
+            <a:r>
+              <a:t>Understanding Incremental Revenue</a:t>
+            </a:r>
+          </a:p>
+          <a:p>
+            <a:endParaRPr/>
+          </a:p>
+          <a:p>
+            <a:r>
+              <a:t>- Modeled revenue captures only the additional revenue directly generated by marketing spend.</a:t>
+            </a:r>
+          </a:p>
+          <a:p>
+            <a:r>
+              <a:t>- Platform reports often overstate impact by including all influenced revenue.</a:t>
+            </a:r>
+          </a:p>
+          <a:p>
+            <a:r>
+              <a:t>- Explains why modeled revenue &lt; reported revenue.</a:t>
+            </a:r>
+          </a:p>
+        </p:txBody>
+      </p:sp>
+      <p:sp>
+        <p:nvSpPr>
+          <p:cNvPr id="2" name="Title 1"/>
+          <p:cNvSpPr>
+            <a:spLocks noGrp="1"/>
+          </p:cNvSpPr>
+          <p:nvPr>
+            <p:ph type="title"/>
+          </p:nvPr>
+        </p:nvSpPr>
+        <p:spPr>
+          <a:xfrm>
+            <a:off x="359545" y="1070800"/>
+            <a:ext cx="2954766" cy="5583126"/>
+          </a:xfrm>
+        </p:spPr>
+        <p:txBody>
+          <a:bodyPr>
+            <a:normAutofit/>
+          </a:bodyPr>
+          <a:lstStyle/>
+          <a:p>
+            <a:pPr algn="r">
+              <a:lnSpc>
+                <a:spcPct val="90000"/>
+              </a:lnSpc>
+            </a:pPr>
+            <a:r>
+              <a:rPr lang="en-US" sz="3300"/>
+              <a:t>Understanding Incremental Revenue</a:t>
+            </a:r>
+          </a:p>
+        </p:txBody>
+      </p:sp>
+      <p:cxnSp>
+        <p:nvCxnSpPr>
+          <p:cNvPr id="93" name="Straight Connector 92">
+            <a:extLst>
+              <a:ext uri="{FF2B5EF4-FFF2-40B4-BE49-F238E27FC236}">
+                <a16:creationId xmlns:a16="http://schemas.microsoft.com/office/drawing/2014/main" id="{C8F51B3F-8331-4E4A-AE96-D47B1006EEAD}"/>
+              </a:ext>
+              <a:ext uri="{C183D7F6-B498-43B3-948B-1728B52AA6E4}">
+                <adec:decorative xmlns:adec="http://schemas.microsoft.com/office/drawing/2017/decorative" val="1"/>
+              </a:ext>
+            </a:extLst>
+          </p:cNvPr>
+          <p:cNvCxnSpPr>
+            <a:cxnSpLocks noGrp="1" noRot="1" noChangeAspect="1" noMove="1" noResize="1" noEditPoints="1" noAdjustHandles="1" noChangeArrowheads="1" noChangeShapeType="1"/>
+          </p:cNvCxnSpPr>
+          <p:nvPr>
+            <p:extLst>
+              <p:ext uri="{386F3935-93C4-4BCD-93E2-E3B085C9AB24}">
+                <p16:designElem xmlns:p16="http://schemas.microsoft.com/office/powerpoint/2015/main" val="1"/>
+              </p:ext>
+            </p:extLst>
+          </p:nvPr>
+        </p:nvCxnSpPr>
+        <p:spPr>
+          <a:xfrm>
+            <a:off x="3546039" y="1132114"/>
+            <a:ext cx="0" cy="5717573"/>
+          </a:xfrm>
+          <a:prstGeom prst="line">
+            <a:avLst/>
+          </a:prstGeom>
+          <a:ln w="25400" cap="sq">
+            <a:gradFill flip="none" rotWithShape="1">
+              <a:gsLst>
+                <a:gs pos="0">
+                  <a:schemeClr val="accent1"/>
+                </a:gs>
+                <a:gs pos="100000">
+                  <a:schemeClr val="accent2"/>
+                </a:gs>
+              </a:gsLst>
+              <a:lin ang="16200000" scaled="1"/>
+              <a:tileRect/>
+            </a:gradFill>
+            <a:bevel/>
+          </a:ln>
+        </p:spPr>
+        <p:style>
+          <a:lnRef idx="1">
+            <a:schemeClr val="accent1"/>
+          </a:lnRef>
+          <a:fillRef idx="0">
+            <a:schemeClr val="accent1"/>
+          </a:fillRef>
+          <a:effectRef idx="0">
+            <a:schemeClr val="accent1"/>
+          </a:effectRef>
+          <a:fontRef idx="minor">
+            <a:schemeClr val="tx1"/>
+          </a:fontRef>
+        </p:style>
+      </p:cxnSp>
+      <p:graphicFrame>
+        <p:nvGraphicFramePr>
+          <p:cNvPr id="76" name="Content Placeholder 2">
+            <a:extLst>
+              <a:ext uri="{FF2B5EF4-FFF2-40B4-BE49-F238E27FC236}">
+                <a16:creationId xmlns:a16="http://schemas.microsoft.com/office/drawing/2014/main" id="{E12A2D84-9413-83D3-E3A4-B1053B6530A2}"/>
+              </a:ext>
+            </a:extLst>
+          </p:cNvPr>
+          <p:cNvGraphicFramePr>
+            <a:graphicFrameLocks noGrp="1"/>
+          </p:cNvGraphicFramePr>
+          <p:nvPr>
+            <p:ph idx="1"/>
+            <p:extLst>
+              <p:ext uri="{D42A27DB-BD31-4B8C-83A1-F6EECF244321}">
+                <p14:modId xmlns:p14="http://schemas.microsoft.com/office/powerpoint/2010/main" val="3244413005"/>
+              </p:ext>
+            </p:extLst>
+          </p:nvPr>
+        </p:nvGraphicFramePr>
+        <p:xfrm>
+          <a:off x="3831401" y="1070800"/>
+          <a:ext cx="4683949" cy="5589347"/>
+        </p:xfrm>
+        <a:graphic>
+          <a:graphicData uri="http://schemas.openxmlformats.org/drawingml/2006/diagram">
+            <dgm:relIds xmlns:dgm="http://schemas.openxmlformats.org/drawingml/2006/diagram" xmlns:r="http://schemas.openxmlformats.org/officeDocument/2006/relationships" r:dm="rId2" r:lo="rId3" r:qs="rId4" r:cs="rId5"/>
+          </a:graphicData>
+        </a:graphic>
+      </p:graphicFrame>
+    </p:spTree>
+  </p:cSld>
+  <p:clrMapOvr>
+    <a:masterClrMapping/>
+  </p:clrMapOvr>
+</p:sld>
+</file>
+
+<file path=ppt/slides/slide4.xml><?xml version="1.0" encoding="utf-8"?>
+<p:sld xmlns:a="http://schemas.openxmlformats.org/drawingml/2006/main" xmlns:r="http://schemas.openxmlformats.org/officeDocument/2006/relationships" xmlns:p="http://schemas.openxmlformats.org/presentationml/2006/main">
+  <p:cSld>
+    <p:bg>
+      <p:bgPr>
+        <a:solidFill>
+          <a:schemeClr val="bg1"/>
+        </a:solidFill>
+        <a:effectLst/>
+      </p:bgPr>
+    </p:bg>
+    <p:spTree>
+      <p:nvGrpSpPr>
+        <p:cNvPr id="1" name=""/>
+        <p:cNvGrpSpPr/>
+        <p:nvPr/>
+      </p:nvGrpSpPr>
+      <p:grpSpPr>
+        <a:xfrm>
+          <a:off x="0" y="0"/>
+          <a:ext cx="0" cy="0"/>
+          <a:chOff x="0" y="0"/>
+          <a:chExt cx="0" cy="0"/>
+        </a:xfrm>
+      </p:grpSpPr>
+      <p:sp useBgFill="1">
+        <p:nvSpPr>
+          <p:cNvPr id="9" name="Rectangle 8">
+            <a:extLst>
+              <a:ext uri="{FF2B5EF4-FFF2-40B4-BE49-F238E27FC236}">
+                <a16:creationId xmlns:a16="http://schemas.microsoft.com/office/drawing/2014/main" id="{BACC6370-2D7E-4714-9D71-7542949D7D5D}"/>
+              </a:ext>
+              <a:ext uri="{C183D7F6-B498-43B3-948B-1728B52AA6E4}">
+                <adec:decorative xmlns:adec="http://schemas.microsoft.com/office/drawing/2017/decorative" val="1"/>
+              </a:ext>
+            </a:extLst>
+          </p:cNvPr>
+          <p:cNvSpPr>
+            <a:spLocks noGrp="1" noRot="1" noChangeAspect="1" noMove="1" noResize="1" noEditPoints="1" noAdjustHandles="1" noChangeArrowheads="1" noChangeShapeType="1" noTextEdit="1"/>
+          </p:cNvSpPr>
+          <p:nvPr>
+            <p:extLst>
+              <p:ext uri="{386F3935-93C4-4BCD-93E2-E3B085C9AB24}">
+                <p16:designElem xmlns:p16="http://schemas.microsoft.com/office/powerpoint/2015/main" val="1"/>
+              </p:ext>
+            </p:extLst>
+          </p:nvPr>
+        </p:nvSpPr>
+        <p:spPr>
+          <a:xfrm>
+            <a:off x="0" y="0"/>
+            <a:ext cx="9144000" cy="6858000"/>
+          </a:xfrm>
+          <a:prstGeom prst="rect">
+            <a:avLst/>
+          </a:prstGeom>
+          <a:ln w="12700" cap="flat" cmpd="sng" algn="ctr">
+            <a:noFill/>
+            <a:prstDash val="solid"/>
+            <a:miter lim="800000"/>
+          </a:ln>
+          <a:effectLst/>
+          <a:extLst>
+            <a:ext uri="{91240B29-F687-4F45-9708-019B960494DF}">
+              <a14:hiddenLine xmlns:a14="http://schemas.microsoft.com/office/drawing/2010/main" w="12700" cap="flat" cmpd="sng" algn="ctr">
+                <a:solidFill>
+                  <a:schemeClr val="accent1">
+                    <a:shade val="50000"/>
+                  </a:schemeClr>
+                </a:solidFill>
+                <a:prstDash val="solid"/>
+                <a:miter lim="800000"/>
+              </a14:hiddenLine>
+            </a:ext>
+          </a:extLst>
+        </p:spPr>
+        <p:style>
+          <a:lnRef idx="2">
+            <a:schemeClr val="accent1">
+              <a:shade val="50000"/>
+            </a:schemeClr>
+          </a:lnRef>
+          <a:fillRef idx="1">
+            <a:schemeClr val="accent1"/>
+          </a:fillRef>
+          <a:effectRef idx="0">
+            <a:schemeClr val="accent1"/>
+          </a:effectRef>
+          <a:fontRef idx="minor">
+            <a:schemeClr val="lt1"/>
+          </a:fontRef>
+        </p:style>
+        <p:txBody>
+          <a:bodyPr rtlCol="0" anchor="ctr"/>
+          <a:lstStyle/>
+          <a:p>
+            <a:r>
+              <a:t>Diminishing Returns on Marketing Spend</a:t>
+            </a:r>
+          </a:p>
+          <a:p>
+            <a:endParaRPr/>
+          </a:p>
+          <a:p>
+            <a:r>
+              <a:t>- Insight: As spend increases, marginal gains decline.</a:t>
+            </a:r>
+          </a:p>
+          <a:p>
+            <a:r>
+              <a:t>- Findings:</a:t>
+            </a:r>
+          </a:p>
+          <a:p>
+            <a:r>
+              <a:t>  • Channels like Amazon Ads, TikTok, AdWords, StackAdapt show high historical ROI but low incremental ROI.</a:t>
+            </a:r>
+          </a:p>
+          <a:p>
+            <a:r>
+              <a:t>  • Indicates saturation—each additional dollar yields less incremental revenue.</a:t>
+            </a:r>
+          </a:p>
+          <a:p>
+            <a:r>
+              <a:t>- Conclusion: Modeled revenue highlights reduced efficiency even in historically strong channels.</a:t>
+            </a:r>
+          </a:p>
+        </p:txBody>
+      </p:sp>
+      <p:sp>
+        <p:nvSpPr>
+          <p:cNvPr id="11" name="Rectangle 10">
+            <a:extLst>
+              <a:ext uri="{FF2B5EF4-FFF2-40B4-BE49-F238E27FC236}">
+                <a16:creationId xmlns:a16="http://schemas.microsoft.com/office/drawing/2014/main" id="{F68B3F68-107C-434F-AA38-110D5EA91B85}"/>
+              </a:ext>
+              <a:ext uri="{C183D7F6-B498-43B3-948B-1728B52AA6E4}">
+                <adec:decorative xmlns:adec="http://schemas.microsoft.com/office/drawing/2017/decorative" val="1"/>
+              </a:ext>
+            </a:extLst>
+          </p:cNvPr>
+          <p:cNvSpPr>
+            <a:spLocks noGrp="1" noRot="1" noChangeAspect="1" noMove="1" noResize="1" noEditPoints="1" noAdjustHandles="1" noChangeArrowheads="1" noChangeShapeType="1" noTextEdit="1"/>
+          </p:cNvSpPr>
+          <p:nvPr>
+            <p:extLst>
+              <p:ext uri="{386F3935-93C4-4BCD-93E2-E3B085C9AB24}">
+                <p16:designElem xmlns:p16="http://schemas.microsoft.com/office/powerpoint/2015/main" val="1"/>
+              </p:ext>
+            </p:extLst>
+          </p:nvPr>
+        </p:nvSpPr>
+        <p:spPr>
+          <a:xfrm flipH="1">
+            <a:off x="1" y="0"/>
+            <a:ext cx="9143999" cy="1575955"/>
+          </a:xfrm>
+          <a:prstGeom prst="rect">
+            <a:avLst/>
+          </a:prstGeom>
+          <a:gradFill>
+            <a:gsLst>
+              <a:gs pos="0">
+                <a:srgbClr val="000000">
+                  <a:alpha val="96000"/>
+                </a:srgbClr>
+              </a:gs>
+              <a:gs pos="100000">
+                <a:schemeClr val="accent1">
+                  <a:lumMod val="75000"/>
+                </a:schemeClr>
+              </a:gs>
+            </a:gsLst>
+            <a:lin ang="8400000" scaled="0"/>
+          </a:gradFill>
+          <a:ln>
+            <a:noFill/>
+          </a:ln>
+        </p:spPr>
+        <p:style>
+          <a:lnRef idx="2">
+            <a:schemeClr val="accent1">
+              <a:shade val="50000"/>
+            </a:schemeClr>
+          </a:lnRef>
+          <a:fillRef idx="1">
+            <a:schemeClr val="accent1"/>
+          </a:fillRef>
+          <a:effectRef idx="0">
+            <a:schemeClr val="accent1"/>
+          </a:effectRef>
+          <a:fontRef idx="minor">
+            <a:schemeClr val="lt1"/>
+          </a:fontRef>
+        </p:style>
+        <p:txBody>
+          <a:bodyPr rtlCol="0" anchor="ctr"/>
+          <a:lstStyle/>
+          <a:p>
+            <a:pPr algn="ctr"/>
+            <a:endParaRPr lang="en-US"/>
+          </a:p>
+        </p:txBody>
+      </p:sp>
+      <p:sp>
+        <p:nvSpPr>
+          <p:cNvPr id="13" name="Rectangle 12">
+            <a:extLst>
+              <a:ext uri="{FF2B5EF4-FFF2-40B4-BE49-F238E27FC236}">
+                <a16:creationId xmlns:a16="http://schemas.microsoft.com/office/drawing/2014/main" id="{AAD0DBB9-1A4B-4391-81D4-CB19F9AB918A}"/>
+              </a:ext>
+              <a:ext uri="{C183D7F6-B498-43B3-948B-1728B52AA6E4}">
+                <adec:decorative xmlns:adec="http://schemas.microsoft.com/office/drawing/2017/decorative" val="1"/>
+              </a:ext>
+            </a:extLst>
+          </p:cNvPr>
+          <p:cNvSpPr>
+            <a:spLocks noGrp="1" noRot="1" noChangeAspect="1" noMove="1" noResize="1" noEditPoints="1" noAdjustHandles="1" noChangeArrowheads="1" noChangeShapeType="1" noTextEdit="1"/>
+          </p:cNvSpPr>
+          <p:nvPr>
+            <p:extLst>
+              <p:ext uri="{386F3935-93C4-4BCD-93E2-E3B085C9AB24}">
+                <p16:designElem xmlns:p16="http://schemas.microsoft.com/office/powerpoint/2015/main" val="1"/>
+              </p:ext>
+            </p:extLst>
+          </p:nvPr>
+        </p:nvSpPr>
+        <p:spPr>
+          <a:xfrm rot="10800000" flipH="1">
+            <a:off x="6096642" y="0"/>
+            <a:ext cx="3047358" cy="1576412"/>
+          </a:xfrm>
+          <a:prstGeom prst="rect">
+            <a:avLst/>
+          </a:prstGeom>
+          <a:gradFill>
+            <a:gsLst>
+              <a:gs pos="19000">
+                <a:schemeClr val="accent1">
+                  <a:lumMod val="50000"/>
+                  <a:alpha val="68000"/>
+                </a:schemeClr>
+              </a:gs>
+              <a:gs pos="100000">
+                <a:schemeClr val="accent1">
+                  <a:alpha val="79000"/>
+                </a:schemeClr>
+              </a:gs>
+            </a:gsLst>
+            <a:lin ang="19200000" scaled="0"/>
+          </a:gradFill>
+          <a:ln>
+            <a:noFill/>
+          </a:ln>
+        </p:spPr>
+        <p:style>
+          <a:lnRef idx="2">
+            <a:schemeClr val="accent1">
+              <a:shade val="50000"/>
+            </a:schemeClr>
+          </a:lnRef>
+          <a:fillRef idx="1">
+            <a:schemeClr val="accent1"/>
+          </a:fillRef>
+          <a:effectRef idx="0">
+            <a:schemeClr val="accent1"/>
+          </a:effectRef>
+          <a:fontRef idx="minor">
+            <a:schemeClr val="lt1"/>
+          </a:fontRef>
+        </p:style>
+        <p:txBody>
+          <a:bodyPr rtlCol="0" anchor="ctr"/>
+          <a:lstStyle/>
+          <a:p>
+            <a:pPr algn="ctr"/>
+            <a:endParaRPr lang="en-US"/>
+          </a:p>
+        </p:txBody>
+      </p:sp>
+      <p:sp>
+        <p:nvSpPr>
+          <p:cNvPr id="15" name="Rectangle 14">
+            <a:extLst>
+              <a:ext uri="{FF2B5EF4-FFF2-40B4-BE49-F238E27FC236}">
+                <a16:creationId xmlns:a16="http://schemas.microsoft.com/office/drawing/2014/main" id="{063BBA22-50EA-4C4D-BE05-F1CE4E63AA56}"/>
+              </a:ext>
+              <a:ext uri="{C183D7F6-B498-43B3-948B-1728B52AA6E4}">
+                <adec:decorative xmlns:adec="http://schemas.microsoft.com/office/drawing/2017/decorative" val="1"/>
+              </a:ext>
+            </a:extLst>
+          </p:cNvPr>
+          <p:cNvSpPr>
+            <a:spLocks noGrp="1" noRot="1" noChangeAspect="1" noMove="1" noResize="1" noEditPoints="1" noAdjustHandles="1" noChangeArrowheads="1" noChangeShapeType="1" noTextEdit="1"/>
+          </p:cNvSpPr>
+          <p:nvPr>
+            <p:extLst>
+              <p:ext uri="{386F3935-93C4-4BCD-93E2-E3B085C9AB24}">
+                <p16:designElem xmlns:p16="http://schemas.microsoft.com/office/powerpoint/2015/main" val="1"/>
+              </p:ext>
+            </p:extLst>
+          </p:nvPr>
+        </p:nvSpPr>
+        <p:spPr>
+          <a:xfrm rot="5400000">
+            <a:off x="3783777" y="-3783778"/>
+            <a:ext cx="1576446" cy="9144002"/>
+          </a:xfrm>
+          <a:prstGeom prst="rect">
+            <a:avLst/>
+          </a:prstGeom>
+          <a:gradFill>
+            <a:gsLst>
+              <a:gs pos="23000">
+                <a:schemeClr val="accent1">
+                  <a:alpha val="0"/>
+                </a:schemeClr>
+              </a:gs>
+              <a:gs pos="99000">
+                <a:srgbClr val="000000">
+                  <a:alpha val="74000"/>
+                </a:srgbClr>
+              </a:gs>
+            </a:gsLst>
+            <a:lin ang="20400000" scaled="0"/>
+          </a:gradFill>
+          <a:ln>
+            <a:noFill/>
+          </a:ln>
+        </p:spPr>
+        <p:style>
+          <a:lnRef idx="2">
+            <a:schemeClr val="accent1">
+              <a:shade val="50000"/>
+            </a:schemeClr>
+          </a:lnRef>
+          <a:fillRef idx="1">
+            <a:schemeClr val="accent1"/>
+          </a:fillRef>
+          <a:effectRef idx="0">
+            <a:schemeClr val="accent1"/>
+          </a:effectRef>
+          <a:fontRef idx="minor">
+            <a:schemeClr val="lt1"/>
+          </a:fontRef>
+        </p:style>
+        <p:txBody>
+          <a:bodyPr rtlCol="0" anchor="ctr"/>
+          <a:lstStyle/>
+          <a:p>
+            <a:pPr algn="ctr"/>
+            <a:endParaRPr lang="en-US" dirty="0"/>
+          </a:p>
+        </p:txBody>
+      </p:sp>
+      <p:sp>
+        <p:nvSpPr>
+          <p:cNvPr id="2" name="Title 1">
+            <a:extLst>
+              <a:ext uri="{FF2B5EF4-FFF2-40B4-BE49-F238E27FC236}">
+                <a16:creationId xmlns:a16="http://schemas.microsoft.com/office/drawing/2014/main" id="{0353CB4C-C8CC-8E47-8C61-70C286AB9A0C}"/>
+              </a:ext>
+            </a:extLst>
+          </p:cNvPr>
+          <p:cNvSpPr>
+            <a:spLocks noGrp="1"/>
+          </p:cNvSpPr>
+          <p:nvPr>
+            <p:ph type="title"/>
+          </p:nvPr>
+        </p:nvSpPr>
+        <p:spPr>
+          <a:xfrm>
+            <a:off x="1028697" y="348865"/>
+            <a:ext cx="7533018" cy="877729"/>
+          </a:xfrm>
+        </p:spPr>
+        <p:txBody>
+          <a:bodyPr anchor="ctr">
+            <a:normAutofit fontScale="90000"/>
+          </a:bodyPr>
+          <a:lstStyle/>
+          <a:p>
+            <a:r>
+              <a:rPr lang="en-US" sz="3600" dirty="0">
+                <a:solidFill>
+                  <a:schemeClr val="bg1"/>
+                </a:solidFill>
+              </a:rPr>
+              <a:t>Diminishing Returns on Marketing Spend</a:t>
+            </a:r>
+            <a:endParaRPr lang="en-US" sz="3500" dirty="0">
+              <a:solidFill>
+                <a:schemeClr val="bg1"/>
+              </a:solidFill>
+            </a:endParaRPr>
+          </a:p>
+        </p:txBody>
+      </p:sp>
+      <p:graphicFrame>
+        <p:nvGraphicFramePr>
+          <p:cNvPr id="5" name="Content Placeholder 2">
+            <a:extLst>
+              <a:ext uri="{FF2B5EF4-FFF2-40B4-BE49-F238E27FC236}">
+                <a16:creationId xmlns:a16="http://schemas.microsoft.com/office/drawing/2014/main" id="{A7B986E4-2F37-4DFC-58C4-8A75F25E91BD}"/>
+              </a:ext>
+            </a:extLst>
+          </p:cNvPr>
+          <p:cNvGraphicFramePr>
+            <a:graphicFrameLocks noGrp="1"/>
+          </p:cNvGraphicFramePr>
+          <p:nvPr>
+            <p:ph idx="1"/>
+            <p:extLst>
+              <p:ext uri="{D42A27DB-BD31-4B8C-83A1-F6EECF244321}">
+                <p14:modId xmlns:p14="http://schemas.microsoft.com/office/powerpoint/2010/main" val="836685429"/>
+              </p:ext>
+            </p:extLst>
+          </p:nvPr>
+        </p:nvGraphicFramePr>
+        <p:xfrm>
+          <a:off x="483042" y="2112579"/>
+          <a:ext cx="8195871" cy="4192805"/>
+        </p:xfrm>
+        <a:graphic>
+          <a:graphicData uri="http://schemas.openxmlformats.org/drawingml/2006/diagram">
+            <dgm:relIds xmlns:dgm="http://schemas.openxmlformats.org/drawingml/2006/diagram" xmlns:r="http://schemas.openxmlformats.org/officeDocument/2006/relationships" r:dm="rId2" r:lo="rId3" r:qs="rId4" r:cs="rId5"/>
+          </a:graphicData>
+        </a:graphic>
+      </p:graphicFrame>
+    </p:spTree>
+    <p:extLst>
+      <p:ext uri="{BB962C8B-B14F-4D97-AF65-F5344CB8AC3E}">
+        <p14:creationId xmlns:p14="http://schemas.microsoft.com/office/powerpoint/2010/main" val="162346022"/>
+      </p:ext>
+    </p:extLst>
+  </p:cSld>
+  <p:clrMapOvr>
+    <a:masterClrMapping/>
+  </p:clrMapOvr>
+</p:sld>
+</file>
+
+<file path=ppt/slides/slide5.xml><?xml version="1.0" encoding="utf-8"?>
+<p:sld xmlns:a="http://schemas.openxmlformats.org/drawingml/2006/main" xmlns:r="http://schemas.openxmlformats.org/officeDocument/2006/relationships" xmlns:p="http://schemas.openxmlformats.org/presentationml/2006/main">
+  <p:cSld>
+    <p:bg>
+      <p:bgPr>
+        <a:solidFill>
+          <a:schemeClr val="bg1"/>
+        </a:solidFill>
+        <a:effectLst/>
+      </p:bgPr>
+    </p:bg>
+    <p:spTree>
+      <p:nvGrpSpPr>
+        <p:cNvPr id="1" name=""/>
+        <p:cNvGrpSpPr/>
+        <p:nvPr/>
+      </p:nvGrpSpPr>
+      <p:grpSpPr>
+        <a:xfrm>
+          <a:off x="0" y="0"/>
+          <a:ext cx="0" cy="0"/>
+          <a:chOff x="0" y="0"/>
+          <a:chExt cx="0" cy="0"/>
+        </a:xfrm>
+      </p:grpSpPr>
+      <p:sp useBgFill="1">
+        <p:nvSpPr>
+          <p:cNvPr id="10" name="Rectangle 9">
+            <a:extLst>
+              <a:ext uri="{FF2B5EF4-FFF2-40B4-BE49-F238E27FC236}">
+                <a16:creationId xmlns:a16="http://schemas.microsoft.com/office/drawing/2014/main" id="{979E27D9-03C7-44E2-9FF8-15D0C8506AF7}"/>
+              </a:ext>
+              <a:ext uri="{C183D7F6-B498-43B3-948B-1728B52AA6E4}">
+                <adec:decorative xmlns:adec="http://schemas.microsoft.com/office/drawing/2017/decorative" val="1"/>
+              </a:ext>
+            </a:extLst>
+          </p:cNvPr>
+          <p:cNvSpPr>
+            <a:spLocks noGrp="1" noRot="1" noChangeAspect="1" noMove="1" noResize="1" noEditPoints="1" noAdjustHandles="1" noChangeArrowheads="1" noChangeShapeType="1" noTextEdit="1"/>
+          </p:cNvSpPr>
+          <p:nvPr>
+            <p:extLst>
+              <p:ext uri="{386F3935-93C4-4BCD-93E2-E3B085C9AB24}">
+                <p16:designElem xmlns:p16="http://schemas.microsoft.com/office/powerpoint/2015/main" val="1"/>
+              </p:ext>
+            </p:extLst>
+          </p:nvPr>
+        </p:nvSpPr>
+        <p:spPr>
+          <a:xfrm>
+            <a:off x="0" y="0"/>
+            <a:ext cx="9144000" cy="6858000"/>
+          </a:xfrm>
+          <a:prstGeom prst="rect">
+            <a:avLst/>
+          </a:prstGeom>
+          <a:ln w="12700" cap="flat" cmpd="sng" algn="ctr">
+            <a:noFill/>
+            <a:prstDash val="solid"/>
+            <a:miter lim="800000"/>
+          </a:ln>
+          <a:effectLst/>
+          <a:extLst>
+            <a:ext uri="{91240B29-F687-4F45-9708-019B960494DF}">
+              <a14:hiddenLine xmlns:a14="http://schemas.microsoft.com/office/drawing/2010/main" w="12700" cap="flat" cmpd="sng" algn="ctr">
+                <a:solidFill>
+                  <a:schemeClr val="accent1">
+                    <a:shade val="50000"/>
+                  </a:schemeClr>
+                </a:solidFill>
+                <a:prstDash val="solid"/>
+                <a:miter lim="800000"/>
+              </a14:hiddenLine>
+            </a:ext>
+          </a:extLst>
+        </p:spPr>
+        <p:style>
+          <a:lnRef idx="2">
+            <a:schemeClr val="accent1">
+              <a:shade val="50000"/>
+            </a:schemeClr>
+          </a:lnRef>
+          <a:fillRef idx="1">
+            <a:schemeClr val="accent1"/>
+          </a:fillRef>
+          <a:effectRef idx="0">
+            <a:schemeClr val="accent1"/>
+          </a:effectRef>
+          <a:fontRef idx="minor">
+            <a:schemeClr val="lt1"/>
+          </a:fontRef>
+        </p:style>
+        <p:txBody>
+          <a:bodyPr rtlCol="0" anchor="ctr"/>
+          <a:lstStyle/>
+          <a:p>
+            <a:r>
+              <a:t>Collinearity and Overlap (VIF Analysis)</a:t>
+            </a:r>
+          </a:p>
+          <a:p>
+            <a:endParaRPr/>
+          </a:p>
+          <a:p>
+            <a:r>
+              <a:t>- High VIF (&gt;10) = Strong overlap across channel spend.</a:t>
+            </a:r>
+          </a:p>
+          <a:p>
+            <a:r>
+              <a:t>- Overlap reduces modeled contributions since multiple channels share credit.</a:t>
+            </a:r>
+          </a:p>
+          <a:p>
+            <a:r>
+              <a:t>- Optimizing requires balancing spend across overlapping channels.</a:t>
+            </a:r>
+          </a:p>
+        </p:txBody>
+      </p:sp>
+      <p:sp>
+        <p:nvSpPr>
+          <p:cNvPr id="2" name="Title 1"/>
+          <p:cNvSpPr>
+            <a:spLocks noGrp="1"/>
+          </p:cNvSpPr>
+          <p:nvPr>
+            <p:ph type="title"/>
+          </p:nvPr>
+        </p:nvSpPr>
+        <p:spPr>
+          <a:xfrm>
+            <a:off x="852297" y="502021"/>
+            <a:ext cx="3719703" cy="1642969"/>
+          </a:xfrm>
+        </p:spPr>
+        <p:txBody>
+          <a:bodyPr anchor="b">
+            <a:normAutofit/>
+          </a:bodyPr>
+          <a:lstStyle/>
+          <a:p>
+            <a:r>
+              <a:rPr lang="en-US" sz="3500"/>
+              <a:t>Total ROI vs Marginal ROI</a:t>
+            </a:r>
+          </a:p>
+        </p:txBody>
+      </p:sp>
+      <p:sp>
+        <p:nvSpPr>
+          <p:cNvPr id="3" name="Content Placeholder 2"/>
+          <p:cNvSpPr>
+            <a:spLocks noGrp="1"/>
+          </p:cNvSpPr>
+          <p:nvPr>
+            <p:ph idx="1"/>
+          </p:nvPr>
+        </p:nvSpPr>
+        <p:spPr>
+          <a:xfrm>
+            <a:off x="852297" y="2418408"/>
+            <a:ext cx="3719703" cy="3522569"/>
+          </a:xfrm>
+        </p:spPr>
+        <p:txBody>
+          <a:bodyPr anchor="t">
+            <a:normAutofit/>
+          </a:bodyPr>
+          <a:lstStyle/>
+          <a:p>
+            <a:pPr>
+              <a:defRPr sz="1800"/>
+            </a:pPr>
+            <a:r>
+              <a:rPr lang="en-US" sz="1600" dirty="0"/>
+              <a:t>Channels like StackAdapt, Amazon Ads, TikTok Ads, AdWords show high Total ROI but low Marginal ROI</a:t>
+            </a:r>
+          </a:p>
+          <a:p>
+            <a:pPr>
+              <a:defRPr sz="1800"/>
+            </a:pPr>
+            <a:r>
+              <a:rPr lang="en-US" sz="1600" dirty="0"/>
+              <a:t>Indicates diminishing returns as channels become saturated</a:t>
+            </a:r>
+          </a:p>
+          <a:p>
+            <a:pPr>
+              <a:defRPr sz="1800"/>
+            </a:pPr>
+            <a:r>
+              <a:rPr lang="en-US" sz="1600" dirty="0"/>
+              <a:t>Future spend in these channels yields weaker incremental gains</a:t>
+            </a:r>
+          </a:p>
+          <a:p>
+            <a:endParaRPr lang="en-US" sz="1700" dirty="0"/>
+          </a:p>
+        </p:txBody>
+      </p:sp>
+      <p:pic>
+        <p:nvPicPr>
+          <p:cNvPr id="5" name="Picture 4" descr="A graph with colored dots&#10;&#10;AI-generated content may be incorrect.">
+            <a:extLst>
+              <a:ext uri="{FF2B5EF4-FFF2-40B4-BE49-F238E27FC236}">
+                <a16:creationId xmlns:a16="http://schemas.microsoft.com/office/drawing/2014/main" id="{8A1BDF40-6701-CB5D-495F-39FFF309D26B}"/>
+              </a:ext>
+            </a:extLst>
+          </p:cNvPr>
+          <p:cNvPicPr>
+            <a:picLocks noChangeAspect="1"/>
+          </p:cNvPicPr>
+          <p:nvPr/>
+        </p:nvPicPr>
+        <p:blipFill>
+          <a:blip r:embed="rId2"/>
+          <a:stretch>
+            <a:fillRect/>
+          </a:stretch>
+        </p:blipFill>
+        <p:spPr>
+          <a:xfrm>
+            <a:off x="4884331" y="1759334"/>
+            <a:ext cx="3900767" cy="2925574"/>
+          </a:xfrm>
+          <a:prstGeom prst="rect">
+            <a:avLst/>
+          </a:prstGeom>
+        </p:spPr>
+      </p:pic>
+      <p:sp>
+        <p:nvSpPr>
+          <p:cNvPr id="12" name="Rectangle 11">
+            <a:extLst>
+              <a:ext uri="{FF2B5EF4-FFF2-40B4-BE49-F238E27FC236}">
+                <a16:creationId xmlns:a16="http://schemas.microsoft.com/office/drawing/2014/main" id="{EEBF1590-3B36-48EE-A89D-3B6F3CB256AB}"/>
+              </a:ext>
+              <a:ext uri="{C183D7F6-B498-43B3-948B-1728B52AA6E4}">
+                <adec:decorative xmlns:adec="http://schemas.microsoft.com/office/drawing/2017/decorative" val="1"/>
+              </a:ext>
+            </a:extLst>
+          </p:cNvPr>
+          <p:cNvSpPr>
+            <a:spLocks noGrp="1" noRot="1" noChangeAspect="1" noMove="1" noResize="1" noEditPoints="1" noAdjustHandles="1" noChangeArrowheads="1" noChangeShapeType="1" noTextEdit="1"/>
+          </p:cNvSpPr>
+          <p:nvPr>
+            <p:extLst>
+              <p:ext uri="{386F3935-93C4-4BCD-93E2-E3B085C9AB24}">
+                <p16:designElem xmlns:p16="http://schemas.microsoft.com/office/powerpoint/2015/main" val="1"/>
+              </p:ext>
+            </p:extLst>
+          </p:nvPr>
+        </p:nvSpPr>
+        <p:spPr>
+          <a:xfrm rot="10800000" flipH="1">
+            <a:off x="0" y="6400799"/>
+            <a:ext cx="9144000" cy="456773"/>
+          </a:xfrm>
+          <a:prstGeom prst="rect">
+            <a:avLst/>
+          </a:prstGeom>
+          <a:gradFill>
+            <a:gsLst>
+              <a:gs pos="0">
+                <a:schemeClr val="accent1"/>
+              </a:gs>
+              <a:gs pos="78000">
+                <a:srgbClr val="000000"/>
+              </a:gs>
+            </a:gsLst>
+            <a:lin ang="2400000" scaled="0"/>
+          </a:gradFill>
+          <a:ln>
+            <a:noFill/>
+          </a:ln>
+        </p:spPr>
+        <p:style>
+          <a:lnRef idx="2">
+            <a:schemeClr val="accent1">
+              <a:shade val="50000"/>
+            </a:schemeClr>
+          </a:lnRef>
+          <a:fillRef idx="1">
+            <a:schemeClr val="accent1"/>
+          </a:fillRef>
+          <a:effectRef idx="0">
+            <a:schemeClr val="accent1"/>
+          </a:effectRef>
+          <a:fontRef idx="minor">
+            <a:schemeClr val="lt1"/>
+          </a:fontRef>
+        </p:style>
+        <p:txBody>
+          <a:bodyPr rtlCol="0" anchor="ctr"/>
+          <a:lstStyle/>
+          <a:p>
+            <a:pPr algn="ctr"/>
+            <a:endParaRPr lang="en-US"/>
+          </a:p>
+        </p:txBody>
+      </p:sp>
+      <p:sp>
+        <p:nvSpPr>
+          <p:cNvPr id="40" name="Rectangle 39">
+            <a:extLst>
+              <a:ext uri="{FF2B5EF4-FFF2-40B4-BE49-F238E27FC236}">
+                <a16:creationId xmlns:a16="http://schemas.microsoft.com/office/drawing/2014/main" id="{AC8F6C8C-AB5A-4548-942D-E3FD40ACBC49}"/>
+              </a:ext>
+              <a:ext uri="{C183D7F6-B498-43B3-948B-1728B52AA6E4}">
+                <adec:decorative xmlns:adec="http://schemas.microsoft.com/office/drawing/2017/decorative" val="1"/>
+              </a:ext>
+            </a:extLst>
+          </p:cNvPr>
+          <p:cNvSpPr>
+            <a:spLocks noGrp="1" noRot="1" noChangeAspect="1" noMove="1" noResize="1" noEditPoints="1" noAdjustHandles="1" noChangeArrowheads="1" noChangeShapeType="1" noTextEdit="1"/>
+          </p:cNvSpPr>
+          <p:nvPr>
+            <p:extLst>
+              <p:ext uri="{386F3935-93C4-4BCD-93E2-E3B085C9AB24}">
+                <p16:designElem xmlns:p16="http://schemas.microsoft.com/office/powerpoint/2015/main" val="1"/>
+              </p:ext>
+            </p:extLst>
+          </p:nvPr>
+        </p:nvSpPr>
+        <p:spPr>
+          <a:xfrm flipH="1">
+            <a:off x="3028950" y="6400799"/>
+            <a:ext cx="6115048" cy="456772"/>
+          </a:xfrm>
+          <a:prstGeom prst="rect">
+            <a:avLst/>
+          </a:prstGeom>
+          <a:gradFill>
+            <a:gsLst>
+              <a:gs pos="0">
+                <a:srgbClr val="000000">
+                  <a:alpha val="63000"/>
+                </a:srgbClr>
+              </a:gs>
+              <a:gs pos="100000">
+                <a:schemeClr val="accent1">
+                  <a:lumMod val="75000"/>
+                </a:schemeClr>
+              </a:gs>
+            </a:gsLst>
+            <a:lin ang="13800000" scaled="0"/>
+          </a:gradFill>
+          <a:ln>
+            <a:noFill/>
+          </a:ln>
+        </p:spPr>
+        <p:style>
+          <a:lnRef idx="2">
+            <a:schemeClr val="accent1">
+              <a:shade val="50000"/>
+            </a:schemeClr>
+          </a:lnRef>
+          <a:fillRef idx="1">
+            <a:schemeClr val="accent1"/>
+          </a:fillRef>
+          <a:effectRef idx="0">
+            <a:schemeClr val="accent1"/>
+          </a:effectRef>
+          <a:fontRef idx="minor">
+            <a:schemeClr val="lt1"/>
+          </a:fontRef>
+        </p:style>
+        <p:txBody>
+          <a:bodyPr rtlCol="0" anchor="ctr"/>
+          <a:lstStyle/>
+          <a:p>
+            <a:pPr algn="ctr"/>
+            <a:endParaRPr lang="en-US"/>
+          </a:p>
+        </p:txBody>
+      </p:sp>
+    </p:spTree>
+  </p:cSld>
+  <p:clrMapOvr>
+    <a:masterClrMapping/>
+  </p:clrMapOvr>
+</p:sld>
+</file>
+
+<file path=ppt/slides/slide6.xml><?xml version="1.0" encoding="utf-8"?>
+<p:sld xmlns:a="http://schemas.openxmlformats.org/drawingml/2006/main" xmlns:r="http://schemas.openxmlformats.org/officeDocument/2006/relationships" xmlns:p="http://schemas.openxmlformats.org/presentationml/2006/main">
+  <p:cSld>
+    <p:bg>
+      <p:bgPr>
+        <a:solidFill>
+          <a:schemeClr val="bg1"/>
+        </a:solidFill>
+        <a:effectLst/>
+      </p:bgPr>
+    </p:bg>
+    <p:spTree>
+      <p:nvGrpSpPr>
+        <p:cNvPr id="1" name=""/>
+        <p:cNvGrpSpPr/>
+        <p:nvPr/>
+      </p:nvGrpSpPr>
+      <p:grpSpPr>
+        <a:xfrm>
+          <a:off x="0" y="0"/>
+          <a:ext cx="0" cy="0"/>
+          <a:chOff x="0" y="0"/>
+          <a:chExt cx="0" cy="0"/>
+        </a:xfrm>
+      </p:grpSpPr>
+      <p:sp>
+        <p:nvSpPr>
+          <p:cNvPr id="55" name="Freeform 6">
+            <a:extLst>
+              <a:ext uri="{FF2B5EF4-FFF2-40B4-BE49-F238E27FC236}">
+                <a16:creationId xmlns:a16="http://schemas.microsoft.com/office/drawing/2014/main" id="{69D184B2-2226-4E31-BCCB-444330767440}"/>
+              </a:ext>
+              <a:ext uri="{C183D7F6-B498-43B3-948B-1728B52AA6E4}">
+                <adec:decorative xmlns:adec="http://schemas.microsoft.com/office/drawing/2017/decorative" val="1"/>
+              </a:ext>
+            </a:extLst>
+          </p:cNvPr>
+          <p:cNvSpPr>
+            <a:spLocks noGrp="1" noRot="1" noChangeAspect="1" noMove="1" noResize="1" noEditPoints="1" noAdjustHandles="1" noChangeArrowheads="1" noChangeShapeType="1" noTextEdit="1"/>
+          </p:cNvSpPr>
+          <p:nvPr>
+            <p:extLst>
+              <p:ext uri="{386F3935-93C4-4BCD-93E2-E3B085C9AB24}">
+                <p16:designElem xmlns:p16="http://schemas.microsoft.com/office/powerpoint/2015/main" val="1"/>
+              </p:ext>
+            </p:extLst>
+          </p:nvPr>
+        </p:nvSpPr>
+        <p:spPr bwMode="auto">
+          <a:xfrm>
+            <a:off x="8338899" y="918266"/>
+            <a:ext cx="529596" cy="5863534"/>
+          </a:xfrm>
+          <a:custGeom>
+            <a:avLst/>
+            <a:gdLst>
+              <a:gd name="T0" fmla="*/ 414 w 414"/>
+              <a:gd name="T1" fmla="*/ 2447 h 2447"/>
+              <a:gd name="T2" fmla="*/ 0 w 414"/>
+              <a:gd name="T3" fmla="*/ 2247 h 2447"/>
+              <a:gd name="T4" fmla="*/ 0 w 414"/>
+              <a:gd name="T5" fmla="*/ 0 h 2447"/>
+              <a:gd name="T6" fmla="*/ 414 w 414"/>
+              <a:gd name="T7" fmla="*/ 200 h 2447"/>
+              <a:gd name="T8" fmla="*/ 414 w 414"/>
+              <a:gd name="T9" fmla="*/ 2447 h 2447"/>
+            </a:gdLst>
+            <a:ahLst/>
+            <a:cxnLst>
+              <a:cxn ang="0">
+                <a:pos x="T0" y="T1"/>
+              </a:cxn>
+              <a:cxn ang="0">
+                <a:pos x="T2" y="T3"/>
+              </a:cxn>
+              <a:cxn ang="0">
+                <a:pos x="T4" y="T5"/>
+              </a:cxn>
+              <a:cxn ang="0">
+                <a:pos x="T6" y="T7"/>
+              </a:cxn>
+              <a:cxn ang="0">
+                <a:pos x="T8" y="T9"/>
+              </a:cxn>
+            </a:cxnLst>
+            <a:rect l="0" t="0" r="r" b="b"/>
+            <a:pathLst>
+              <a:path w="414" h="2447">
+                <a:moveTo>
+                  <a:pt x="414" y="2447"/>
+                </a:moveTo>
+                <a:lnTo>
+                  <a:pt x="0" y="2247"/>
+                </a:lnTo>
+                <a:lnTo>
+                  <a:pt x="0" y="0"/>
+                </a:lnTo>
+                <a:lnTo>
+                  <a:pt x="414" y="200"/>
+                </a:lnTo>
+                <a:lnTo>
+                  <a:pt x="414" y="2447"/>
+                </a:lnTo>
+                <a:close/>
+              </a:path>
+            </a:pathLst>
+          </a:custGeom>
+          <a:solidFill>
+            <a:schemeClr val="accent1">
+              <a:lumMod val="75000"/>
+            </a:schemeClr>
+          </a:solidFill>
+          <a:ln>
+            <a:noFill/>
+          </a:ln>
+        </p:spPr>
+        <p:txBody>
+          <a:bodyPr vert="horz" wrap="square" lIns="91440" tIns="45720" rIns="91440" bIns="45720" numCol="1" anchor="t" anchorCtr="0" compatLnSpc="1">
+            <a:prstTxWarp prst="textNoShape">
+              <a:avLst/>
+            </a:prstTxWarp>
+          </a:bodyPr>
+          <a:lstStyle/>
+          <a:p>
+            <a:endParaRPr lang="en-US"/>
+          </a:p>
+        </p:txBody>
+      </p:sp>
+      <p:sp>
+        <p:nvSpPr>
+          <p:cNvPr id="56" name="Freeform 7">
+            <a:extLst>
+              <a:ext uri="{FF2B5EF4-FFF2-40B4-BE49-F238E27FC236}">
+                <a16:creationId xmlns:a16="http://schemas.microsoft.com/office/drawing/2014/main" id="{1AC4D4E3-486A-464A-8EC8-D44881097267}"/>
+              </a:ext>
+              <a:ext uri="{C183D7F6-B498-43B3-948B-1728B52AA6E4}">
+                <adec:decorative xmlns:adec="http://schemas.microsoft.com/office/drawing/2017/decorative" val="1"/>
+              </a:ext>
+            </a:extLst>
+          </p:cNvPr>
+          <p:cNvSpPr>
+            <a:spLocks noGrp="1" noRot="1" noChangeAspect="1" noMove="1" noResize="1" noEditPoints="1" noAdjustHandles="1" noChangeArrowheads="1" noChangeShapeType="1" noTextEdit="1"/>
+          </p:cNvSpPr>
+          <p:nvPr>
+            <p:extLst>
+              <p:ext uri="{386F3935-93C4-4BCD-93E2-E3B085C9AB24}">
+                <p16:designElem xmlns:p16="http://schemas.microsoft.com/office/powerpoint/2015/main" val="1"/>
+              </p:ext>
+            </p:extLst>
+          </p:nvPr>
+        </p:nvSpPr>
+        <p:spPr bwMode="auto">
+          <a:xfrm>
+            <a:off x="8338409" y="643467"/>
+            <a:ext cx="315230" cy="5668919"/>
+          </a:xfrm>
+          <a:custGeom>
+            <a:avLst/>
+            <a:gdLst>
+              <a:gd name="T0" fmla="*/ 209 w 209"/>
+              <a:gd name="T1" fmla="*/ 2246 h 2358"/>
+              <a:gd name="T2" fmla="*/ 0 w 209"/>
+              <a:gd name="T3" fmla="*/ 2358 h 2358"/>
+              <a:gd name="T4" fmla="*/ 0 w 209"/>
+              <a:gd name="T5" fmla="*/ 111 h 2358"/>
+              <a:gd name="T6" fmla="*/ 209 w 209"/>
+              <a:gd name="T7" fmla="*/ 0 h 2358"/>
+              <a:gd name="T8" fmla="*/ 209 w 209"/>
+              <a:gd name="T9" fmla="*/ 2246 h 2358"/>
+            </a:gdLst>
+            <a:ahLst/>
+            <a:cxnLst>
+              <a:cxn ang="0">
+                <a:pos x="T0" y="T1"/>
+              </a:cxn>
+              <a:cxn ang="0">
+                <a:pos x="T2" y="T3"/>
+              </a:cxn>
+              <a:cxn ang="0">
+                <a:pos x="T4" y="T5"/>
+              </a:cxn>
+              <a:cxn ang="0">
+                <a:pos x="T6" y="T7"/>
+              </a:cxn>
+              <a:cxn ang="0">
+                <a:pos x="T8" y="T9"/>
+              </a:cxn>
+            </a:cxnLst>
+            <a:rect l="0" t="0" r="r" b="b"/>
+            <a:pathLst>
+              <a:path w="209" h="2358">
+                <a:moveTo>
+                  <a:pt x="209" y="2246"/>
+                </a:moveTo>
+                <a:lnTo>
+                  <a:pt x="0" y="2358"/>
+                </a:lnTo>
+                <a:lnTo>
+                  <a:pt x="0" y="111"/>
+                </a:lnTo>
+                <a:lnTo>
+                  <a:pt x="209" y="0"/>
+                </a:lnTo>
+                <a:lnTo>
+                  <a:pt x="209" y="2246"/>
+                </a:lnTo>
+                <a:close/>
+              </a:path>
+            </a:pathLst>
+          </a:custGeom>
+          <a:solidFill>
+            <a:schemeClr val="accent1">
+              <a:lumMod val="50000"/>
+            </a:schemeClr>
+          </a:solidFill>
+          <a:ln>
+            <a:noFill/>
+          </a:ln>
+        </p:spPr>
+        <p:txBody>
+          <a:bodyPr vert="horz" wrap="square" lIns="91440" tIns="45720" rIns="91440" bIns="45720" numCol="1" anchor="t" anchorCtr="0" compatLnSpc="1">
+            <a:prstTxWarp prst="textNoShape">
+              <a:avLst/>
+            </a:prstTxWarp>
+          </a:bodyPr>
+          <a:lstStyle/>
+          <a:p>
+            <a:endParaRPr lang="en-US"/>
+          </a:p>
+        </p:txBody>
+      </p:sp>
+      <p:sp>
+        <p:nvSpPr>
+          <p:cNvPr id="57" name="Rectangle 56">
+            <a:extLst>
+              <a:ext uri="{FF2B5EF4-FFF2-40B4-BE49-F238E27FC236}">
+                <a16:creationId xmlns:a16="http://schemas.microsoft.com/office/drawing/2014/main" id="{864DE13E-58EB-4475-B79C-0D4FC651239B}"/>
+              </a:ext>
+              <a:ext uri="{C183D7F6-B498-43B3-948B-1728B52AA6E4}">
+                <adec:decorative xmlns:adec="http://schemas.microsoft.com/office/drawing/2017/decorative" val="1"/>
+              </a:ext>
+            </a:extLst>
+          </p:cNvPr>
+          <p:cNvSpPr>
+            <a:spLocks noGrp="1" noRot="1" noChangeAspect="1" noMove="1" noResize="1" noEditPoints="1" noAdjustHandles="1" noChangeArrowheads="1" noChangeShapeType="1" noTextEdit="1"/>
+          </p:cNvSpPr>
+          <p:nvPr>
+            <p:extLst>
+              <p:ext uri="{386F3935-93C4-4BCD-93E2-E3B085C9AB24}">
+                <p16:designElem xmlns:p16="http://schemas.microsoft.com/office/powerpoint/2015/main" val="1"/>
+              </p:ext>
+            </p:extLst>
+          </p:nvPr>
+        </p:nvSpPr>
+        <p:spPr bwMode="auto">
+          <a:xfrm>
+            <a:off x="478790" y="643467"/>
+            <a:ext cx="8200127" cy="5391944"/>
+          </a:xfrm>
+          <a:prstGeom prst="rect">
+            <a:avLst/>
+          </a:prstGeom>
+          <a:solidFill>
+            <a:srgbClr val="FFFFFF"/>
+          </a:solidFill>
+          <a:ln w="12700">
+            <a:solidFill>
+              <a:schemeClr val="accent1"/>
+            </a:solidFill>
+            <a:miter lim="800000"/>
+          </a:ln>
+        </p:spPr>
+        <p:txBody>
+          <a:bodyPr vert="horz" wrap="square" lIns="91440" tIns="45720" rIns="91440" bIns="45720" numCol="1" anchor="t" anchorCtr="0" compatLnSpc="1">
+            <a:prstTxWarp prst="textNoShape">
+              <a:avLst/>
+            </a:prstTxWarp>
+          </a:bodyPr>
+          <a:lstStyle/>
+          <a:p>
+            <a:endParaRPr lang="en-US"/>
+          </a:p>
+        </p:txBody>
+      </p:sp>
+      <p:pic>
+        <p:nvPicPr>
+          <p:cNvPr id="5" name="Content Placeholder 4" descr="A graph of blue bars&#10;&#10;AI-generated content may be incorrect.">
+            <a:extLst>
+              <a:ext uri="{FF2B5EF4-FFF2-40B4-BE49-F238E27FC236}">
+                <a16:creationId xmlns:a16="http://schemas.microsoft.com/office/drawing/2014/main" id="{4B42E3D9-E31A-57F7-5628-C5DCA5F8D0F4}"/>
+              </a:ext>
+            </a:extLst>
+          </p:cNvPr>
+          <p:cNvPicPr>
+            <a:picLocks noGrp="1" noChangeAspect="1"/>
+          </p:cNvPicPr>
+          <p:nvPr>
+            <p:ph idx="1"/>
+          </p:nvPr>
+        </p:nvPicPr>
+        <p:blipFill>
+          <a:blip r:embed="rId2"/>
+          <a:stretch>
+            <a:fillRect/>
+          </a:stretch>
+        </p:blipFill>
+        <p:spPr>
+          <a:xfrm>
+            <a:off x="1150376" y="1286934"/>
+            <a:ext cx="6843248" cy="4105949"/>
+          </a:xfrm>
+          <a:prstGeom prst="rect">
+            <a:avLst/>
+          </a:prstGeom>
+        </p:spPr>
+      </p:pic>
+    </p:spTree>
+    <p:extLst>
+      <p:ext uri="{BB962C8B-B14F-4D97-AF65-F5344CB8AC3E}">
+        <p14:creationId xmlns:p14="http://schemas.microsoft.com/office/powerpoint/2010/main" val="3272432687"/>
+      </p:ext>
+    </p:extLst>
+  </p:cSld>
+  <p:clrMapOvr>
+    <a:masterClrMapping/>
+  </p:clrMapOvr>
+</p:sld>
+</file>
+
+<file path=ppt/slides/slide7.xml><?xml version="1.0" encoding="utf-8"?>
+<p:sld xmlns:a="http://schemas.openxmlformats.org/drawingml/2006/main" xmlns:r="http://schemas.openxmlformats.org/officeDocument/2006/relationships" xmlns:p="http://schemas.openxmlformats.org/presentationml/2006/main">
+  <p:cSld>
+    <p:bg>
+      <p:bgPr>
+        <a:solidFill>
+          <a:schemeClr val="bg1"/>
+        </a:solidFill>
+        <a:effectLst/>
+      </p:bgPr>
+    </p:bg>
+    <p:spTree>
+      <p:nvGrpSpPr>
+        <p:cNvPr id="1" name=""/>
+        <p:cNvGrpSpPr/>
+        <p:nvPr/>
+      </p:nvGrpSpPr>
+      <p:grpSpPr>
+        <a:xfrm>
+          <a:off x="0" y="0"/>
+          <a:ext cx="0" cy="0"/>
+          <a:chOff x="0" y="0"/>
+          <a:chExt cx="0" cy="0"/>
+        </a:xfrm>
+      </p:grpSpPr>
+      <p:sp useBgFill="1">
+        <p:nvSpPr>
+          <p:cNvPr id="41" name="Rectangle 40">
+            <a:extLst>
+              <a:ext uri="{FF2B5EF4-FFF2-40B4-BE49-F238E27FC236}">
+                <a16:creationId xmlns:a16="http://schemas.microsoft.com/office/drawing/2014/main" id="{7FEAE179-C525-48F3-AD47-0E9E2B6F2E2E}"/>
+              </a:ext>
+              <a:ext uri="{C183D7F6-B498-43B3-948B-1728B52AA6E4}">
+                <adec:decorative xmlns:adec="http://schemas.microsoft.com/office/drawing/2017/decorative" val="1"/>
+              </a:ext>
+            </a:extLst>
+          </p:cNvPr>
+          <p:cNvSpPr>
+            <a:spLocks noGrp="1" noRot="1" noChangeAspect="1" noMove="1" noResize="1" noEditPoints="1" noAdjustHandles="1" noChangeArrowheads="1" noChangeShapeType="1" noTextEdit="1"/>
+          </p:cNvSpPr>
+          <p:nvPr>
+            <p:extLst>
+              <p:ext uri="{386F3935-93C4-4BCD-93E2-E3B085C9AB24}">
+                <p16:designElem xmlns:p16="http://schemas.microsoft.com/office/powerpoint/2015/main" val="1"/>
+              </p:ext>
+            </p:extLst>
+          </p:nvPr>
+        </p:nvSpPr>
+        <p:spPr>
+          <a:xfrm>
+            <a:off x="0" y="0"/>
+            <a:ext cx="9143999" cy="6857365"/>
+          </a:xfrm>
+          <a:prstGeom prst="rect">
+            <a:avLst/>
+          </a:prstGeom>
+          <a:ln>
+            <a:noFill/>
+          </a:ln>
+        </p:spPr>
+        <p:style>
+          <a:lnRef idx="2">
+            <a:schemeClr val="accent1">
+              <a:shade val="50000"/>
+            </a:schemeClr>
+          </a:lnRef>
+          <a:fillRef idx="1">
+            <a:schemeClr val="accent1"/>
+          </a:fillRef>
+          <a:effectRef idx="0">
+            <a:schemeClr val="accent1"/>
+          </a:effectRef>
+          <a:fontRef idx="minor">
+            <a:schemeClr val="lt1"/>
+          </a:fontRef>
+        </p:style>
+        <p:txBody>
+          <a:bodyPr rtlCol="0" anchor="ctr"/>
+          <a:lstStyle/>
+          <a:p>
+            <a:r>
+              <a:t>Lagged Effects of Spend</a:t>
+            </a:r>
+          </a:p>
+          <a:p>
+            <a:endParaRPr/>
+          </a:p>
+          <a:p>
+            <a:r>
+              <a:t>- Positive lag: Impact appears with delay (awareness, brand campaigns).</a:t>
+            </a:r>
+          </a:p>
+          <a:p>
+            <a:r>
+              <a:t>- Negative lag: Revenue changes precede spend adjustments (reverse causality).</a:t>
+            </a:r>
+          </a:p>
+          <a:p>
+            <a:r>
+              <a:t>- Takeaway: Distinguish short-term vs. delayed channel impact when planning budgets.</a:t>
+            </a:r>
+          </a:p>
+        </p:txBody>
+      </p:sp>
+      <p:sp>
+        <p:nvSpPr>
+          <p:cNvPr id="8" name="Rectangle 1">
+            <a:extLst>
+              <a:ext uri="{FF2B5EF4-FFF2-40B4-BE49-F238E27FC236}">
+                <a16:creationId xmlns:a16="http://schemas.microsoft.com/office/drawing/2014/main" id="{99CE5530-6C8E-A95B-0E56-893FC040F251}"/>
+              </a:ext>
+            </a:extLst>
+          </p:cNvPr>
+          <p:cNvSpPr>
+            <a:spLocks noGrp="1" noChangeArrowheads="1"/>
+          </p:cNvSpPr>
+          <p:nvPr>
+            <p:ph type="title"/>
+          </p:nvPr>
+        </p:nvSpPr>
+        <p:spPr bwMode="auto">
+          <a:xfrm>
+            <a:off x="388416" y="4883544"/>
+            <a:ext cx="2907065" cy="1556907"/>
+          </a:xfrm>
+          <a:prstGeom prst="rect">
+            <a:avLst/>
+          </a:prstGeom>
+          <a:extLst>
+            <a:ext uri="{909E8E84-426E-40DD-AFC4-6F175D3DCCD1}">
+              <a14:hiddenFill xmlns:a14="http://schemas.microsoft.com/office/drawing/2010/main">
+                <a:solidFill>
+                  <a:schemeClr val="accent1"/>
+                </a:solidFill>
+              </a14:hiddenFill>
+            </a:ext>
+            <a:ext uri="{91240B29-F687-4F45-9708-019B960494DF}">
+              <a14:hiddenLine xmlns:a14="http://schemas.microsoft.com/office/drawing/2010/main" w="9525">
+                <a:solidFill>
+                  <a:schemeClr val="tx1"/>
+                </a:solidFill>
+                <a:miter lim="800000"/>
+                <a:headEnd/>
+                <a:tailEnd/>
+              </a14:hiddenLine>
+            </a:ext>
+            <a:ext uri="{AF507438-7753-43E0-B8FC-AC1667EBCBE1}">
+              <a14:hiddenEffects xmlns:a14="http://schemas.microsoft.com/office/drawing/2010/main">
+                <a:effectLst>
+                  <a:outerShdw dist="35921" dir="2700000" algn="ctr" rotWithShape="0">
+                    <a:schemeClr val="bg2"/>
+                  </a:outerShdw>
+                </a:effectLst>
+              </a14:hiddenEffects>
+            </a:ext>
+          </a:extLst>
+        </p:spPr>
+        <p:txBody>
+          <a:bodyPr vert="horz" lIns="91440" tIns="45720" rIns="91440" bIns="45720" numCol="1" anchor="ctr" anchorCtr="0" compatLnSpc="1">
+            <a:prstTxWarp prst="textNoShape">
+              <a:avLst/>
+            </a:prstTxWarp>
+            <a:normAutofit/>
+          </a:bodyPr>
+          <a:lstStyle/>
+          <a:p>
+            <a:pPr marL="0" marR="0" lvl="0" indent="0" defTabSz="914400" rtl="0" eaLnBrk="0" fontAlgn="base" latinLnBrk="0" hangingPunct="0">
+              <a:spcBef>
+                <a:spcPct val="0"/>
+              </a:spcBef>
+              <a:spcAft>
+                <a:spcPct val="0"/>
+              </a:spcAft>
+              <a:buClrTx/>
+              <a:buSzTx/>
+              <a:tabLst/>
+            </a:pPr>
+            <a:r>
+              <a:rPr kumimoji="0" lang="en-US" altLang="en-US" sz="2800" b="0" i="0" u="none" strike="noStrike" cap="none" normalizeH="0" baseline="0" dirty="0">
+                <a:ln>
+                  <a:noFill/>
+                </a:ln>
+                <a:effectLst/>
+                <a:latin typeface="Arial" panose="020B0604020202020204" pitchFamily="34" charset="0"/>
+              </a:rPr>
+              <a:t>Diminishing Returns</a:t>
+            </a:r>
+          </a:p>
+        </p:txBody>
+      </p:sp>
+      <p:sp>
+        <p:nvSpPr>
+          <p:cNvPr id="43" name="Rectangle 42">
+            <a:extLst>
+              <a:ext uri="{FF2B5EF4-FFF2-40B4-BE49-F238E27FC236}">
+                <a16:creationId xmlns:a16="http://schemas.microsoft.com/office/drawing/2014/main" id="{95C8260E-968F-44E8-A823-ABB431311926}"/>
+              </a:ext>
+              <a:ext uri="{C183D7F6-B498-43B3-948B-1728B52AA6E4}">
+                <adec:decorative xmlns:adec="http://schemas.microsoft.com/office/drawing/2017/decorative" val="1"/>
+              </a:ext>
+            </a:extLst>
+          </p:cNvPr>
+          <p:cNvSpPr>
+            <a:spLocks noGrp="1" noRot="1" noChangeAspect="1" noMove="1" noResize="1" noEditPoints="1" noAdjustHandles="1" noChangeArrowheads="1" noChangeShapeType="1" noTextEdit="1"/>
+          </p:cNvSpPr>
+          <p:nvPr>
+            <p:extLst>
+              <p:ext uri="{386F3935-93C4-4BCD-93E2-E3B085C9AB24}">
+                <p16:designElem xmlns:p16="http://schemas.microsoft.com/office/powerpoint/2015/main" val="1"/>
+              </p:ext>
+            </p:extLst>
+          </p:nvPr>
+        </p:nvSpPr>
+        <p:spPr>
+          <a:xfrm>
+            <a:off x="0" y="0"/>
+            <a:ext cx="9144000" cy="865848"/>
+          </a:xfrm>
+          <a:prstGeom prst="rect">
+            <a:avLst/>
+          </a:prstGeom>
+          <a:solidFill>
+            <a:schemeClr val="accent4"/>
+          </a:solidFill>
+          <a:ln>
+            <a:noFill/>
+          </a:ln>
+        </p:spPr>
+        <p:style>
+          <a:lnRef idx="2">
+            <a:schemeClr val="accent1">
+              <a:shade val="50000"/>
+            </a:schemeClr>
+          </a:lnRef>
+          <a:fillRef idx="1">
+            <a:schemeClr val="accent1"/>
+          </a:fillRef>
+          <a:effectRef idx="0">
+            <a:schemeClr val="accent1"/>
+          </a:effectRef>
+          <a:fontRef idx="minor">
+            <a:schemeClr val="lt1"/>
+          </a:fontRef>
+        </p:style>
+        <p:txBody>
+          <a:bodyPr rtlCol="0" anchor="ctr"/>
+          <a:lstStyle/>
+          <a:p>
+            <a:pPr algn="ctr"/>
+            <a:endParaRPr lang="en-US"/>
+          </a:p>
+        </p:txBody>
+      </p:sp>
+      <p:sp>
+        <p:nvSpPr>
+          <p:cNvPr id="45" name="Rectangle 44">
+            <a:extLst>
+              <a:ext uri="{FF2B5EF4-FFF2-40B4-BE49-F238E27FC236}">
+                <a16:creationId xmlns:a16="http://schemas.microsoft.com/office/drawing/2014/main" id="{2C1BBA94-3F40-40AA-8BB9-E69E25E537C1}"/>
+              </a:ext>
+              <a:ext uri="{C183D7F6-B498-43B3-948B-1728B52AA6E4}">
+                <adec:decorative xmlns:adec="http://schemas.microsoft.com/office/drawing/2017/decorative" val="1"/>
+              </a:ext>
+            </a:extLst>
+          </p:cNvPr>
+          <p:cNvSpPr>
+            <a:spLocks noGrp="1" noRot="1" noChangeAspect="1" noMove="1" noResize="1" noEditPoints="1" noAdjustHandles="1" noChangeArrowheads="1" noChangeShapeType="1" noTextEdit="1"/>
+          </p:cNvSpPr>
+          <p:nvPr>
+            <p:extLst>
+              <p:ext uri="{386F3935-93C4-4BCD-93E2-E3B085C9AB24}">
+                <p16:designElem xmlns:p16="http://schemas.microsoft.com/office/powerpoint/2015/main" val="1"/>
+              </p:ext>
+            </p:extLst>
+          </p:nvPr>
+        </p:nvSpPr>
+        <p:spPr>
+          <a:xfrm>
+            <a:off x="388416" y="0"/>
+            <a:ext cx="8423809" cy="4588184"/>
+          </a:xfrm>
+          <a:prstGeom prst="rect">
+            <a:avLst/>
+          </a:prstGeom>
+          <a:solidFill>
+            <a:schemeClr val="bg1"/>
+          </a:solidFill>
+          <a:ln>
+            <a:noFill/>
+          </a:ln>
+          <a:effectLst>
+            <a:outerShdw blurRad="139700" dist="127000" dir="5400000" algn="t" rotWithShape="0">
+              <a:prstClr val="black">
+                <a:alpha val="15000"/>
+              </a:prstClr>
+            </a:outerShdw>
+          </a:effectLst>
+        </p:spPr>
+        <p:style>
+          <a:lnRef idx="2">
+            <a:schemeClr val="accent1">
+              <a:shade val="50000"/>
+            </a:schemeClr>
+          </a:lnRef>
+          <a:fillRef idx="1">
+            <a:schemeClr val="accent1"/>
+          </a:fillRef>
+          <a:effectRef idx="0">
+            <a:schemeClr val="accent1"/>
+          </a:effectRef>
+          <a:fontRef idx="minor">
+            <a:schemeClr val="lt1"/>
+          </a:fontRef>
+        </p:style>
+        <p:txBody>
+          <a:bodyPr rtlCol="0" anchor="ctr"/>
+          <a:lstStyle/>
+          <a:p>
+            <a:pPr algn="ctr"/>
+            <a:endParaRPr lang="en-US"/>
+          </a:p>
+        </p:txBody>
+      </p:sp>
+      <p:pic>
+        <p:nvPicPr>
+          <p:cNvPr id="15" name="Picture 14" descr="A graph of a graph&#10;&#10;AI-generated content may be incorrect.">
+            <a:extLst>
+              <a:ext uri="{FF2B5EF4-FFF2-40B4-BE49-F238E27FC236}">
+                <a16:creationId xmlns:a16="http://schemas.microsoft.com/office/drawing/2014/main" id="{50E2F948-8509-E471-40F2-5D5A2C8B6C04}"/>
+              </a:ext>
+            </a:extLst>
+          </p:cNvPr>
+          <p:cNvPicPr>
+            <a:picLocks noChangeAspect="1"/>
+          </p:cNvPicPr>
+          <p:nvPr/>
+        </p:nvPicPr>
+        <p:blipFill>
+          <a:blip r:embed="rId2"/>
+          <a:srcRect b="530"/>
+          <a:stretch>
+            <a:fillRect/>
+          </a:stretch>
+        </p:blipFill>
+        <p:spPr>
+          <a:xfrm>
+            <a:off x="719403" y="364142"/>
+            <a:ext cx="7777234" cy="3867993"/>
+          </a:xfrm>
+          <a:prstGeom prst="rect">
+            <a:avLst/>
+          </a:prstGeom>
+        </p:spPr>
+      </p:pic>
+      <p:sp>
+        <p:nvSpPr>
+          <p:cNvPr id="47" name="Rectangle 46">
+            <a:extLst>
+              <a:ext uri="{FF2B5EF4-FFF2-40B4-BE49-F238E27FC236}">
+                <a16:creationId xmlns:a16="http://schemas.microsoft.com/office/drawing/2014/main" id="{FE43805F-24A6-46A4-B19B-54F28347355C}"/>
+              </a:ext>
+              <a:ext uri="{C183D7F6-B498-43B3-948B-1728B52AA6E4}">
+                <adec:decorative xmlns:adec="http://schemas.microsoft.com/office/drawing/2017/decorative" val="1"/>
+              </a:ext>
+            </a:extLst>
+          </p:cNvPr>
+          <p:cNvSpPr>
+            <a:spLocks noGrp="1" noRot="1" noChangeAspect="1" noMove="1" noResize="1" noEditPoints="1" noAdjustHandles="1" noChangeArrowheads="1" noChangeShapeType="1" noTextEdit="1"/>
+          </p:cNvSpPr>
+          <p:nvPr>
+            <p:extLst>
+              <p:ext uri="{386F3935-93C4-4BCD-93E2-E3B085C9AB24}">
+                <p16:designElem xmlns:p16="http://schemas.microsoft.com/office/powerpoint/2015/main" val="1"/>
+              </p:ext>
+            </p:extLst>
+          </p:nvPr>
+        </p:nvSpPr>
+        <p:spPr>
+          <a:xfrm rot="5400000" flipH="1">
+            <a:off x="2817950" y="5666847"/>
+            <a:ext cx="1463040" cy="34289"/>
+          </a:xfrm>
+          <a:prstGeom prst="rect">
+            <a:avLst/>
+          </a:prstGeom>
+          <a:solidFill>
+            <a:schemeClr val="accent4"/>
+          </a:solidFill>
+          <a:ln>
+            <a:noFill/>
+          </a:ln>
+        </p:spPr>
+        <p:style>
+          <a:lnRef idx="2">
+            <a:schemeClr val="accent1">
+              <a:shade val="50000"/>
+            </a:schemeClr>
+          </a:lnRef>
+          <a:fillRef idx="1">
+            <a:schemeClr val="accent1"/>
+          </a:fillRef>
+          <a:effectRef idx="0">
+            <a:schemeClr val="accent1"/>
+          </a:effectRef>
+          <a:fontRef idx="minor">
+            <a:schemeClr val="lt1"/>
+          </a:fontRef>
+        </p:style>
+        <p:txBody>
+          <a:bodyPr rtlCol="0" anchor="ctr"/>
+          <a:lstStyle/>
+          <a:p>
+            <a:pPr algn="ctr"/>
+            <a:endParaRPr lang="en-US"/>
+          </a:p>
+        </p:txBody>
+      </p:sp>
+      <p:sp>
+        <p:nvSpPr>
+          <p:cNvPr id="3" name="Content Placeholder 2"/>
+          <p:cNvSpPr>
+            <a:spLocks noGrp="1"/>
+          </p:cNvSpPr>
+          <p:nvPr>
+            <p:ph idx="1"/>
+          </p:nvPr>
+        </p:nvSpPr>
+        <p:spPr>
+          <a:xfrm>
+            <a:off x="3872039" y="4883544"/>
+            <a:ext cx="4940186" cy="1556907"/>
+          </a:xfrm>
+        </p:spPr>
+        <p:txBody>
+          <a:bodyPr anchor="ctr">
+            <a:normAutofit/>
+          </a:bodyPr>
+          <a:lstStyle/>
+          <a:p>
+            <a:pPr>
+              <a:lnSpc>
+                <a:spcPct val="90000"/>
+              </a:lnSpc>
+            </a:pPr>
+            <a:r>
+              <a:rPr lang="en-US" sz="1000" dirty="0"/>
+              <a:t>Advertising platforms report total revenue claims. Modeled revenue focuses on incremental lift. Extra dollars spent on saturated channels yield smaller gains.</a:t>
+            </a:r>
+          </a:p>
+          <a:p>
+            <a:pPr>
+              <a:lnSpc>
+                <a:spcPct val="90000"/>
+              </a:lnSpc>
+            </a:pPr>
+            <a:r>
+              <a:rPr lang="en-US" sz="1000" dirty="0"/>
+              <a:t>Some channels have much higher total spend than others.</a:t>
+            </a:r>
+          </a:p>
+          <a:p>
+            <a:pPr>
+              <a:lnSpc>
+                <a:spcPct val="90000"/>
+              </a:lnSpc>
+            </a:pPr>
+            <a:r>
+              <a:rPr lang="en-US" sz="1000" dirty="0"/>
+              <a:t>High spend levels often coincide with diminishing marginal returns—each additional dollar spent generates less incremental revenue.</a:t>
+            </a:r>
+          </a:p>
+          <a:p>
+            <a:pPr>
+              <a:lnSpc>
+                <a:spcPct val="90000"/>
+              </a:lnSpc>
+            </a:pPr>
+            <a:r>
+              <a:rPr lang="en-US" sz="1000" dirty="0"/>
+              <a:t>Channels with large spend may still have high total ROI historically, but the model shows current incremental efficiency is lower.</a:t>
+            </a:r>
+          </a:p>
+          <a:p>
+            <a:pPr>
+              <a:lnSpc>
+                <a:spcPct val="90000"/>
+              </a:lnSpc>
+            </a:pPr>
+            <a:r>
+              <a:rPr lang="en-US" sz="1000" dirty="0"/>
+              <a:t>This helps explain why modeled revenue &lt; reported revenue for these channels.</a:t>
+            </a:r>
+          </a:p>
+        </p:txBody>
+      </p:sp>
+    </p:spTree>
+  </p:cSld>
+  <p:clrMapOvr>
+    <a:masterClrMapping/>
+  </p:clrMapOvr>
+</p:sld>
+</file>
+
+<file path=ppt/slides/slide8.xml><?xml version="1.0" encoding="utf-8"?>
 <p:sld xmlns:a="http://schemas.openxmlformats.org/drawingml/2006/main" xmlns:r="http://schemas.openxmlformats.org/officeDocument/2006/relationships" xmlns:p="http://schemas.openxmlformats.org/presentationml/2006/main">
   <p:cSld>
     <p:bg>
@@ -15103,1907 +17009,6 @@
 </p:sld>
 </file>
 
-<file path=ppt/slides/slide4.xml><?xml version="1.0" encoding="utf-8"?>
-<p:sld xmlns:a="http://schemas.openxmlformats.org/drawingml/2006/main" xmlns:r="http://schemas.openxmlformats.org/officeDocument/2006/relationships" xmlns:p="http://schemas.openxmlformats.org/presentationml/2006/main">
-  <p:cSld>
-    <p:bg>
-      <p:bgPr>
-        <a:solidFill>
-          <a:schemeClr val="bg1"/>
-        </a:solidFill>
-        <a:effectLst/>
-      </p:bgPr>
-    </p:bg>
-    <p:spTree>
-      <p:nvGrpSpPr>
-        <p:cNvPr id="1" name=""/>
-        <p:cNvGrpSpPr/>
-        <p:nvPr/>
-      </p:nvGrpSpPr>
-      <p:grpSpPr>
-        <a:xfrm>
-          <a:off x="0" y="0"/>
-          <a:ext cx="0" cy="0"/>
-          <a:chOff x="0" y="0"/>
-          <a:chExt cx="0" cy="0"/>
-        </a:xfrm>
-      </p:grpSpPr>
-      <p:sp useBgFill="1">
-        <p:nvSpPr>
-          <p:cNvPr id="91" name="Rectangle 90">
-            <a:extLst>
-              <a:ext uri="{FF2B5EF4-FFF2-40B4-BE49-F238E27FC236}">
-                <a16:creationId xmlns:a16="http://schemas.microsoft.com/office/drawing/2014/main" id="{2659FDB4-FCBE-4A89-B46D-43D4FA54464D}"/>
-              </a:ext>
-              <a:ext uri="{C183D7F6-B498-43B3-948B-1728B52AA6E4}">
-                <adec:decorative xmlns:adec="http://schemas.microsoft.com/office/drawing/2017/decorative" val="1"/>
-              </a:ext>
-            </a:extLst>
-          </p:cNvPr>
-          <p:cNvSpPr>
-            <a:spLocks noGrp="1" noRot="1" noChangeAspect="1" noMove="1" noResize="1" noEditPoints="1" noAdjustHandles="1" noChangeArrowheads="1" noChangeShapeType="1" noTextEdit="1"/>
-          </p:cNvSpPr>
-          <p:nvPr>
-            <p:extLst>
-              <p:ext uri="{386F3935-93C4-4BCD-93E2-E3B085C9AB24}">
-                <p16:designElem xmlns:p16="http://schemas.microsoft.com/office/powerpoint/2015/main" val="1"/>
-              </p:ext>
-            </p:extLst>
-          </p:nvPr>
-        </p:nvSpPr>
-        <p:spPr>
-          <a:xfrm>
-            <a:off x="0" y="8313"/>
-            <a:ext cx="9144000" cy="6858000"/>
-          </a:xfrm>
-          <a:prstGeom prst="rect">
-            <a:avLst/>
-          </a:prstGeom>
-          <a:ln>
-            <a:noFill/>
-          </a:ln>
-        </p:spPr>
-        <p:style>
-          <a:lnRef idx="2">
-            <a:schemeClr val="accent1">
-              <a:shade val="50000"/>
-            </a:schemeClr>
-          </a:lnRef>
-          <a:fillRef idx="1">
-            <a:schemeClr val="accent1"/>
-          </a:fillRef>
-          <a:effectRef idx="0">
-            <a:schemeClr val="accent1"/>
-          </a:effectRef>
-          <a:fontRef idx="minor">
-            <a:schemeClr val="lt1"/>
-          </a:fontRef>
-        </p:style>
-        <p:txBody>
-          <a:bodyPr rtlCol="0" anchor="ctr"/>
-          <a:lstStyle/>
-          <a:p>
-            <a:r>
-              <a:t>Understanding Incremental Revenue</a:t>
-            </a:r>
-          </a:p>
-          <a:p>
-            <a:endParaRPr/>
-          </a:p>
-          <a:p>
-            <a:r>
-              <a:t>- Modeled revenue captures only the additional revenue directly generated by marketing spend.</a:t>
-            </a:r>
-          </a:p>
-          <a:p>
-            <a:r>
-              <a:t>- Platform reports often overstate impact by including all influenced revenue.</a:t>
-            </a:r>
-          </a:p>
-          <a:p>
-            <a:r>
-              <a:t>- Explains why modeled revenue &lt; reported revenue.</a:t>
-            </a:r>
-          </a:p>
-        </p:txBody>
-      </p:sp>
-      <p:sp>
-        <p:nvSpPr>
-          <p:cNvPr id="2" name="Title 1"/>
-          <p:cNvSpPr>
-            <a:spLocks noGrp="1"/>
-          </p:cNvSpPr>
-          <p:nvPr>
-            <p:ph type="title"/>
-          </p:nvPr>
-        </p:nvSpPr>
-        <p:spPr>
-          <a:xfrm>
-            <a:off x="359545" y="1070800"/>
-            <a:ext cx="2954766" cy="5583126"/>
-          </a:xfrm>
-        </p:spPr>
-        <p:txBody>
-          <a:bodyPr>
-            <a:normAutofit/>
-          </a:bodyPr>
-          <a:lstStyle/>
-          <a:p>
-            <a:pPr algn="r">
-              <a:lnSpc>
-                <a:spcPct val="90000"/>
-              </a:lnSpc>
-            </a:pPr>
-            <a:r>
-              <a:rPr lang="en-US" sz="3300"/>
-              <a:t>Understanding Incremental Revenue</a:t>
-            </a:r>
-          </a:p>
-        </p:txBody>
-      </p:sp>
-      <p:cxnSp>
-        <p:nvCxnSpPr>
-          <p:cNvPr id="93" name="Straight Connector 92">
-            <a:extLst>
-              <a:ext uri="{FF2B5EF4-FFF2-40B4-BE49-F238E27FC236}">
-                <a16:creationId xmlns:a16="http://schemas.microsoft.com/office/drawing/2014/main" id="{C8F51B3F-8331-4E4A-AE96-D47B1006EEAD}"/>
-              </a:ext>
-              <a:ext uri="{C183D7F6-B498-43B3-948B-1728B52AA6E4}">
-                <adec:decorative xmlns:adec="http://schemas.microsoft.com/office/drawing/2017/decorative" val="1"/>
-              </a:ext>
-            </a:extLst>
-          </p:cNvPr>
-          <p:cNvCxnSpPr>
-            <a:cxnSpLocks noGrp="1" noRot="1" noChangeAspect="1" noMove="1" noResize="1" noEditPoints="1" noAdjustHandles="1" noChangeArrowheads="1" noChangeShapeType="1"/>
-          </p:cNvCxnSpPr>
-          <p:nvPr>
-            <p:extLst>
-              <p:ext uri="{386F3935-93C4-4BCD-93E2-E3B085C9AB24}">
-                <p16:designElem xmlns:p16="http://schemas.microsoft.com/office/powerpoint/2015/main" val="1"/>
-              </p:ext>
-            </p:extLst>
-          </p:nvPr>
-        </p:nvCxnSpPr>
-        <p:spPr>
-          <a:xfrm>
-            <a:off x="3546039" y="1132114"/>
-            <a:ext cx="0" cy="5717573"/>
-          </a:xfrm>
-          <a:prstGeom prst="line">
-            <a:avLst/>
-          </a:prstGeom>
-          <a:ln w="25400" cap="sq">
-            <a:gradFill flip="none" rotWithShape="1">
-              <a:gsLst>
-                <a:gs pos="0">
-                  <a:schemeClr val="accent1"/>
-                </a:gs>
-                <a:gs pos="100000">
-                  <a:schemeClr val="accent2"/>
-                </a:gs>
-              </a:gsLst>
-              <a:lin ang="16200000" scaled="1"/>
-              <a:tileRect/>
-            </a:gradFill>
-            <a:bevel/>
-          </a:ln>
-        </p:spPr>
-        <p:style>
-          <a:lnRef idx="1">
-            <a:schemeClr val="accent1"/>
-          </a:lnRef>
-          <a:fillRef idx="0">
-            <a:schemeClr val="accent1"/>
-          </a:fillRef>
-          <a:effectRef idx="0">
-            <a:schemeClr val="accent1"/>
-          </a:effectRef>
-          <a:fontRef idx="minor">
-            <a:schemeClr val="tx1"/>
-          </a:fontRef>
-        </p:style>
-      </p:cxnSp>
-      <p:graphicFrame>
-        <p:nvGraphicFramePr>
-          <p:cNvPr id="76" name="Content Placeholder 2">
-            <a:extLst>
-              <a:ext uri="{FF2B5EF4-FFF2-40B4-BE49-F238E27FC236}">
-                <a16:creationId xmlns:a16="http://schemas.microsoft.com/office/drawing/2014/main" id="{E12A2D84-9413-83D3-E3A4-B1053B6530A2}"/>
-              </a:ext>
-            </a:extLst>
-          </p:cNvPr>
-          <p:cNvGraphicFramePr>
-            <a:graphicFrameLocks noGrp="1"/>
-          </p:cNvGraphicFramePr>
-          <p:nvPr>
-            <p:ph idx="1"/>
-            <p:extLst>
-              <p:ext uri="{D42A27DB-BD31-4B8C-83A1-F6EECF244321}">
-                <p14:modId xmlns:p14="http://schemas.microsoft.com/office/powerpoint/2010/main" val="3244413005"/>
-              </p:ext>
-            </p:extLst>
-          </p:nvPr>
-        </p:nvGraphicFramePr>
-        <p:xfrm>
-          <a:off x="3831401" y="1070800"/>
-          <a:ext cx="4683949" cy="5589347"/>
-        </p:xfrm>
-        <a:graphic>
-          <a:graphicData uri="http://schemas.openxmlformats.org/drawingml/2006/diagram">
-            <dgm:relIds xmlns:dgm="http://schemas.openxmlformats.org/drawingml/2006/diagram" xmlns:r="http://schemas.openxmlformats.org/officeDocument/2006/relationships" r:dm="rId2" r:lo="rId3" r:qs="rId4" r:cs="rId5"/>
-          </a:graphicData>
-        </a:graphic>
-      </p:graphicFrame>
-    </p:spTree>
-  </p:cSld>
-  <p:clrMapOvr>
-    <a:masterClrMapping/>
-  </p:clrMapOvr>
-</p:sld>
-</file>
-
-<file path=ppt/slides/slide5.xml><?xml version="1.0" encoding="utf-8"?>
-<p:sld xmlns:a="http://schemas.openxmlformats.org/drawingml/2006/main" xmlns:r="http://schemas.openxmlformats.org/officeDocument/2006/relationships" xmlns:p="http://schemas.openxmlformats.org/presentationml/2006/main">
-  <p:cSld>
-    <p:bg>
-      <p:bgPr>
-        <a:solidFill>
-          <a:schemeClr val="bg1"/>
-        </a:solidFill>
-        <a:effectLst/>
-      </p:bgPr>
-    </p:bg>
-    <p:spTree>
-      <p:nvGrpSpPr>
-        <p:cNvPr id="1" name=""/>
-        <p:cNvGrpSpPr/>
-        <p:nvPr/>
-      </p:nvGrpSpPr>
-      <p:grpSpPr>
-        <a:xfrm>
-          <a:off x="0" y="0"/>
-          <a:ext cx="0" cy="0"/>
-          <a:chOff x="0" y="0"/>
-          <a:chExt cx="0" cy="0"/>
-        </a:xfrm>
-      </p:grpSpPr>
-      <p:sp useBgFill="1">
-        <p:nvSpPr>
-          <p:cNvPr id="9" name="Rectangle 8">
-            <a:extLst>
-              <a:ext uri="{FF2B5EF4-FFF2-40B4-BE49-F238E27FC236}">
-                <a16:creationId xmlns:a16="http://schemas.microsoft.com/office/drawing/2014/main" id="{BACC6370-2D7E-4714-9D71-7542949D7D5D}"/>
-              </a:ext>
-              <a:ext uri="{C183D7F6-B498-43B3-948B-1728B52AA6E4}">
-                <adec:decorative xmlns:adec="http://schemas.microsoft.com/office/drawing/2017/decorative" val="1"/>
-              </a:ext>
-            </a:extLst>
-          </p:cNvPr>
-          <p:cNvSpPr>
-            <a:spLocks noGrp="1" noRot="1" noChangeAspect="1" noMove="1" noResize="1" noEditPoints="1" noAdjustHandles="1" noChangeArrowheads="1" noChangeShapeType="1" noTextEdit="1"/>
-          </p:cNvSpPr>
-          <p:nvPr>
-            <p:extLst>
-              <p:ext uri="{386F3935-93C4-4BCD-93E2-E3B085C9AB24}">
-                <p16:designElem xmlns:p16="http://schemas.microsoft.com/office/powerpoint/2015/main" val="1"/>
-              </p:ext>
-            </p:extLst>
-          </p:nvPr>
-        </p:nvSpPr>
-        <p:spPr>
-          <a:xfrm>
-            <a:off x="0" y="0"/>
-            <a:ext cx="9144000" cy="6858000"/>
-          </a:xfrm>
-          <a:prstGeom prst="rect">
-            <a:avLst/>
-          </a:prstGeom>
-          <a:ln w="12700" cap="flat" cmpd="sng" algn="ctr">
-            <a:noFill/>
-            <a:prstDash val="solid"/>
-            <a:miter lim="800000"/>
-          </a:ln>
-          <a:effectLst/>
-          <a:extLst>
-            <a:ext uri="{91240B29-F687-4F45-9708-019B960494DF}">
-              <a14:hiddenLine xmlns:a14="http://schemas.microsoft.com/office/drawing/2010/main" w="12700" cap="flat" cmpd="sng" algn="ctr">
-                <a:solidFill>
-                  <a:schemeClr val="accent1">
-                    <a:shade val="50000"/>
-                  </a:schemeClr>
-                </a:solidFill>
-                <a:prstDash val="solid"/>
-                <a:miter lim="800000"/>
-              </a14:hiddenLine>
-            </a:ext>
-          </a:extLst>
-        </p:spPr>
-        <p:style>
-          <a:lnRef idx="2">
-            <a:schemeClr val="accent1">
-              <a:shade val="50000"/>
-            </a:schemeClr>
-          </a:lnRef>
-          <a:fillRef idx="1">
-            <a:schemeClr val="accent1"/>
-          </a:fillRef>
-          <a:effectRef idx="0">
-            <a:schemeClr val="accent1"/>
-          </a:effectRef>
-          <a:fontRef idx="minor">
-            <a:schemeClr val="lt1"/>
-          </a:fontRef>
-        </p:style>
-        <p:txBody>
-          <a:bodyPr rtlCol="0" anchor="ctr"/>
-          <a:lstStyle/>
-          <a:p>
-            <a:r>
-              <a:t>Diminishing Returns on Marketing Spend</a:t>
-            </a:r>
-          </a:p>
-          <a:p>
-            <a:endParaRPr/>
-          </a:p>
-          <a:p>
-            <a:r>
-              <a:t>- Insight: As spend increases, marginal gains decline.</a:t>
-            </a:r>
-          </a:p>
-          <a:p>
-            <a:r>
-              <a:t>- Findings:</a:t>
-            </a:r>
-          </a:p>
-          <a:p>
-            <a:r>
-              <a:t>  • Channels like Amazon Ads, TikTok, AdWords, StackAdapt show high historical ROI but low incremental ROI.</a:t>
-            </a:r>
-          </a:p>
-          <a:p>
-            <a:r>
-              <a:t>  • Indicates saturation—each additional dollar yields less incremental revenue.</a:t>
-            </a:r>
-          </a:p>
-          <a:p>
-            <a:r>
-              <a:t>- Conclusion: Modeled revenue highlights reduced efficiency even in historically strong channels.</a:t>
-            </a:r>
-          </a:p>
-        </p:txBody>
-      </p:sp>
-      <p:sp>
-        <p:nvSpPr>
-          <p:cNvPr id="11" name="Rectangle 10">
-            <a:extLst>
-              <a:ext uri="{FF2B5EF4-FFF2-40B4-BE49-F238E27FC236}">
-                <a16:creationId xmlns:a16="http://schemas.microsoft.com/office/drawing/2014/main" id="{F68B3F68-107C-434F-AA38-110D5EA91B85}"/>
-              </a:ext>
-              <a:ext uri="{C183D7F6-B498-43B3-948B-1728B52AA6E4}">
-                <adec:decorative xmlns:adec="http://schemas.microsoft.com/office/drawing/2017/decorative" val="1"/>
-              </a:ext>
-            </a:extLst>
-          </p:cNvPr>
-          <p:cNvSpPr>
-            <a:spLocks noGrp="1" noRot="1" noChangeAspect="1" noMove="1" noResize="1" noEditPoints="1" noAdjustHandles="1" noChangeArrowheads="1" noChangeShapeType="1" noTextEdit="1"/>
-          </p:cNvSpPr>
-          <p:nvPr>
-            <p:extLst>
-              <p:ext uri="{386F3935-93C4-4BCD-93E2-E3B085C9AB24}">
-                <p16:designElem xmlns:p16="http://schemas.microsoft.com/office/powerpoint/2015/main" val="1"/>
-              </p:ext>
-            </p:extLst>
-          </p:nvPr>
-        </p:nvSpPr>
-        <p:spPr>
-          <a:xfrm flipH="1">
-            <a:off x="1" y="0"/>
-            <a:ext cx="9143999" cy="1575955"/>
-          </a:xfrm>
-          <a:prstGeom prst="rect">
-            <a:avLst/>
-          </a:prstGeom>
-          <a:gradFill>
-            <a:gsLst>
-              <a:gs pos="0">
-                <a:srgbClr val="000000">
-                  <a:alpha val="96000"/>
-                </a:srgbClr>
-              </a:gs>
-              <a:gs pos="100000">
-                <a:schemeClr val="accent1">
-                  <a:lumMod val="75000"/>
-                </a:schemeClr>
-              </a:gs>
-            </a:gsLst>
-            <a:lin ang="8400000" scaled="0"/>
-          </a:gradFill>
-          <a:ln>
-            <a:noFill/>
-          </a:ln>
-        </p:spPr>
-        <p:style>
-          <a:lnRef idx="2">
-            <a:schemeClr val="accent1">
-              <a:shade val="50000"/>
-            </a:schemeClr>
-          </a:lnRef>
-          <a:fillRef idx="1">
-            <a:schemeClr val="accent1"/>
-          </a:fillRef>
-          <a:effectRef idx="0">
-            <a:schemeClr val="accent1"/>
-          </a:effectRef>
-          <a:fontRef idx="minor">
-            <a:schemeClr val="lt1"/>
-          </a:fontRef>
-        </p:style>
-        <p:txBody>
-          <a:bodyPr rtlCol="0" anchor="ctr"/>
-          <a:lstStyle/>
-          <a:p>
-            <a:pPr algn="ctr"/>
-            <a:endParaRPr lang="en-US"/>
-          </a:p>
-        </p:txBody>
-      </p:sp>
-      <p:sp>
-        <p:nvSpPr>
-          <p:cNvPr id="13" name="Rectangle 12">
-            <a:extLst>
-              <a:ext uri="{FF2B5EF4-FFF2-40B4-BE49-F238E27FC236}">
-                <a16:creationId xmlns:a16="http://schemas.microsoft.com/office/drawing/2014/main" id="{AAD0DBB9-1A4B-4391-81D4-CB19F9AB918A}"/>
-              </a:ext>
-              <a:ext uri="{C183D7F6-B498-43B3-948B-1728B52AA6E4}">
-                <adec:decorative xmlns:adec="http://schemas.microsoft.com/office/drawing/2017/decorative" val="1"/>
-              </a:ext>
-            </a:extLst>
-          </p:cNvPr>
-          <p:cNvSpPr>
-            <a:spLocks noGrp="1" noRot="1" noChangeAspect="1" noMove="1" noResize="1" noEditPoints="1" noAdjustHandles="1" noChangeArrowheads="1" noChangeShapeType="1" noTextEdit="1"/>
-          </p:cNvSpPr>
-          <p:nvPr>
-            <p:extLst>
-              <p:ext uri="{386F3935-93C4-4BCD-93E2-E3B085C9AB24}">
-                <p16:designElem xmlns:p16="http://schemas.microsoft.com/office/powerpoint/2015/main" val="1"/>
-              </p:ext>
-            </p:extLst>
-          </p:nvPr>
-        </p:nvSpPr>
-        <p:spPr>
-          <a:xfrm rot="10800000" flipH="1">
-            <a:off x="6096642" y="0"/>
-            <a:ext cx="3047358" cy="1576412"/>
-          </a:xfrm>
-          <a:prstGeom prst="rect">
-            <a:avLst/>
-          </a:prstGeom>
-          <a:gradFill>
-            <a:gsLst>
-              <a:gs pos="19000">
-                <a:schemeClr val="accent1">
-                  <a:lumMod val="50000"/>
-                  <a:alpha val="68000"/>
-                </a:schemeClr>
-              </a:gs>
-              <a:gs pos="100000">
-                <a:schemeClr val="accent1">
-                  <a:alpha val="79000"/>
-                </a:schemeClr>
-              </a:gs>
-            </a:gsLst>
-            <a:lin ang="19200000" scaled="0"/>
-          </a:gradFill>
-          <a:ln>
-            <a:noFill/>
-          </a:ln>
-        </p:spPr>
-        <p:style>
-          <a:lnRef idx="2">
-            <a:schemeClr val="accent1">
-              <a:shade val="50000"/>
-            </a:schemeClr>
-          </a:lnRef>
-          <a:fillRef idx="1">
-            <a:schemeClr val="accent1"/>
-          </a:fillRef>
-          <a:effectRef idx="0">
-            <a:schemeClr val="accent1"/>
-          </a:effectRef>
-          <a:fontRef idx="minor">
-            <a:schemeClr val="lt1"/>
-          </a:fontRef>
-        </p:style>
-        <p:txBody>
-          <a:bodyPr rtlCol="0" anchor="ctr"/>
-          <a:lstStyle/>
-          <a:p>
-            <a:pPr algn="ctr"/>
-            <a:endParaRPr lang="en-US"/>
-          </a:p>
-        </p:txBody>
-      </p:sp>
-      <p:sp>
-        <p:nvSpPr>
-          <p:cNvPr id="15" name="Rectangle 14">
-            <a:extLst>
-              <a:ext uri="{FF2B5EF4-FFF2-40B4-BE49-F238E27FC236}">
-                <a16:creationId xmlns:a16="http://schemas.microsoft.com/office/drawing/2014/main" id="{063BBA22-50EA-4C4D-BE05-F1CE4E63AA56}"/>
-              </a:ext>
-              <a:ext uri="{C183D7F6-B498-43B3-948B-1728B52AA6E4}">
-                <adec:decorative xmlns:adec="http://schemas.microsoft.com/office/drawing/2017/decorative" val="1"/>
-              </a:ext>
-            </a:extLst>
-          </p:cNvPr>
-          <p:cNvSpPr>
-            <a:spLocks noGrp="1" noRot="1" noChangeAspect="1" noMove="1" noResize="1" noEditPoints="1" noAdjustHandles="1" noChangeArrowheads="1" noChangeShapeType="1" noTextEdit="1"/>
-          </p:cNvSpPr>
-          <p:nvPr>
-            <p:extLst>
-              <p:ext uri="{386F3935-93C4-4BCD-93E2-E3B085C9AB24}">
-                <p16:designElem xmlns:p16="http://schemas.microsoft.com/office/powerpoint/2015/main" val="1"/>
-              </p:ext>
-            </p:extLst>
-          </p:nvPr>
-        </p:nvSpPr>
-        <p:spPr>
-          <a:xfrm rot="5400000">
-            <a:off x="3783777" y="-3783778"/>
-            <a:ext cx="1576446" cy="9144002"/>
-          </a:xfrm>
-          <a:prstGeom prst="rect">
-            <a:avLst/>
-          </a:prstGeom>
-          <a:gradFill>
-            <a:gsLst>
-              <a:gs pos="23000">
-                <a:schemeClr val="accent1">
-                  <a:alpha val="0"/>
-                </a:schemeClr>
-              </a:gs>
-              <a:gs pos="99000">
-                <a:srgbClr val="000000">
-                  <a:alpha val="74000"/>
-                </a:srgbClr>
-              </a:gs>
-            </a:gsLst>
-            <a:lin ang="20400000" scaled="0"/>
-          </a:gradFill>
-          <a:ln>
-            <a:noFill/>
-          </a:ln>
-        </p:spPr>
-        <p:style>
-          <a:lnRef idx="2">
-            <a:schemeClr val="accent1">
-              <a:shade val="50000"/>
-            </a:schemeClr>
-          </a:lnRef>
-          <a:fillRef idx="1">
-            <a:schemeClr val="accent1"/>
-          </a:fillRef>
-          <a:effectRef idx="0">
-            <a:schemeClr val="accent1"/>
-          </a:effectRef>
-          <a:fontRef idx="minor">
-            <a:schemeClr val="lt1"/>
-          </a:fontRef>
-        </p:style>
-        <p:txBody>
-          <a:bodyPr rtlCol="0" anchor="ctr"/>
-          <a:lstStyle/>
-          <a:p>
-            <a:pPr algn="ctr"/>
-            <a:endParaRPr lang="en-US" dirty="0"/>
-          </a:p>
-        </p:txBody>
-      </p:sp>
-      <p:sp>
-        <p:nvSpPr>
-          <p:cNvPr id="2" name="Title 1">
-            <a:extLst>
-              <a:ext uri="{FF2B5EF4-FFF2-40B4-BE49-F238E27FC236}">
-                <a16:creationId xmlns:a16="http://schemas.microsoft.com/office/drawing/2014/main" id="{0353CB4C-C8CC-8E47-8C61-70C286AB9A0C}"/>
-              </a:ext>
-            </a:extLst>
-          </p:cNvPr>
-          <p:cNvSpPr>
-            <a:spLocks noGrp="1"/>
-          </p:cNvSpPr>
-          <p:nvPr>
-            <p:ph type="title"/>
-          </p:nvPr>
-        </p:nvSpPr>
-        <p:spPr>
-          <a:xfrm>
-            <a:off x="1028697" y="348865"/>
-            <a:ext cx="7533018" cy="877729"/>
-          </a:xfrm>
-        </p:spPr>
-        <p:txBody>
-          <a:bodyPr anchor="ctr">
-            <a:normAutofit fontScale="90000"/>
-          </a:bodyPr>
-          <a:lstStyle/>
-          <a:p>
-            <a:r>
-              <a:rPr lang="en-US" sz="3600" dirty="0">
-                <a:solidFill>
-                  <a:schemeClr val="bg1"/>
-                </a:solidFill>
-              </a:rPr>
-              <a:t>Diminishing Returns on Marketing Spend</a:t>
-            </a:r>
-            <a:endParaRPr lang="en-US" sz="3500" dirty="0">
-              <a:solidFill>
-                <a:schemeClr val="bg1"/>
-              </a:solidFill>
-            </a:endParaRPr>
-          </a:p>
-        </p:txBody>
-      </p:sp>
-      <p:graphicFrame>
-        <p:nvGraphicFramePr>
-          <p:cNvPr id="5" name="Content Placeholder 2">
-            <a:extLst>
-              <a:ext uri="{FF2B5EF4-FFF2-40B4-BE49-F238E27FC236}">
-                <a16:creationId xmlns:a16="http://schemas.microsoft.com/office/drawing/2014/main" id="{A7B986E4-2F37-4DFC-58C4-8A75F25E91BD}"/>
-              </a:ext>
-            </a:extLst>
-          </p:cNvPr>
-          <p:cNvGraphicFramePr>
-            <a:graphicFrameLocks noGrp="1"/>
-          </p:cNvGraphicFramePr>
-          <p:nvPr>
-            <p:ph idx="1"/>
-            <p:extLst>
-              <p:ext uri="{D42A27DB-BD31-4B8C-83A1-F6EECF244321}">
-                <p14:modId xmlns:p14="http://schemas.microsoft.com/office/powerpoint/2010/main" val="836685429"/>
-              </p:ext>
-            </p:extLst>
-          </p:nvPr>
-        </p:nvGraphicFramePr>
-        <p:xfrm>
-          <a:off x="483042" y="2112579"/>
-          <a:ext cx="8195871" cy="4192805"/>
-        </p:xfrm>
-        <a:graphic>
-          <a:graphicData uri="http://schemas.openxmlformats.org/drawingml/2006/diagram">
-            <dgm:relIds xmlns:dgm="http://schemas.openxmlformats.org/drawingml/2006/diagram" xmlns:r="http://schemas.openxmlformats.org/officeDocument/2006/relationships" r:dm="rId2" r:lo="rId3" r:qs="rId4" r:cs="rId5"/>
-          </a:graphicData>
-        </a:graphic>
-      </p:graphicFrame>
-    </p:spTree>
-    <p:extLst>
-      <p:ext uri="{BB962C8B-B14F-4D97-AF65-F5344CB8AC3E}">
-        <p14:creationId xmlns:p14="http://schemas.microsoft.com/office/powerpoint/2010/main" val="162346022"/>
-      </p:ext>
-    </p:extLst>
-  </p:cSld>
-  <p:clrMapOvr>
-    <a:masterClrMapping/>
-  </p:clrMapOvr>
-</p:sld>
-</file>
-
-<file path=ppt/slides/slide6.xml><?xml version="1.0" encoding="utf-8"?>
-<p:sld xmlns:a="http://schemas.openxmlformats.org/drawingml/2006/main" xmlns:r="http://schemas.openxmlformats.org/officeDocument/2006/relationships" xmlns:p="http://schemas.openxmlformats.org/presentationml/2006/main">
-  <p:cSld>
-    <p:bg>
-      <p:bgPr>
-        <a:solidFill>
-          <a:schemeClr val="bg1"/>
-        </a:solidFill>
-        <a:effectLst/>
-      </p:bgPr>
-    </p:bg>
-    <p:spTree>
-      <p:nvGrpSpPr>
-        <p:cNvPr id="1" name=""/>
-        <p:cNvGrpSpPr/>
-        <p:nvPr/>
-      </p:nvGrpSpPr>
-      <p:grpSpPr>
-        <a:xfrm>
-          <a:off x="0" y="0"/>
-          <a:ext cx="0" cy="0"/>
-          <a:chOff x="0" y="0"/>
-          <a:chExt cx="0" cy="0"/>
-        </a:xfrm>
-      </p:grpSpPr>
-      <p:sp useBgFill="1">
-        <p:nvSpPr>
-          <p:cNvPr id="10" name="Rectangle 9">
-            <a:extLst>
-              <a:ext uri="{FF2B5EF4-FFF2-40B4-BE49-F238E27FC236}">
-                <a16:creationId xmlns:a16="http://schemas.microsoft.com/office/drawing/2014/main" id="{979E27D9-03C7-44E2-9FF8-15D0C8506AF7}"/>
-              </a:ext>
-              <a:ext uri="{C183D7F6-B498-43B3-948B-1728B52AA6E4}">
-                <adec:decorative xmlns:adec="http://schemas.microsoft.com/office/drawing/2017/decorative" val="1"/>
-              </a:ext>
-            </a:extLst>
-          </p:cNvPr>
-          <p:cNvSpPr>
-            <a:spLocks noGrp="1" noRot="1" noChangeAspect="1" noMove="1" noResize="1" noEditPoints="1" noAdjustHandles="1" noChangeArrowheads="1" noChangeShapeType="1" noTextEdit="1"/>
-          </p:cNvSpPr>
-          <p:nvPr>
-            <p:extLst>
-              <p:ext uri="{386F3935-93C4-4BCD-93E2-E3B085C9AB24}">
-                <p16:designElem xmlns:p16="http://schemas.microsoft.com/office/powerpoint/2015/main" val="1"/>
-              </p:ext>
-            </p:extLst>
-          </p:nvPr>
-        </p:nvSpPr>
-        <p:spPr>
-          <a:xfrm>
-            <a:off x="0" y="0"/>
-            <a:ext cx="9144000" cy="6858000"/>
-          </a:xfrm>
-          <a:prstGeom prst="rect">
-            <a:avLst/>
-          </a:prstGeom>
-          <a:ln w="12700" cap="flat" cmpd="sng" algn="ctr">
-            <a:noFill/>
-            <a:prstDash val="solid"/>
-            <a:miter lim="800000"/>
-          </a:ln>
-          <a:effectLst/>
-          <a:extLst>
-            <a:ext uri="{91240B29-F687-4F45-9708-019B960494DF}">
-              <a14:hiddenLine xmlns:a14="http://schemas.microsoft.com/office/drawing/2010/main" w="12700" cap="flat" cmpd="sng" algn="ctr">
-                <a:solidFill>
-                  <a:schemeClr val="accent1">
-                    <a:shade val="50000"/>
-                  </a:schemeClr>
-                </a:solidFill>
-                <a:prstDash val="solid"/>
-                <a:miter lim="800000"/>
-              </a14:hiddenLine>
-            </a:ext>
-          </a:extLst>
-        </p:spPr>
-        <p:style>
-          <a:lnRef idx="2">
-            <a:schemeClr val="accent1">
-              <a:shade val="50000"/>
-            </a:schemeClr>
-          </a:lnRef>
-          <a:fillRef idx="1">
-            <a:schemeClr val="accent1"/>
-          </a:fillRef>
-          <a:effectRef idx="0">
-            <a:schemeClr val="accent1"/>
-          </a:effectRef>
-          <a:fontRef idx="minor">
-            <a:schemeClr val="lt1"/>
-          </a:fontRef>
-        </p:style>
-        <p:txBody>
-          <a:bodyPr rtlCol="0" anchor="ctr"/>
-          <a:lstStyle/>
-          <a:p>
-            <a:r>
-              <a:t>Collinearity and Overlap (VIF Analysis)</a:t>
-            </a:r>
-          </a:p>
-          <a:p>
-            <a:endParaRPr/>
-          </a:p>
-          <a:p>
-            <a:r>
-              <a:t>- High VIF (&gt;10) = Strong overlap across channel spend.</a:t>
-            </a:r>
-          </a:p>
-          <a:p>
-            <a:r>
-              <a:t>- Overlap reduces modeled contributions since multiple channels share credit.</a:t>
-            </a:r>
-          </a:p>
-          <a:p>
-            <a:r>
-              <a:t>- Optimizing requires balancing spend across overlapping channels.</a:t>
-            </a:r>
-          </a:p>
-        </p:txBody>
-      </p:sp>
-      <p:sp>
-        <p:nvSpPr>
-          <p:cNvPr id="2" name="Title 1"/>
-          <p:cNvSpPr>
-            <a:spLocks noGrp="1"/>
-          </p:cNvSpPr>
-          <p:nvPr>
-            <p:ph type="title"/>
-          </p:nvPr>
-        </p:nvSpPr>
-        <p:spPr>
-          <a:xfrm>
-            <a:off x="852297" y="502021"/>
-            <a:ext cx="3719703" cy="1642969"/>
-          </a:xfrm>
-        </p:spPr>
-        <p:txBody>
-          <a:bodyPr anchor="b">
-            <a:normAutofit/>
-          </a:bodyPr>
-          <a:lstStyle/>
-          <a:p>
-            <a:r>
-              <a:rPr lang="en-US" sz="3500"/>
-              <a:t>Total ROI vs Marginal ROI</a:t>
-            </a:r>
-          </a:p>
-        </p:txBody>
-      </p:sp>
-      <p:sp>
-        <p:nvSpPr>
-          <p:cNvPr id="3" name="Content Placeholder 2"/>
-          <p:cNvSpPr>
-            <a:spLocks noGrp="1"/>
-          </p:cNvSpPr>
-          <p:nvPr>
-            <p:ph idx="1"/>
-          </p:nvPr>
-        </p:nvSpPr>
-        <p:spPr>
-          <a:xfrm>
-            <a:off x="852297" y="2418408"/>
-            <a:ext cx="3719703" cy="3522569"/>
-          </a:xfrm>
-        </p:spPr>
-        <p:txBody>
-          <a:bodyPr anchor="t">
-            <a:normAutofit/>
-          </a:bodyPr>
-          <a:lstStyle/>
-          <a:p>
-            <a:pPr>
-              <a:defRPr sz="1800"/>
-            </a:pPr>
-            <a:r>
-              <a:rPr lang="en-US" sz="1600" dirty="0"/>
-              <a:t>Channels like StackAdapt, Amazon Ads, TikTok Ads, AdWords show high Total ROI but low Marginal ROI</a:t>
-            </a:r>
-          </a:p>
-          <a:p>
-            <a:pPr>
-              <a:defRPr sz="1800"/>
-            </a:pPr>
-            <a:r>
-              <a:rPr lang="en-US" sz="1600" dirty="0"/>
-              <a:t>Indicates diminishing returns as channels become saturated</a:t>
-            </a:r>
-          </a:p>
-          <a:p>
-            <a:pPr>
-              <a:defRPr sz="1800"/>
-            </a:pPr>
-            <a:r>
-              <a:rPr lang="en-US" sz="1600" dirty="0"/>
-              <a:t>Future spend in these channels yields weaker incremental gains</a:t>
-            </a:r>
-          </a:p>
-          <a:p>
-            <a:endParaRPr lang="en-US" sz="1700" dirty="0"/>
-          </a:p>
-        </p:txBody>
-      </p:sp>
-      <p:pic>
-        <p:nvPicPr>
-          <p:cNvPr id="5" name="Picture 4" descr="A graph with colored dots&#10;&#10;AI-generated content may be incorrect.">
-            <a:extLst>
-              <a:ext uri="{FF2B5EF4-FFF2-40B4-BE49-F238E27FC236}">
-                <a16:creationId xmlns:a16="http://schemas.microsoft.com/office/drawing/2014/main" id="{8A1BDF40-6701-CB5D-495F-39FFF309D26B}"/>
-              </a:ext>
-            </a:extLst>
-          </p:cNvPr>
-          <p:cNvPicPr>
-            <a:picLocks noChangeAspect="1"/>
-          </p:cNvPicPr>
-          <p:nvPr/>
-        </p:nvPicPr>
-        <p:blipFill>
-          <a:blip r:embed="rId2"/>
-          <a:stretch>
-            <a:fillRect/>
-          </a:stretch>
-        </p:blipFill>
-        <p:spPr>
-          <a:xfrm>
-            <a:off x="4884331" y="1759334"/>
-            <a:ext cx="3900767" cy="2925574"/>
-          </a:xfrm>
-          <a:prstGeom prst="rect">
-            <a:avLst/>
-          </a:prstGeom>
-        </p:spPr>
-      </p:pic>
-      <p:sp>
-        <p:nvSpPr>
-          <p:cNvPr id="12" name="Rectangle 11">
-            <a:extLst>
-              <a:ext uri="{FF2B5EF4-FFF2-40B4-BE49-F238E27FC236}">
-                <a16:creationId xmlns:a16="http://schemas.microsoft.com/office/drawing/2014/main" id="{EEBF1590-3B36-48EE-A89D-3B6F3CB256AB}"/>
-              </a:ext>
-              <a:ext uri="{C183D7F6-B498-43B3-948B-1728B52AA6E4}">
-                <adec:decorative xmlns:adec="http://schemas.microsoft.com/office/drawing/2017/decorative" val="1"/>
-              </a:ext>
-            </a:extLst>
-          </p:cNvPr>
-          <p:cNvSpPr>
-            <a:spLocks noGrp="1" noRot="1" noChangeAspect="1" noMove="1" noResize="1" noEditPoints="1" noAdjustHandles="1" noChangeArrowheads="1" noChangeShapeType="1" noTextEdit="1"/>
-          </p:cNvSpPr>
-          <p:nvPr>
-            <p:extLst>
-              <p:ext uri="{386F3935-93C4-4BCD-93E2-E3B085C9AB24}">
-                <p16:designElem xmlns:p16="http://schemas.microsoft.com/office/powerpoint/2015/main" val="1"/>
-              </p:ext>
-            </p:extLst>
-          </p:nvPr>
-        </p:nvSpPr>
-        <p:spPr>
-          <a:xfrm rot="10800000" flipH="1">
-            <a:off x="0" y="6400799"/>
-            <a:ext cx="9144000" cy="456773"/>
-          </a:xfrm>
-          <a:prstGeom prst="rect">
-            <a:avLst/>
-          </a:prstGeom>
-          <a:gradFill>
-            <a:gsLst>
-              <a:gs pos="0">
-                <a:schemeClr val="accent1"/>
-              </a:gs>
-              <a:gs pos="78000">
-                <a:srgbClr val="000000"/>
-              </a:gs>
-            </a:gsLst>
-            <a:lin ang="2400000" scaled="0"/>
-          </a:gradFill>
-          <a:ln>
-            <a:noFill/>
-          </a:ln>
-        </p:spPr>
-        <p:style>
-          <a:lnRef idx="2">
-            <a:schemeClr val="accent1">
-              <a:shade val="50000"/>
-            </a:schemeClr>
-          </a:lnRef>
-          <a:fillRef idx="1">
-            <a:schemeClr val="accent1"/>
-          </a:fillRef>
-          <a:effectRef idx="0">
-            <a:schemeClr val="accent1"/>
-          </a:effectRef>
-          <a:fontRef idx="minor">
-            <a:schemeClr val="lt1"/>
-          </a:fontRef>
-        </p:style>
-        <p:txBody>
-          <a:bodyPr rtlCol="0" anchor="ctr"/>
-          <a:lstStyle/>
-          <a:p>
-            <a:pPr algn="ctr"/>
-            <a:endParaRPr lang="en-US"/>
-          </a:p>
-        </p:txBody>
-      </p:sp>
-      <p:sp>
-        <p:nvSpPr>
-          <p:cNvPr id="40" name="Rectangle 39">
-            <a:extLst>
-              <a:ext uri="{FF2B5EF4-FFF2-40B4-BE49-F238E27FC236}">
-                <a16:creationId xmlns:a16="http://schemas.microsoft.com/office/drawing/2014/main" id="{AC8F6C8C-AB5A-4548-942D-E3FD40ACBC49}"/>
-              </a:ext>
-              <a:ext uri="{C183D7F6-B498-43B3-948B-1728B52AA6E4}">
-                <adec:decorative xmlns:adec="http://schemas.microsoft.com/office/drawing/2017/decorative" val="1"/>
-              </a:ext>
-            </a:extLst>
-          </p:cNvPr>
-          <p:cNvSpPr>
-            <a:spLocks noGrp="1" noRot="1" noChangeAspect="1" noMove="1" noResize="1" noEditPoints="1" noAdjustHandles="1" noChangeArrowheads="1" noChangeShapeType="1" noTextEdit="1"/>
-          </p:cNvSpPr>
-          <p:nvPr>
-            <p:extLst>
-              <p:ext uri="{386F3935-93C4-4BCD-93E2-E3B085C9AB24}">
-                <p16:designElem xmlns:p16="http://schemas.microsoft.com/office/powerpoint/2015/main" val="1"/>
-              </p:ext>
-            </p:extLst>
-          </p:nvPr>
-        </p:nvSpPr>
-        <p:spPr>
-          <a:xfrm flipH="1">
-            <a:off x="3028950" y="6400799"/>
-            <a:ext cx="6115048" cy="456772"/>
-          </a:xfrm>
-          <a:prstGeom prst="rect">
-            <a:avLst/>
-          </a:prstGeom>
-          <a:gradFill>
-            <a:gsLst>
-              <a:gs pos="0">
-                <a:srgbClr val="000000">
-                  <a:alpha val="63000"/>
-                </a:srgbClr>
-              </a:gs>
-              <a:gs pos="100000">
-                <a:schemeClr val="accent1">
-                  <a:lumMod val="75000"/>
-                </a:schemeClr>
-              </a:gs>
-            </a:gsLst>
-            <a:lin ang="13800000" scaled="0"/>
-          </a:gradFill>
-          <a:ln>
-            <a:noFill/>
-          </a:ln>
-        </p:spPr>
-        <p:style>
-          <a:lnRef idx="2">
-            <a:schemeClr val="accent1">
-              <a:shade val="50000"/>
-            </a:schemeClr>
-          </a:lnRef>
-          <a:fillRef idx="1">
-            <a:schemeClr val="accent1"/>
-          </a:fillRef>
-          <a:effectRef idx="0">
-            <a:schemeClr val="accent1"/>
-          </a:effectRef>
-          <a:fontRef idx="minor">
-            <a:schemeClr val="lt1"/>
-          </a:fontRef>
-        </p:style>
-        <p:txBody>
-          <a:bodyPr rtlCol="0" anchor="ctr"/>
-          <a:lstStyle/>
-          <a:p>
-            <a:pPr algn="ctr"/>
-            <a:endParaRPr lang="en-US"/>
-          </a:p>
-        </p:txBody>
-      </p:sp>
-    </p:spTree>
-  </p:cSld>
-  <p:clrMapOvr>
-    <a:masterClrMapping/>
-  </p:clrMapOvr>
-</p:sld>
-</file>
-
-<file path=ppt/slides/slide7.xml><?xml version="1.0" encoding="utf-8"?>
-<p:sld xmlns:a="http://schemas.openxmlformats.org/drawingml/2006/main" xmlns:r="http://schemas.openxmlformats.org/officeDocument/2006/relationships" xmlns:p="http://schemas.openxmlformats.org/presentationml/2006/main">
-  <p:cSld>
-    <p:bg>
-      <p:bgPr>
-        <a:solidFill>
-          <a:schemeClr val="bg1"/>
-        </a:solidFill>
-        <a:effectLst/>
-      </p:bgPr>
-    </p:bg>
-    <p:spTree>
-      <p:nvGrpSpPr>
-        <p:cNvPr id="1" name=""/>
-        <p:cNvGrpSpPr/>
-        <p:nvPr/>
-      </p:nvGrpSpPr>
-      <p:grpSpPr>
-        <a:xfrm>
-          <a:off x="0" y="0"/>
-          <a:ext cx="0" cy="0"/>
-          <a:chOff x="0" y="0"/>
-          <a:chExt cx="0" cy="0"/>
-        </a:xfrm>
-      </p:grpSpPr>
-      <p:sp>
-        <p:nvSpPr>
-          <p:cNvPr id="55" name="Freeform 6">
-            <a:extLst>
-              <a:ext uri="{FF2B5EF4-FFF2-40B4-BE49-F238E27FC236}">
-                <a16:creationId xmlns:a16="http://schemas.microsoft.com/office/drawing/2014/main" id="{69D184B2-2226-4E31-BCCB-444330767440}"/>
-              </a:ext>
-              <a:ext uri="{C183D7F6-B498-43B3-948B-1728B52AA6E4}">
-                <adec:decorative xmlns:adec="http://schemas.microsoft.com/office/drawing/2017/decorative" val="1"/>
-              </a:ext>
-            </a:extLst>
-          </p:cNvPr>
-          <p:cNvSpPr>
-            <a:spLocks noGrp="1" noRot="1" noChangeAspect="1" noMove="1" noResize="1" noEditPoints="1" noAdjustHandles="1" noChangeArrowheads="1" noChangeShapeType="1" noTextEdit="1"/>
-          </p:cNvSpPr>
-          <p:nvPr>
-            <p:extLst>
-              <p:ext uri="{386F3935-93C4-4BCD-93E2-E3B085C9AB24}">
-                <p16:designElem xmlns:p16="http://schemas.microsoft.com/office/powerpoint/2015/main" val="1"/>
-              </p:ext>
-            </p:extLst>
-          </p:nvPr>
-        </p:nvSpPr>
-        <p:spPr bwMode="auto">
-          <a:xfrm>
-            <a:off x="8338899" y="918266"/>
-            <a:ext cx="529596" cy="5863534"/>
-          </a:xfrm>
-          <a:custGeom>
-            <a:avLst/>
-            <a:gdLst>
-              <a:gd name="T0" fmla="*/ 414 w 414"/>
-              <a:gd name="T1" fmla="*/ 2447 h 2447"/>
-              <a:gd name="T2" fmla="*/ 0 w 414"/>
-              <a:gd name="T3" fmla="*/ 2247 h 2447"/>
-              <a:gd name="T4" fmla="*/ 0 w 414"/>
-              <a:gd name="T5" fmla="*/ 0 h 2447"/>
-              <a:gd name="T6" fmla="*/ 414 w 414"/>
-              <a:gd name="T7" fmla="*/ 200 h 2447"/>
-              <a:gd name="T8" fmla="*/ 414 w 414"/>
-              <a:gd name="T9" fmla="*/ 2447 h 2447"/>
-            </a:gdLst>
-            <a:ahLst/>
-            <a:cxnLst>
-              <a:cxn ang="0">
-                <a:pos x="T0" y="T1"/>
-              </a:cxn>
-              <a:cxn ang="0">
-                <a:pos x="T2" y="T3"/>
-              </a:cxn>
-              <a:cxn ang="0">
-                <a:pos x="T4" y="T5"/>
-              </a:cxn>
-              <a:cxn ang="0">
-                <a:pos x="T6" y="T7"/>
-              </a:cxn>
-              <a:cxn ang="0">
-                <a:pos x="T8" y="T9"/>
-              </a:cxn>
-            </a:cxnLst>
-            <a:rect l="0" t="0" r="r" b="b"/>
-            <a:pathLst>
-              <a:path w="414" h="2447">
-                <a:moveTo>
-                  <a:pt x="414" y="2447"/>
-                </a:moveTo>
-                <a:lnTo>
-                  <a:pt x="0" y="2247"/>
-                </a:lnTo>
-                <a:lnTo>
-                  <a:pt x="0" y="0"/>
-                </a:lnTo>
-                <a:lnTo>
-                  <a:pt x="414" y="200"/>
-                </a:lnTo>
-                <a:lnTo>
-                  <a:pt x="414" y="2447"/>
-                </a:lnTo>
-                <a:close/>
-              </a:path>
-            </a:pathLst>
-          </a:custGeom>
-          <a:solidFill>
-            <a:schemeClr val="accent1">
-              <a:lumMod val="75000"/>
-            </a:schemeClr>
-          </a:solidFill>
-          <a:ln>
-            <a:noFill/>
-          </a:ln>
-        </p:spPr>
-        <p:txBody>
-          <a:bodyPr vert="horz" wrap="square" lIns="91440" tIns="45720" rIns="91440" bIns="45720" numCol="1" anchor="t" anchorCtr="0" compatLnSpc="1">
-            <a:prstTxWarp prst="textNoShape">
-              <a:avLst/>
-            </a:prstTxWarp>
-          </a:bodyPr>
-          <a:lstStyle/>
-          <a:p>
-            <a:endParaRPr lang="en-US"/>
-          </a:p>
-        </p:txBody>
-      </p:sp>
-      <p:sp>
-        <p:nvSpPr>
-          <p:cNvPr id="56" name="Freeform 7">
-            <a:extLst>
-              <a:ext uri="{FF2B5EF4-FFF2-40B4-BE49-F238E27FC236}">
-                <a16:creationId xmlns:a16="http://schemas.microsoft.com/office/drawing/2014/main" id="{1AC4D4E3-486A-464A-8EC8-D44881097267}"/>
-              </a:ext>
-              <a:ext uri="{C183D7F6-B498-43B3-948B-1728B52AA6E4}">
-                <adec:decorative xmlns:adec="http://schemas.microsoft.com/office/drawing/2017/decorative" val="1"/>
-              </a:ext>
-            </a:extLst>
-          </p:cNvPr>
-          <p:cNvSpPr>
-            <a:spLocks noGrp="1" noRot="1" noChangeAspect="1" noMove="1" noResize="1" noEditPoints="1" noAdjustHandles="1" noChangeArrowheads="1" noChangeShapeType="1" noTextEdit="1"/>
-          </p:cNvSpPr>
-          <p:nvPr>
-            <p:extLst>
-              <p:ext uri="{386F3935-93C4-4BCD-93E2-E3B085C9AB24}">
-                <p16:designElem xmlns:p16="http://schemas.microsoft.com/office/powerpoint/2015/main" val="1"/>
-              </p:ext>
-            </p:extLst>
-          </p:nvPr>
-        </p:nvSpPr>
-        <p:spPr bwMode="auto">
-          <a:xfrm>
-            <a:off x="8338409" y="643467"/>
-            <a:ext cx="315230" cy="5668919"/>
-          </a:xfrm>
-          <a:custGeom>
-            <a:avLst/>
-            <a:gdLst>
-              <a:gd name="T0" fmla="*/ 209 w 209"/>
-              <a:gd name="T1" fmla="*/ 2246 h 2358"/>
-              <a:gd name="T2" fmla="*/ 0 w 209"/>
-              <a:gd name="T3" fmla="*/ 2358 h 2358"/>
-              <a:gd name="T4" fmla="*/ 0 w 209"/>
-              <a:gd name="T5" fmla="*/ 111 h 2358"/>
-              <a:gd name="T6" fmla="*/ 209 w 209"/>
-              <a:gd name="T7" fmla="*/ 0 h 2358"/>
-              <a:gd name="T8" fmla="*/ 209 w 209"/>
-              <a:gd name="T9" fmla="*/ 2246 h 2358"/>
-            </a:gdLst>
-            <a:ahLst/>
-            <a:cxnLst>
-              <a:cxn ang="0">
-                <a:pos x="T0" y="T1"/>
-              </a:cxn>
-              <a:cxn ang="0">
-                <a:pos x="T2" y="T3"/>
-              </a:cxn>
-              <a:cxn ang="0">
-                <a:pos x="T4" y="T5"/>
-              </a:cxn>
-              <a:cxn ang="0">
-                <a:pos x="T6" y="T7"/>
-              </a:cxn>
-              <a:cxn ang="0">
-                <a:pos x="T8" y="T9"/>
-              </a:cxn>
-            </a:cxnLst>
-            <a:rect l="0" t="0" r="r" b="b"/>
-            <a:pathLst>
-              <a:path w="209" h="2358">
-                <a:moveTo>
-                  <a:pt x="209" y="2246"/>
-                </a:moveTo>
-                <a:lnTo>
-                  <a:pt x="0" y="2358"/>
-                </a:lnTo>
-                <a:lnTo>
-                  <a:pt x="0" y="111"/>
-                </a:lnTo>
-                <a:lnTo>
-                  <a:pt x="209" y="0"/>
-                </a:lnTo>
-                <a:lnTo>
-                  <a:pt x="209" y="2246"/>
-                </a:lnTo>
-                <a:close/>
-              </a:path>
-            </a:pathLst>
-          </a:custGeom>
-          <a:solidFill>
-            <a:schemeClr val="accent1">
-              <a:lumMod val="50000"/>
-            </a:schemeClr>
-          </a:solidFill>
-          <a:ln>
-            <a:noFill/>
-          </a:ln>
-        </p:spPr>
-        <p:txBody>
-          <a:bodyPr vert="horz" wrap="square" lIns="91440" tIns="45720" rIns="91440" bIns="45720" numCol="1" anchor="t" anchorCtr="0" compatLnSpc="1">
-            <a:prstTxWarp prst="textNoShape">
-              <a:avLst/>
-            </a:prstTxWarp>
-          </a:bodyPr>
-          <a:lstStyle/>
-          <a:p>
-            <a:endParaRPr lang="en-US"/>
-          </a:p>
-        </p:txBody>
-      </p:sp>
-      <p:sp>
-        <p:nvSpPr>
-          <p:cNvPr id="57" name="Rectangle 56">
-            <a:extLst>
-              <a:ext uri="{FF2B5EF4-FFF2-40B4-BE49-F238E27FC236}">
-                <a16:creationId xmlns:a16="http://schemas.microsoft.com/office/drawing/2014/main" id="{864DE13E-58EB-4475-B79C-0D4FC651239B}"/>
-              </a:ext>
-              <a:ext uri="{C183D7F6-B498-43B3-948B-1728B52AA6E4}">
-                <adec:decorative xmlns:adec="http://schemas.microsoft.com/office/drawing/2017/decorative" val="1"/>
-              </a:ext>
-            </a:extLst>
-          </p:cNvPr>
-          <p:cNvSpPr>
-            <a:spLocks noGrp="1" noRot="1" noChangeAspect="1" noMove="1" noResize="1" noEditPoints="1" noAdjustHandles="1" noChangeArrowheads="1" noChangeShapeType="1" noTextEdit="1"/>
-          </p:cNvSpPr>
-          <p:nvPr>
-            <p:extLst>
-              <p:ext uri="{386F3935-93C4-4BCD-93E2-E3B085C9AB24}">
-                <p16:designElem xmlns:p16="http://schemas.microsoft.com/office/powerpoint/2015/main" val="1"/>
-              </p:ext>
-            </p:extLst>
-          </p:nvPr>
-        </p:nvSpPr>
-        <p:spPr bwMode="auto">
-          <a:xfrm>
-            <a:off x="478790" y="643467"/>
-            <a:ext cx="8200127" cy="5391944"/>
-          </a:xfrm>
-          <a:prstGeom prst="rect">
-            <a:avLst/>
-          </a:prstGeom>
-          <a:solidFill>
-            <a:srgbClr val="FFFFFF"/>
-          </a:solidFill>
-          <a:ln w="12700">
-            <a:solidFill>
-              <a:schemeClr val="accent1"/>
-            </a:solidFill>
-            <a:miter lim="800000"/>
-          </a:ln>
-        </p:spPr>
-        <p:txBody>
-          <a:bodyPr vert="horz" wrap="square" lIns="91440" tIns="45720" rIns="91440" bIns="45720" numCol="1" anchor="t" anchorCtr="0" compatLnSpc="1">
-            <a:prstTxWarp prst="textNoShape">
-              <a:avLst/>
-            </a:prstTxWarp>
-          </a:bodyPr>
-          <a:lstStyle/>
-          <a:p>
-            <a:endParaRPr lang="en-US"/>
-          </a:p>
-        </p:txBody>
-      </p:sp>
-      <p:pic>
-        <p:nvPicPr>
-          <p:cNvPr id="5" name="Content Placeholder 4" descr="A graph of blue bars&#10;&#10;AI-generated content may be incorrect.">
-            <a:extLst>
-              <a:ext uri="{FF2B5EF4-FFF2-40B4-BE49-F238E27FC236}">
-                <a16:creationId xmlns:a16="http://schemas.microsoft.com/office/drawing/2014/main" id="{4B42E3D9-E31A-57F7-5628-C5DCA5F8D0F4}"/>
-              </a:ext>
-            </a:extLst>
-          </p:cNvPr>
-          <p:cNvPicPr>
-            <a:picLocks noGrp="1" noChangeAspect="1"/>
-          </p:cNvPicPr>
-          <p:nvPr>
-            <p:ph idx="1"/>
-          </p:nvPr>
-        </p:nvPicPr>
-        <p:blipFill>
-          <a:blip r:embed="rId2"/>
-          <a:stretch>
-            <a:fillRect/>
-          </a:stretch>
-        </p:blipFill>
-        <p:spPr>
-          <a:xfrm>
-            <a:off x="1150376" y="1286934"/>
-            <a:ext cx="6843248" cy="4105949"/>
-          </a:xfrm>
-          <a:prstGeom prst="rect">
-            <a:avLst/>
-          </a:prstGeom>
-        </p:spPr>
-      </p:pic>
-    </p:spTree>
-    <p:extLst>
-      <p:ext uri="{BB962C8B-B14F-4D97-AF65-F5344CB8AC3E}">
-        <p14:creationId xmlns:p14="http://schemas.microsoft.com/office/powerpoint/2010/main" val="3272432687"/>
-      </p:ext>
-    </p:extLst>
-  </p:cSld>
-  <p:clrMapOvr>
-    <a:masterClrMapping/>
-  </p:clrMapOvr>
-</p:sld>
-</file>
-
-<file path=ppt/slides/slide8.xml><?xml version="1.0" encoding="utf-8"?>
-<p:sld xmlns:a="http://schemas.openxmlformats.org/drawingml/2006/main" xmlns:r="http://schemas.openxmlformats.org/officeDocument/2006/relationships" xmlns:p="http://schemas.openxmlformats.org/presentationml/2006/main">
-  <p:cSld>
-    <p:bg>
-      <p:bgPr>
-        <a:solidFill>
-          <a:schemeClr val="bg1"/>
-        </a:solidFill>
-        <a:effectLst/>
-      </p:bgPr>
-    </p:bg>
-    <p:spTree>
-      <p:nvGrpSpPr>
-        <p:cNvPr id="1" name=""/>
-        <p:cNvGrpSpPr/>
-        <p:nvPr/>
-      </p:nvGrpSpPr>
-      <p:grpSpPr>
-        <a:xfrm>
-          <a:off x="0" y="0"/>
-          <a:ext cx="0" cy="0"/>
-          <a:chOff x="0" y="0"/>
-          <a:chExt cx="0" cy="0"/>
-        </a:xfrm>
-      </p:grpSpPr>
-      <p:sp useBgFill="1">
-        <p:nvSpPr>
-          <p:cNvPr id="41" name="Rectangle 40">
-            <a:extLst>
-              <a:ext uri="{FF2B5EF4-FFF2-40B4-BE49-F238E27FC236}">
-                <a16:creationId xmlns:a16="http://schemas.microsoft.com/office/drawing/2014/main" id="{7FEAE179-C525-48F3-AD47-0E9E2B6F2E2E}"/>
-              </a:ext>
-              <a:ext uri="{C183D7F6-B498-43B3-948B-1728B52AA6E4}">
-                <adec:decorative xmlns:adec="http://schemas.microsoft.com/office/drawing/2017/decorative" val="1"/>
-              </a:ext>
-            </a:extLst>
-          </p:cNvPr>
-          <p:cNvSpPr>
-            <a:spLocks noGrp="1" noRot="1" noChangeAspect="1" noMove="1" noResize="1" noEditPoints="1" noAdjustHandles="1" noChangeArrowheads="1" noChangeShapeType="1" noTextEdit="1"/>
-          </p:cNvSpPr>
-          <p:nvPr>
-            <p:extLst>
-              <p:ext uri="{386F3935-93C4-4BCD-93E2-E3B085C9AB24}">
-                <p16:designElem xmlns:p16="http://schemas.microsoft.com/office/powerpoint/2015/main" val="1"/>
-              </p:ext>
-            </p:extLst>
-          </p:nvPr>
-        </p:nvSpPr>
-        <p:spPr>
-          <a:xfrm>
-            <a:off x="0" y="0"/>
-            <a:ext cx="9143999" cy="6857365"/>
-          </a:xfrm>
-          <a:prstGeom prst="rect">
-            <a:avLst/>
-          </a:prstGeom>
-          <a:ln>
-            <a:noFill/>
-          </a:ln>
-        </p:spPr>
-        <p:style>
-          <a:lnRef idx="2">
-            <a:schemeClr val="accent1">
-              <a:shade val="50000"/>
-            </a:schemeClr>
-          </a:lnRef>
-          <a:fillRef idx="1">
-            <a:schemeClr val="accent1"/>
-          </a:fillRef>
-          <a:effectRef idx="0">
-            <a:schemeClr val="accent1"/>
-          </a:effectRef>
-          <a:fontRef idx="minor">
-            <a:schemeClr val="lt1"/>
-          </a:fontRef>
-        </p:style>
-        <p:txBody>
-          <a:bodyPr rtlCol="0" anchor="ctr"/>
-          <a:lstStyle/>
-          <a:p>
-            <a:r>
-              <a:t>Lagged Effects of Spend</a:t>
-            </a:r>
-          </a:p>
-          <a:p>
-            <a:endParaRPr/>
-          </a:p>
-          <a:p>
-            <a:r>
-              <a:t>- Positive lag: Impact appears with delay (awareness, brand campaigns).</a:t>
-            </a:r>
-          </a:p>
-          <a:p>
-            <a:r>
-              <a:t>- Negative lag: Revenue changes precede spend adjustments (reverse causality).</a:t>
-            </a:r>
-          </a:p>
-          <a:p>
-            <a:r>
-              <a:t>- Takeaway: Distinguish short-term vs. delayed channel impact when planning budgets.</a:t>
-            </a:r>
-          </a:p>
-        </p:txBody>
-      </p:sp>
-      <p:sp>
-        <p:nvSpPr>
-          <p:cNvPr id="8" name="Rectangle 1">
-            <a:extLst>
-              <a:ext uri="{FF2B5EF4-FFF2-40B4-BE49-F238E27FC236}">
-                <a16:creationId xmlns:a16="http://schemas.microsoft.com/office/drawing/2014/main" id="{99CE5530-6C8E-A95B-0E56-893FC040F251}"/>
-              </a:ext>
-            </a:extLst>
-          </p:cNvPr>
-          <p:cNvSpPr>
-            <a:spLocks noGrp="1" noChangeArrowheads="1"/>
-          </p:cNvSpPr>
-          <p:nvPr>
-            <p:ph type="title"/>
-          </p:nvPr>
-        </p:nvSpPr>
-        <p:spPr bwMode="auto">
-          <a:xfrm>
-            <a:off x="388416" y="4883544"/>
-            <a:ext cx="2907065" cy="1556907"/>
-          </a:xfrm>
-          <a:prstGeom prst="rect">
-            <a:avLst/>
-          </a:prstGeom>
-          <a:extLst>
-            <a:ext uri="{909E8E84-426E-40DD-AFC4-6F175D3DCCD1}">
-              <a14:hiddenFill xmlns:a14="http://schemas.microsoft.com/office/drawing/2010/main">
-                <a:solidFill>
-                  <a:schemeClr val="accent1"/>
-                </a:solidFill>
-              </a14:hiddenFill>
-            </a:ext>
-            <a:ext uri="{91240B29-F687-4F45-9708-019B960494DF}">
-              <a14:hiddenLine xmlns:a14="http://schemas.microsoft.com/office/drawing/2010/main" w="9525">
-                <a:solidFill>
-                  <a:schemeClr val="tx1"/>
-                </a:solidFill>
-                <a:miter lim="800000"/>
-                <a:headEnd/>
-                <a:tailEnd/>
-              </a14:hiddenLine>
-            </a:ext>
-            <a:ext uri="{AF507438-7753-43E0-B8FC-AC1667EBCBE1}">
-              <a14:hiddenEffects xmlns:a14="http://schemas.microsoft.com/office/drawing/2010/main">
-                <a:effectLst>
-                  <a:outerShdw dist="35921" dir="2700000" algn="ctr" rotWithShape="0">
-                    <a:schemeClr val="bg2"/>
-                  </a:outerShdw>
-                </a:effectLst>
-              </a14:hiddenEffects>
-            </a:ext>
-          </a:extLst>
-        </p:spPr>
-        <p:txBody>
-          <a:bodyPr vert="horz" lIns="91440" tIns="45720" rIns="91440" bIns="45720" numCol="1" anchor="ctr" anchorCtr="0" compatLnSpc="1">
-            <a:prstTxWarp prst="textNoShape">
-              <a:avLst/>
-            </a:prstTxWarp>
-            <a:normAutofit/>
-          </a:bodyPr>
-          <a:lstStyle/>
-          <a:p>
-            <a:pPr marL="0" marR="0" lvl="0" indent="0" defTabSz="914400" rtl="0" eaLnBrk="0" fontAlgn="base" latinLnBrk="0" hangingPunct="0">
-              <a:spcBef>
-                <a:spcPct val="0"/>
-              </a:spcBef>
-              <a:spcAft>
-                <a:spcPct val="0"/>
-              </a:spcAft>
-              <a:buClrTx/>
-              <a:buSzTx/>
-              <a:tabLst/>
-            </a:pPr>
-            <a:r>
-              <a:rPr kumimoji="0" lang="en-US" altLang="en-US" sz="2800" b="0" i="0" u="none" strike="noStrike" cap="none" normalizeH="0" baseline="0" dirty="0">
-                <a:ln>
-                  <a:noFill/>
-                </a:ln>
-                <a:effectLst/>
-                <a:latin typeface="Arial" panose="020B0604020202020204" pitchFamily="34" charset="0"/>
-              </a:rPr>
-              <a:t>Diminishing Returns</a:t>
-            </a:r>
-          </a:p>
-        </p:txBody>
-      </p:sp>
-      <p:sp>
-        <p:nvSpPr>
-          <p:cNvPr id="43" name="Rectangle 42">
-            <a:extLst>
-              <a:ext uri="{FF2B5EF4-FFF2-40B4-BE49-F238E27FC236}">
-                <a16:creationId xmlns:a16="http://schemas.microsoft.com/office/drawing/2014/main" id="{95C8260E-968F-44E8-A823-ABB431311926}"/>
-              </a:ext>
-              <a:ext uri="{C183D7F6-B498-43B3-948B-1728B52AA6E4}">
-                <adec:decorative xmlns:adec="http://schemas.microsoft.com/office/drawing/2017/decorative" val="1"/>
-              </a:ext>
-            </a:extLst>
-          </p:cNvPr>
-          <p:cNvSpPr>
-            <a:spLocks noGrp="1" noRot="1" noChangeAspect="1" noMove="1" noResize="1" noEditPoints="1" noAdjustHandles="1" noChangeArrowheads="1" noChangeShapeType="1" noTextEdit="1"/>
-          </p:cNvSpPr>
-          <p:nvPr>
-            <p:extLst>
-              <p:ext uri="{386F3935-93C4-4BCD-93E2-E3B085C9AB24}">
-                <p16:designElem xmlns:p16="http://schemas.microsoft.com/office/powerpoint/2015/main" val="1"/>
-              </p:ext>
-            </p:extLst>
-          </p:nvPr>
-        </p:nvSpPr>
-        <p:spPr>
-          <a:xfrm>
-            <a:off x="0" y="0"/>
-            <a:ext cx="9144000" cy="865848"/>
-          </a:xfrm>
-          <a:prstGeom prst="rect">
-            <a:avLst/>
-          </a:prstGeom>
-          <a:solidFill>
-            <a:schemeClr val="accent4"/>
-          </a:solidFill>
-          <a:ln>
-            <a:noFill/>
-          </a:ln>
-        </p:spPr>
-        <p:style>
-          <a:lnRef idx="2">
-            <a:schemeClr val="accent1">
-              <a:shade val="50000"/>
-            </a:schemeClr>
-          </a:lnRef>
-          <a:fillRef idx="1">
-            <a:schemeClr val="accent1"/>
-          </a:fillRef>
-          <a:effectRef idx="0">
-            <a:schemeClr val="accent1"/>
-          </a:effectRef>
-          <a:fontRef idx="minor">
-            <a:schemeClr val="lt1"/>
-          </a:fontRef>
-        </p:style>
-        <p:txBody>
-          <a:bodyPr rtlCol="0" anchor="ctr"/>
-          <a:lstStyle/>
-          <a:p>
-            <a:pPr algn="ctr"/>
-            <a:endParaRPr lang="en-US"/>
-          </a:p>
-        </p:txBody>
-      </p:sp>
-      <p:sp>
-        <p:nvSpPr>
-          <p:cNvPr id="45" name="Rectangle 44">
-            <a:extLst>
-              <a:ext uri="{FF2B5EF4-FFF2-40B4-BE49-F238E27FC236}">
-                <a16:creationId xmlns:a16="http://schemas.microsoft.com/office/drawing/2014/main" id="{2C1BBA94-3F40-40AA-8BB9-E69E25E537C1}"/>
-              </a:ext>
-              <a:ext uri="{C183D7F6-B498-43B3-948B-1728B52AA6E4}">
-                <adec:decorative xmlns:adec="http://schemas.microsoft.com/office/drawing/2017/decorative" val="1"/>
-              </a:ext>
-            </a:extLst>
-          </p:cNvPr>
-          <p:cNvSpPr>
-            <a:spLocks noGrp="1" noRot="1" noChangeAspect="1" noMove="1" noResize="1" noEditPoints="1" noAdjustHandles="1" noChangeArrowheads="1" noChangeShapeType="1" noTextEdit="1"/>
-          </p:cNvSpPr>
-          <p:nvPr>
-            <p:extLst>
-              <p:ext uri="{386F3935-93C4-4BCD-93E2-E3B085C9AB24}">
-                <p16:designElem xmlns:p16="http://schemas.microsoft.com/office/powerpoint/2015/main" val="1"/>
-              </p:ext>
-            </p:extLst>
-          </p:nvPr>
-        </p:nvSpPr>
-        <p:spPr>
-          <a:xfrm>
-            <a:off x="388416" y="0"/>
-            <a:ext cx="8423809" cy="4588184"/>
-          </a:xfrm>
-          <a:prstGeom prst="rect">
-            <a:avLst/>
-          </a:prstGeom>
-          <a:solidFill>
-            <a:schemeClr val="bg1"/>
-          </a:solidFill>
-          <a:ln>
-            <a:noFill/>
-          </a:ln>
-          <a:effectLst>
-            <a:outerShdw blurRad="139700" dist="127000" dir="5400000" algn="t" rotWithShape="0">
-              <a:prstClr val="black">
-                <a:alpha val="15000"/>
-              </a:prstClr>
-            </a:outerShdw>
-          </a:effectLst>
-        </p:spPr>
-        <p:style>
-          <a:lnRef idx="2">
-            <a:schemeClr val="accent1">
-              <a:shade val="50000"/>
-            </a:schemeClr>
-          </a:lnRef>
-          <a:fillRef idx="1">
-            <a:schemeClr val="accent1"/>
-          </a:fillRef>
-          <a:effectRef idx="0">
-            <a:schemeClr val="accent1"/>
-          </a:effectRef>
-          <a:fontRef idx="minor">
-            <a:schemeClr val="lt1"/>
-          </a:fontRef>
-        </p:style>
-        <p:txBody>
-          <a:bodyPr rtlCol="0" anchor="ctr"/>
-          <a:lstStyle/>
-          <a:p>
-            <a:pPr algn="ctr"/>
-            <a:endParaRPr lang="en-US"/>
-          </a:p>
-        </p:txBody>
-      </p:sp>
-      <p:pic>
-        <p:nvPicPr>
-          <p:cNvPr id="15" name="Picture 14" descr="A graph of a graph&#10;&#10;AI-generated content may be incorrect.">
-            <a:extLst>
-              <a:ext uri="{FF2B5EF4-FFF2-40B4-BE49-F238E27FC236}">
-                <a16:creationId xmlns:a16="http://schemas.microsoft.com/office/drawing/2014/main" id="{50E2F948-8509-E471-40F2-5D5A2C8B6C04}"/>
-              </a:ext>
-            </a:extLst>
-          </p:cNvPr>
-          <p:cNvPicPr>
-            <a:picLocks noChangeAspect="1"/>
-          </p:cNvPicPr>
-          <p:nvPr/>
-        </p:nvPicPr>
-        <p:blipFill>
-          <a:blip r:embed="rId2"/>
-          <a:srcRect b="530"/>
-          <a:stretch>
-            <a:fillRect/>
-          </a:stretch>
-        </p:blipFill>
-        <p:spPr>
-          <a:xfrm>
-            <a:off x="719403" y="364142"/>
-            <a:ext cx="7777234" cy="3867993"/>
-          </a:xfrm>
-          <a:prstGeom prst="rect">
-            <a:avLst/>
-          </a:prstGeom>
-        </p:spPr>
-      </p:pic>
-      <p:sp>
-        <p:nvSpPr>
-          <p:cNvPr id="47" name="Rectangle 46">
-            <a:extLst>
-              <a:ext uri="{FF2B5EF4-FFF2-40B4-BE49-F238E27FC236}">
-                <a16:creationId xmlns:a16="http://schemas.microsoft.com/office/drawing/2014/main" id="{FE43805F-24A6-46A4-B19B-54F28347355C}"/>
-              </a:ext>
-              <a:ext uri="{C183D7F6-B498-43B3-948B-1728B52AA6E4}">
-                <adec:decorative xmlns:adec="http://schemas.microsoft.com/office/drawing/2017/decorative" val="1"/>
-              </a:ext>
-            </a:extLst>
-          </p:cNvPr>
-          <p:cNvSpPr>
-            <a:spLocks noGrp="1" noRot="1" noChangeAspect="1" noMove="1" noResize="1" noEditPoints="1" noAdjustHandles="1" noChangeArrowheads="1" noChangeShapeType="1" noTextEdit="1"/>
-          </p:cNvSpPr>
-          <p:nvPr>
-            <p:extLst>
-              <p:ext uri="{386F3935-93C4-4BCD-93E2-E3B085C9AB24}">
-                <p16:designElem xmlns:p16="http://schemas.microsoft.com/office/powerpoint/2015/main" val="1"/>
-              </p:ext>
-            </p:extLst>
-          </p:nvPr>
-        </p:nvSpPr>
-        <p:spPr>
-          <a:xfrm rot="5400000" flipH="1">
-            <a:off x="2817950" y="5666847"/>
-            <a:ext cx="1463040" cy="34289"/>
-          </a:xfrm>
-          <a:prstGeom prst="rect">
-            <a:avLst/>
-          </a:prstGeom>
-          <a:solidFill>
-            <a:schemeClr val="accent4"/>
-          </a:solidFill>
-          <a:ln>
-            <a:noFill/>
-          </a:ln>
-        </p:spPr>
-        <p:style>
-          <a:lnRef idx="2">
-            <a:schemeClr val="accent1">
-              <a:shade val="50000"/>
-            </a:schemeClr>
-          </a:lnRef>
-          <a:fillRef idx="1">
-            <a:schemeClr val="accent1"/>
-          </a:fillRef>
-          <a:effectRef idx="0">
-            <a:schemeClr val="accent1"/>
-          </a:effectRef>
-          <a:fontRef idx="minor">
-            <a:schemeClr val="lt1"/>
-          </a:fontRef>
-        </p:style>
-        <p:txBody>
-          <a:bodyPr rtlCol="0" anchor="ctr"/>
-          <a:lstStyle/>
-          <a:p>
-            <a:pPr algn="ctr"/>
-            <a:endParaRPr lang="en-US"/>
-          </a:p>
-        </p:txBody>
-      </p:sp>
-      <p:sp>
-        <p:nvSpPr>
-          <p:cNvPr id="3" name="Content Placeholder 2"/>
-          <p:cNvSpPr>
-            <a:spLocks noGrp="1"/>
-          </p:cNvSpPr>
-          <p:nvPr>
-            <p:ph idx="1"/>
-          </p:nvPr>
-        </p:nvSpPr>
-        <p:spPr>
-          <a:xfrm>
-            <a:off x="3872039" y="4883544"/>
-            <a:ext cx="4940186" cy="1556907"/>
-          </a:xfrm>
-        </p:spPr>
-        <p:txBody>
-          <a:bodyPr anchor="ctr">
-            <a:normAutofit/>
-          </a:bodyPr>
-          <a:lstStyle/>
-          <a:p>
-            <a:pPr>
-              <a:lnSpc>
-                <a:spcPct val="90000"/>
-              </a:lnSpc>
-            </a:pPr>
-            <a:r>
-              <a:rPr lang="en-US" sz="1000" dirty="0"/>
-              <a:t>Advertising platforms report total revenue claims. Modeled revenue focuses on incremental lift. Extra dollars spent on saturated channels yield smaller gains.</a:t>
-            </a:r>
-          </a:p>
-          <a:p>
-            <a:pPr>
-              <a:lnSpc>
-                <a:spcPct val="90000"/>
-              </a:lnSpc>
-            </a:pPr>
-            <a:r>
-              <a:rPr lang="en-US" sz="1000" dirty="0"/>
-              <a:t>Some channels have much higher total spend than others.</a:t>
-            </a:r>
-          </a:p>
-          <a:p>
-            <a:pPr>
-              <a:lnSpc>
-                <a:spcPct val="90000"/>
-              </a:lnSpc>
-            </a:pPr>
-            <a:r>
-              <a:rPr lang="en-US" sz="1000" dirty="0"/>
-              <a:t>High spend levels often coincide with diminishing marginal returns—each additional dollar spent generates less incremental revenue.</a:t>
-            </a:r>
-          </a:p>
-          <a:p>
-            <a:pPr>
-              <a:lnSpc>
-                <a:spcPct val="90000"/>
-              </a:lnSpc>
-            </a:pPr>
-            <a:r>
-              <a:rPr lang="en-US" sz="1000" dirty="0"/>
-              <a:t>Channels with large spend may still have high total ROI historically, but the model shows current incremental efficiency is lower.</a:t>
-            </a:r>
-          </a:p>
-          <a:p>
-            <a:pPr>
-              <a:lnSpc>
-                <a:spcPct val="90000"/>
-              </a:lnSpc>
-            </a:pPr>
-            <a:r>
-              <a:rPr lang="en-US" sz="1000" dirty="0"/>
-              <a:t>This helps explain why modeled revenue &lt; reported revenue for these channels.</a:t>
-            </a:r>
-          </a:p>
-        </p:txBody>
-      </p:sp>
-    </p:spTree>
-  </p:cSld>
-  <p:clrMapOvr>
-    <a:masterClrMapping/>
-  </p:clrMapOvr>
-</p:sld>
-</file>
-
 <file path=ppt/slides/slide9.xml><?xml version="1.0" encoding="utf-8"?>
 <p:sld xmlns:a="http://schemas.openxmlformats.org/drawingml/2006/main" xmlns:r="http://schemas.openxmlformats.org/officeDocument/2006/relationships" xmlns:p="http://schemas.openxmlformats.org/presentationml/2006/main">
   <p:cSld>

--- a/Marketing_ROI_Analysis.pptx
+++ b/Marketing_ROI_Analysis.pptx
@@ -8,13 +8,14 @@
     <p:sldId id="256" r:id="rId2"/>
     <p:sldId id="257" r:id="rId3"/>
     <p:sldId id="258" r:id="rId4"/>
-    <p:sldId id="268" r:id="rId5"/>
-    <p:sldId id="259" r:id="rId6"/>
+    <p:sldId id="259" r:id="rId5"/>
+    <p:sldId id="260" r:id="rId6"/>
     <p:sldId id="267" r:id="rId7"/>
-    <p:sldId id="260" r:id="rId8"/>
+    <p:sldId id="268" r:id="rId8"/>
     <p:sldId id="264" r:id="rId9"/>
     <p:sldId id="261" r:id="rId10"/>
     <p:sldId id="263" r:id="rId11"/>
+    <p:sldId id="269" r:id="rId12"/>
   </p:sldIdLst>
   <p:sldSz cx="9144000" cy="6858000" type="screen4x3"/>
   <p:notesSz cx="6858000" cy="9144000"/>
@@ -13957,6 +13958,356 @@
 </p:sld>
 </file>
 
+<file path=ppt/slides/slide11.xml><?xml version="1.0" encoding="utf-8"?>
+<p:sld xmlns:a="http://schemas.openxmlformats.org/drawingml/2006/main" xmlns:r="http://schemas.openxmlformats.org/officeDocument/2006/relationships" xmlns:p="http://schemas.openxmlformats.org/presentationml/2006/main">
+  <p:cSld>
+    <p:bg>
+      <p:bgPr>
+        <a:solidFill>
+          <a:schemeClr val="bg1"/>
+        </a:solidFill>
+        <a:effectLst/>
+      </p:bgPr>
+    </p:bg>
+    <p:spTree>
+      <p:nvGrpSpPr>
+        <p:cNvPr id="1" name=""/>
+        <p:cNvGrpSpPr/>
+        <p:nvPr/>
+      </p:nvGrpSpPr>
+      <p:grpSpPr>
+        <a:xfrm>
+          <a:off x="0" y="0"/>
+          <a:ext cx="0" cy="0"/>
+          <a:chOff x="0" y="0"/>
+          <a:chExt cx="0" cy="0"/>
+        </a:xfrm>
+      </p:grpSpPr>
+      <p:sp>
+        <p:nvSpPr>
+          <p:cNvPr id="2" name="Title 1">
+            <a:extLst>
+              <a:ext uri="{FF2B5EF4-FFF2-40B4-BE49-F238E27FC236}">
+                <a16:creationId xmlns:a16="http://schemas.microsoft.com/office/drawing/2014/main" id="{8C7C996B-9BFD-A5E3-759B-F030877FF4CA}"/>
+              </a:ext>
+            </a:extLst>
+          </p:cNvPr>
+          <p:cNvSpPr>
+            <a:spLocks noGrp="1"/>
+          </p:cNvSpPr>
+          <p:nvPr>
+            <p:ph type="title"/>
+          </p:nvPr>
+        </p:nvSpPr>
+        <p:spPr>
+          <a:xfrm>
+            <a:off x="840699" y="687480"/>
+            <a:ext cx="5605629" cy="994172"/>
+          </a:xfrm>
+        </p:spPr>
+        <p:txBody>
+          <a:bodyPr>
+            <a:normAutofit/>
+          </a:bodyPr>
+          <a:lstStyle/>
+          <a:p>
+            <a:r>
+              <a:rPr lang="en-US" sz="3850"/>
+              <a:t>Key Takeaways</a:t>
+            </a:r>
+          </a:p>
+        </p:txBody>
+      </p:sp>
+      <p:sp>
+        <p:nvSpPr>
+          <p:cNvPr id="23" name="Content Placeholder 2">
+            <a:extLst>
+              <a:ext uri="{FF2B5EF4-FFF2-40B4-BE49-F238E27FC236}">
+                <a16:creationId xmlns:a16="http://schemas.microsoft.com/office/drawing/2014/main" id="{52A3065D-A150-30A5-810D-F2EA197356B0}"/>
+              </a:ext>
+            </a:extLst>
+          </p:cNvPr>
+          <p:cNvSpPr>
+            <a:spLocks noGrp="1"/>
+          </p:cNvSpPr>
+          <p:nvPr>
+            <p:ph idx="1"/>
+          </p:nvPr>
+        </p:nvSpPr>
+        <p:spPr>
+          <a:xfrm>
+            <a:off x="852321" y="2227943"/>
+            <a:ext cx="5033221" cy="3788227"/>
+          </a:xfrm>
+        </p:spPr>
+        <p:txBody>
+          <a:bodyPr anchor="ctr">
+            <a:normAutofit/>
+          </a:bodyPr>
+          <a:lstStyle/>
+          <a:p>
+            <a:pPr>
+              <a:lnSpc>
+                <a:spcPct val="90000"/>
+              </a:lnSpc>
+            </a:pPr>
+            <a:r>
+              <a:rPr lang="en-US" sz="1900" b="1"/>
+              <a:t>Reported revenue = influence</a:t>
+            </a:r>
+            <a:br>
+              <a:rPr lang="en-US" sz="1900"/>
+            </a:br>
+            <a:r>
+              <a:rPr lang="en-US" sz="1900"/>
+              <a:t>(broad attribution claimed by platforms)</a:t>
+            </a:r>
+          </a:p>
+          <a:p>
+            <a:pPr>
+              <a:lnSpc>
+                <a:spcPct val="90000"/>
+              </a:lnSpc>
+            </a:pPr>
+            <a:r>
+              <a:rPr lang="en-US" sz="1900" b="1" dirty="0"/>
+              <a:t>Modeled revenue = causality</a:t>
+            </a:r>
+            <a:br>
+              <a:rPr lang="en-US" sz="1900" dirty="0"/>
+            </a:br>
+            <a:r>
+              <a:rPr lang="en-US" sz="1900" dirty="0"/>
+              <a:t>(isolates incremental lift directly caused by spend)</a:t>
+            </a:r>
+          </a:p>
+          <a:p>
+            <a:pPr>
+              <a:lnSpc>
+                <a:spcPct val="90000"/>
+              </a:lnSpc>
+            </a:pPr>
+            <a:r>
+              <a:rPr lang="en-US" sz="1900" b="1" dirty="0"/>
+              <a:t>Sharpen budget decisions</a:t>
+            </a:r>
+            <a:r>
+              <a:rPr lang="en-US" sz="1900" dirty="0"/>
+              <a:t> by focusing on incremental and marginal ROI</a:t>
+            </a:r>
+          </a:p>
+          <a:p>
+            <a:pPr>
+              <a:lnSpc>
+                <a:spcPct val="90000"/>
+              </a:lnSpc>
+            </a:pPr>
+            <a:r>
+              <a:rPr lang="en-US" sz="1900" b="1" dirty="0"/>
+              <a:t>Business takeaway:</a:t>
+            </a:r>
+            <a:r>
+              <a:rPr lang="en-US" sz="1900" dirty="0"/>
+              <a:t> modeled view guides where to invest next</a:t>
+            </a:r>
+          </a:p>
+          <a:p>
+            <a:pPr>
+              <a:lnSpc>
+                <a:spcPct val="90000"/>
+              </a:lnSpc>
+            </a:pPr>
+            <a:r>
+              <a:rPr lang="en-US" sz="1900" b="1" dirty="0"/>
+              <a:t>Data science focus:</a:t>
+            </a:r>
+            <a:r>
+              <a:rPr lang="en-US" sz="1900" dirty="0"/>
+              <a:t> refine the model (saturation, lag, overlap) for reliable recommendations</a:t>
+            </a:r>
+          </a:p>
+        </p:txBody>
+      </p:sp>
+      <p:sp>
+        <p:nvSpPr>
+          <p:cNvPr id="24" name="Rectangle 23">
+            <a:extLst>
+              <a:ext uri="{FF2B5EF4-FFF2-40B4-BE49-F238E27FC236}">
+                <a16:creationId xmlns:a16="http://schemas.microsoft.com/office/drawing/2014/main" id="{59A309A7-1751-4ABE-A3C1-EEC40366AD89}"/>
+              </a:ext>
+              <a:ext uri="{C183D7F6-B498-43B3-948B-1728B52AA6E4}">
+                <adec:decorative xmlns:adec="http://schemas.microsoft.com/office/drawing/2017/decorative" val="1"/>
+              </a:ext>
+            </a:extLst>
+          </p:cNvPr>
+          <p:cNvSpPr>
+            <a:spLocks noGrp="1" noRot="1" noChangeAspect="1" noMove="1" noResize="1" noEditPoints="1" noAdjustHandles="1" noChangeArrowheads="1" noChangeShapeType="1" noTextEdit="1"/>
+          </p:cNvSpPr>
+          <p:nvPr>
+            <p:extLst>
+              <p:ext uri="{386F3935-93C4-4BCD-93E2-E3B085C9AB24}">
+                <p16:designElem xmlns:p16="http://schemas.microsoft.com/office/powerpoint/2015/main" val="1"/>
+              </p:ext>
+            </p:extLst>
+          </p:nvPr>
+        </p:nvSpPr>
+        <p:spPr>
+          <a:xfrm>
+            <a:off x="7189435" y="0"/>
+            <a:ext cx="1954565" cy="6858000"/>
+          </a:xfrm>
+          <a:prstGeom prst="rect">
+            <a:avLst/>
+          </a:prstGeom>
+          <a:solidFill>
+            <a:schemeClr val="accent1"/>
+          </a:solidFill>
+          <a:ln>
+            <a:noFill/>
+          </a:ln>
+        </p:spPr>
+        <p:style>
+          <a:lnRef idx="2">
+            <a:schemeClr val="accent1">
+              <a:shade val="50000"/>
+            </a:schemeClr>
+          </a:lnRef>
+          <a:fillRef idx="1">
+            <a:schemeClr val="accent1"/>
+          </a:fillRef>
+          <a:effectRef idx="0">
+            <a:schemeClr val="accent1"/>
+          </a:effectRef>
+          <a:fontRef idx="minor">
+            <a:schemeClr val="lt1"/>
+          </a:fontRef>
+        </p:style>
+        <p:txBody>
+          <a:bodyPr rtlCol="0" anchor="ctr"/>
+          <a:lstStyle/>
+          <a:p>
+            <a:pPr algn="ctr"/>
+            <a:endParaRPr lang="en-US" sz="1350"/>
+          </a:p>
+        </p:txBody>
+      </p:sp>
+      <p:sp>
+        <p:nvSpPr>
+          <p:cNvPr id="25" name="Oval 24">
+            <a:extLst>
+              <a:ext uri="{FF2B5EF4-FFF2-40B4-BE49-F238E27FC236}">
+                <a16:creationId xmlns:a16="http://schemas.microsoft.com/office/drawing/2014/main" id="{967D8EB6-EAE1-4F9C-B398-83321E287204}"/>
+              </a:ext>
+              <a:ext uri="{C183D7F6-B498-43B3-948B-1728B52AA6E4}">
+                <adec:decorative xmlns:adec="http://schemas.microsoft.com/office/drawing/2017/decorative" val="1"/>
+              </a:ext>
+            </a:extLst>
+          </p:cNvPr>
+          <p:cNvSpPr>
+            <a:spLocks noGrp="1" noRot="1" noChangeAspect="1" noMove="1" noResize="1" noEditPoints="1" noAdjustHandles="1" noChangeArrowheads="1" noChangeShapeType="1" noTextEdit="1"/>
+          </p:cNvSpPr>
+          <p:nvPr>
+            <p:extLst>
+              <p:ext uri="{386F3935-93C4-4BCD-93E2-E3B085C9AB24}">
+                <p16:designElem xmlns:p16="http://schemas.microsoft.com/office/powerpoint/2015/main" val="1"/>
+              </p:ext>
+            </p:extLst>
+          </p:nvPr>
+        </p:nvSpPr>
+        <p:spPr>
+          <a:xfrm>
+            <a:off x="6129567" y="2369132"/>
+            <a:ext cx="2119736" cy="2119736"/>
+          </a:xfrm>
+          <a:prstGeom prst="ellipse">
+            <a:avLst/>
+          </a:prstGeom>
+          <a:solidFill>
+            <a:srgbClr val="FFFFFF"/>
+          </a:solidFill>
+          <a:ln w="22225">
+            <a:solidFill>
+              <a:schemeClr val="accent1"/>
+            </a:solidFill>
+          </a:ln>
+        </p:spPr>
+        <p:style>
+          <a:lnRef idx="2">
+            <a:schemeClr val="accent1">
+              <a:shade val="50000"/>
+            </a:schemeClr>
+          </a:lnRef>
+          <a:fillRef idx="1">
+            <a:schemeClr val="accent1"/>
+          </a:fillRef>
+          <a:effectRef idx="0">
+            <a:schemeClr val="accent1"/>
+          </a:effectRef>
+          <a:fontRef idx="minor">
+            <a:schemeClr val="lt1"/>
+          </a:fontRef>
+        </p:style>
+        <p:txBody>
+          <a:bodyPr rtlCol="0" anchor="ctr"/>
+          <a:lstStyle/>
+          <a:p>
+            <a:pPr algn="ctr"/>
+            <a:endParaRPr lang="en-US" sz="1350"/>
+          </a:p>
+        </p:txBody>
+      </p:sp>
+      <p:pic>
+        <p:nvPicPr>
+          <p:cNvPr id="7" name="Graphic 6" descr="Statistics">
+            <a:extLst>
+              <a:ext uri="{FF2B5EF4-FFF2-40B4-BE49-F238E27FC236}">
+                <a16:creationId xmlns:a16="http://schemas.microsoft.com/office/drawing/2014/main" id="{917E38C1-29C3-E10F-3358-8B1EB3CE032B}"/>
+              </a:ext>
+            </a:extLst>
+          </p:cNvPr>
+          <p:cNvPicPr>
+            <a:picLocks noChangeAspect="1"/>
+          </p:cNvPicPr>
+          <p:nvPr/>
+        </p:nvPicPr>
+        <p:blipFill>
+          <a:blip r:embed="rId2">
+            <a:extLst>
+              <a:ext uri="{28A0092B-C50C-407E-A947-70E740481C1C}">
+                <a14:useLocalDpi xmlns:a14="http://schemas.microsoft.com/office/drawing/2010/main" val="0"/>
+              </a:ext>
+              <a:ext uri="{96DAC541-7B7A-43D3-8B79-37D633B846F1}">
+                <asvg:svgBlip xmlns:asvg="http://schemas.microsoft.com/office/drawing/2016/SVG/main" r:embed="rId3"/>
+              </a:ext>
+            </a:extLst>
+          </a:blip>
+          <a:stretch>
+            <a:fillRect/>
+          </a:stretch>
+        </p:blipFill>
+        <p:spPr>
+          <a:xfrm>
+            <a:off x="6624964" y="2865141"/>
+            <a:ext cx="1143455" cy="1143455"/>
+          </a:xfrm>
+          <a:prstGeom prst="rect">
+            <a:avLst/>
+          </a:prstGeom>
+        </p:spPr>
+      </p:pic>
+    </p:spTree>
+    <p:extLst>
+      <p:ext uri="{BB962C8B-B14F-4D97-AF65-F5344CB8AC3E}">
+        <p14:creationId xmlns:p14="http://schemas.microsoft.com/office/powerpoint/2010/main" val="2318462877"/>
+      </p:ext>
+    </p:extLst>
+  </p:cSld>
+  <p:clrMapOvr>
+    <a:masterClrMapping/>
+  </p:clrMapOvr>
+</p:sld>
+</file>
+
 <file path=ppt/slides/slide2.xml><?xml version="1.0" encoding="utf-8"?>
 <p:sld xmlns:a="http://schemas.openxmlformats.org/drawingml/2006/main" xmlns:r="http://schemas.openxmlformats.org/officeDocument/2006/relationships" xmlns:p="http://schemas.openxmlformats.org/presentationml/2006/main">
   <p:cSld>
@@ -14634,450 +14985,6 @@
       </p:grpSpPr>
       <p:sp useBgFill="1">
         <p:nvSpPr>
-          <p:cNvPr id="9" name="Rectangle 8">
-            <a:extLst>
-              <a:ext uri="{FF2B5EF4-FFF2-40B4-BE49-F238E27FC236}">
-                <a16:creationId xmlns:a16="http://schemas.microsoft.com/office/drawing/2014/main" id="{BACC6370-2D7E-4714-9D71-7542949D7D5D}"/>
-              </a:ext>
-              <a:ext uri="{C183D7F6-B498-43B3-948B-1728B52AA6E4}">
-                <adec:decorative xmlns:adec="http://schemas.microsoft.com/office/drawing/2017/decorative" val="1"/>
-              </a:ext>
-            </a:extLst>
-          </p:cNvPr>
-          <p:cNvSpPr>
-            <a:spLocks noGrp="1" noRot="1" noChangeAspect="1" noMove="1" noResize="1" noEditPoints="1" noAdjustHandles="1" noChangeArrowheads="1" noChangeShapeType="1" noTextEdit="1"/>
-          </p:cNvSpPr>
-          <p:nvPr>
-            <p:extLst>
-              <p:ext uri="{386F3935-93C4-4BCD-93E2-E3B085C9AB24}">
-                <p16:designElem xmlns:p16="http://schemas.microsoft.com/office/powerpoint/2015/main" val="1"/>
-              </p:ext>
-            </p:extLst>
-          </p:nvPr>
-        </p:nvSpPr>
-        <p:spPr>
-          <a:xfrm>
-            <a:off x="0" y="0"/>
-            <a:ext cx="9144000" cy="6858000"/>
-          </a:xfrm>
-          <a:prstGeom prst="rect">
-            <a:avLst/>
-          </a:prstGeom>
-          <a:ln w="12700" cap="flat" cmpd="sng" algn="ctr">
-            <a:noFill/>
-            <a:prstDash val="solid"/>
-            <a:miter lim="800000"/>
-          </a:ln>
-          <a:effectLst/>
-          <a:extLst>
-            <a:ext uri="{91240B29-F687-4F45-9708-019B960494DF}">
-              <a14:hiddenLine xmlns:a14="http://schemas.microsoft.com/office/drawing/2010/main" w="12700" cap="flat" cmpd="sng" algn="ctr">
-                <a:solidFill>
-                  <a:schemeClr val="accent1">
-                    <a:shade val="50000"/>
-                  </a:schemeClr>
-                </a:solidFill>
-                <a:prstDash val="solid"/>
-                <a:miter lim="800000"/>
-              </a14:hiddenLine>
-            </a:ext>
-          </a:extLst>
-        </p:spPr>
-        <p:style>
-          <a:lnRef idx="2">
-            <a:schemeClr val="accent1">
-              <a:shade val="50000"/>
-            </a:schemeClr>
-          </a:lnRef>
-          <a:fillRef idx="1">
-            <a:schemeClr val="accent1"/>
-          </a:fillRef>
-          <a:effectRef idx="0">
-            <a:schemeClr val="accent1"/>
-          </a:effectRef>
-          <a:fontRef idx="minor">
-            <a:schemeClr val="lt1"/>
-          </a:fontRef>
-        </p:style>
-        <p:txBody>
-          <a:bodyPr rtlCol="0" anchor="ctr"/>
-          <a:lstStyle/>
-          <a:p>
-            <a:r>
-              <a:t>Diminishing Returns on Marketing Spend</a:t>
-            </a:r>
-          </a:p>
-          <a:p>
-            <a:endParaRPr/>
-          </a:p>
-          <a:p>
-            <a:r>
-              <a:t>- Insight: As spend increases, marginal gains decline.</a:t>
-            </a:r>
-          </a:p>
-          <a:p>
-            <a:r>
-              <a:t>- Findings:</a:t>
-            </a:r>
-          </a:p>
-          <a:p>
-            <a:r>
-              <a:t>  • Channels like Amazon Ads, TikTok, AdWords, StackAdapt show high historical ROI but low incremental ROI.</a:t>
-            </a:r>
-          </a:p>
-          <a:p>
-            <a:r>
-              <a:t>  • Indicates saturation—each additional dollar yields less incremental revenue.</a:t>
-            </a:r>
-          </a:p>
-          <a:p>
-            <a:r>
-              <a:t>- Conclusion: Modeled revenue highlights reduced efficiency even in historically strong channels.</a:t>
-            </a:r>
-          </a:p>
-        </p:txBody>
-      </p:sp>
-      <p:sp>
-        <p:nvSpPr>
-          <p:cNvPr id="11" name="Rectangle 10">
-            <a:extLst>
-              <a:ext uri="{FF2B5EF4-FFF2-40B4-BE49-F238E27FC236}">
-                <a16:creationId xmlns:a16="http://schemas.microsoft.com/office/drawing/2014/main" id="{F68B3F68-107C-434F-AA38-110D5EA91B85}"/>
-              </a:ext>
-              <a:ext uri="{C183D7F6-B498-43B3-948B-1728B52AA6E4}">
-                <adec:decorative xmlns:adec="http://schemas.microsoft.com/office/drawing/2017/decorative" val="1"/>
-              </a:ext>
-            </a:extLst>
-          </p:cNvPr>
-          <p:cNvSpPr>
-            <a:spLocks noGrp="1" noRot="1" noChangeAspect="1" noMove="1" noResize="1" noEditPoints="1" noAdjustHandles="1" noChangeArrowheads="1" noChangeShapeType="1" noTextEdit="1"/>
-          </p:cNvSpPr>
-          <p:nvPr>
-            <p:extLst>
-              <p:ext uri="{386F3935-93C4-4BCD-93E2-E3B085C9AB24}">
-                <p16:designElem xmlns:p16="http://schemas.microsoft.com/office/powerpoint/2015/main" val="1"/>
-              </p:ext>
-            </p:extLst>
-          </p:nvPr>
-        </p:nvSpPr>
-        <p:spPr>
-          <a:xfrm flipH="1">
-            <a:off x="1" y="0"/>
-            <a:ext cx="9143999" cy="1575955"/>
-          </a:xfrm>
-          <a:prstGeom prst="rect">
-            <a:avLst/>
-          </a:prstGeom>
-          <a:gradFill>
-            <a:gsLst>
-              <a:gs pos="0">
-                <a:srgbClr val="000000">
-                  <a:alpha val="96000"/>
-                </a:srgbClr>
-              </a:gs>
-              <a:gs pos="100000">
-                <a:schemeClr val="accent1">
-                  <a:lumMod val="75000"/>
-                </a:schemeClr>
-              </a:gs>
-            </a:gsLst>
-            <a:lin ang="8400000" scaled="0"/>
-          </a:gradFill>
-          <a:ln>
-            <a:noFill/>
-          </a:ln>
-        </p:spPr>
-        <p:style>
-          <a:lnRef idx="2">
-            <a:schemeClr val="accent1">
-              <a:shade val="50000"/>
-            </a:schemeClr>
-          </a:lnRef>
-          <a:fillRef idx="1">
-            <a:schemeClr val="accent1"/>
-          </a:fillRef>
-          <a:effectRef idx="0">
-            <a:schemeClr val="accent1"/>
-          </a:effectRef>
-          <a:fontRef idx="minor">
-            <a:schemeClr val="lt1"/>
-          </a:fontRef>
-        </p:style>
-        <p:txBody>
-          <a:bodyPr rtlCol="0" anchor="ctr"/>
-          <a:lstStyle/>
-          <a:p>
-            <a:pPr algn="ctr"/>
-            <a:endParaRPr lang="en-US"/>
-          </a:p>
-        </p:txBody>
-      </p:sp>
-      <p:sp>
-        <p:nvSpPr>
-          <p:cNvPr id="13" name="Rectangle 12">
-            <a:extLst>
-              <a:ext uri="{FF2B5EF4-FFF2-40B4-BE49-F238E27FC236}">
-                <a16:creationId xmlns:a16="http://schemas.microsoft.com/office/drawing/2014/main" id="{AAD0DBB9-1A4B-4391-81D4-CB19F9AB918A}"/>
-              </a:ext>
-              <a:ext uri="{C183D7F6-B498-43B3-948B-1728B52AA6E4}">
-                <adec:decorative xmlns:adec="http://schemas.microsoft.com/office/drawing/2017/decorative" val="1"/>
-              </a:ext>
-            </a:extLst>
-          </p:cNvPr>
-          <p:cNvSpPr>
-            <a:spLocks noGrp="1" noRot="1" noChangeAspect="1" noMove="1" noResize="1" noEditPoints="1" noAdjustHandles="1" noChangeArrowheads="1" noChangeShapeType="1" noTextEdit="1"/>
-          </p:cNvSpPr>
-          <p:nvPr>
-            <p:extLst>
-              <p:ext uri="{386F3935-93C4-4BCD-93E2-E3B085C9AB24}">
-                <p16:designElem xmlns:p16="http://schemas.microsoft.com/office/powerpoint/2015/main" val="1"/>
-              </p:ext>
-            </p:extLst>
-          </p:nvPr>
-        </p:nvSpPr>
-        <p:spPr>
-          <a:xfrm rot="10800000" flipH="1">
-            <a:off x="6096642" y="0"/>
-            <a:ext cx="3047358" cy="1576412"/>
-          </a:xfrm>
-          <a:prstGeom prst="rect">
-            <a:avLst/>
-          </a:prstGeom>
-          <a:gradFill>
-            <a:gsLst>
-              <a:gs pos="19000">
-                <a:schemeClr val="accent1">
-                  <a:lumMod val="50000"/>
-                  <a:alpha val="68000"/>
-                </a:schemeClr>
-              </a:gs>
-              <a:gs pos="100000">
-                <a:schemeClr val="accent1">
-                  <a:alpha val="79000"/>
-                </a:schemeClr>
-              </a:gs>
-            </a:gsLst>
-            <a:lin ang="19200000" scaled="0"/>
-          </a:gradFill>
-          <a:ln>
-            <a:noFill/>
-          </a:ln>
-        </p:spPr>
-        <p:style>
-          <a:lnRef idx="2">
-            <a:schemeClr val="accent1">
-              <a:shade val="50000"/>
-            </a:schemeClr>
-          </a:lnRef>
-          <a:fillRef idx="1">
-            <a:schemeClr val="accent1"/>
-          </a:fillRef>
-          <a:effectRef idx="0">
-            <a:schemeClr val="accent1"/>
-          </a:effectRef>
-          <a:fontRef idx="minor">
-            <a:schemeClr val="lt1"/>
-          </a:fontRef>
-        </p:style>
-        <p:txBody>
-          <a:bodyPr rtlCol="0" anchor="ctr"/>
-          <a:lstStyle/>
-          <a:p>
-            <a:pPr algn="ctr"/>
-            <a:endParaRPr lang="en-US"/>
-          </a:p>
-        </p:txBody>
-      </p:sp>
-      <p:sp>
-        <p:nvSpPr>
-          <p:cNvPr id="15" name="Rectangle 14">
-            <a:extLst>
-              <a:ext uri="{FF2B5EF4-FFF2-40B4-BE49-F238E27FC236}">
-                <a16:creationId xmlns:a16="http://schemas.microsoft.com/office/drawing/2014/main" id="{063BBA22-50EA-4C4D-BE05-F1CE4E63AA56}"/>
-              </a:ext>
-              <a:ext uri="{C183D7F6-B498-43B3-948B-1728B52AA6E4}">
-                <adec:decorative xmlns:adec="http://schemas.microsoft.com/office/drawing/2017/decorative" val="1"/>
-              </a:ext>
-            </a:extLst>
-          </p:cNvPr>
-          <p:cNvSpPr>
-            <a:spLocks noGrp="1" noRot="1" noChangeAspect="1" noMove="1" noResize="1" noEditPoints="1" noAdjustHandles="1" noChangeArrowheads="1" noChangeShapeType="1" noTextEdit="1"/>
-          </p:cNvSpPr>
-          <p:nvPr>
-            <p:extLst>
-              <p:ext uri="{386F3935-93C4-4BCD-93E2-E3B085C9AB24}">
-                <p16:designElem xmlns:p16="http://schemas.microsoft.com/office/powerpoint/2015/main" val="1"/>
-              </p:ext>
-            </p:extLst>
-          </p:nvPr>
-        </p:nvSpPr>
-        <p:spPr>
-          <a:xfrm rot="5400000">
-            <a:off x="3783777" y="-3783778"/>
-            <a:ext cx="1576446" cy="9144002"/>
-          </a:xfrm>
-          <a:prstGeom prst="rect">
-            <a:avLst/>
-          </a:prstGeom>
-          <a:gradFill>
-            <a:gsLst>
-              <a:gs pos="23000">
-                <a:schemeClr val="accent1">
-                  <a:alpha val="0"/>
-                </a:schemeClr>
-              </a:gs>
-              <a:gs pos="99000">
-                <a:srgbClr val="000000">
-                  <a:alpha val="74000"/>
-                </a:srgbClr>
-              </a:gs>
-            </a:gsLst>
-            <a:lin ang="20400000" scaled="0"/>
-          </a:gradFill>
-          <a:ln>
-            <a:noFill/>
-          </a:ln>
-        </p:spPr>
-        <p:style>
-          <a:lnRef idx="2">
-            <a:schemeClr val="accent1">
-              <a:shade val="50000"/>
-            </a:schemeClr>
-          </a:lnRef>
-          <a:fillRef idx="1">
-            <a:schemeClr val="accent1"/>
-          </a:fillRef>
-          <a:effectRef idx="0">
-            <a:schemeClr val="accent1"/>
-          </a:effectRef>
-          <a:fontRef idx="minor">
-            <a:schemeClr val="lt1"/>
-          </a:fontRef>
-        </p:style>
-        <p:txBody>
-          <a:bodyPr rtlCol="0" anchor="ctr"/>
-          <a:lstStyle/>
-          <a:p>
-            <a:pPr algn="ctr"/>
-            <a:endParaRPr lang="en-US" dirty="0"/>
-          </a:p>
-        </p:txBody>
-      </p:sp>
-      <p:sp>
-        <p:nvSpPr>
-          <p:cNvPr id="2" name="Title 1">
-            <a:extLst>
-              <a:ext uri="{FF2B5EF4-FFF2-40B4-BE49-F238E27FC236}">
-                <a16:creationId xmlns:a16="http://schemas.microsoft.com/office/drawing/2014/main" id="{0353CB4C-C8CC-8E47-8C61-70C286AB9A0C}"/>
-              </a:ext>
-            </a:extLst>
-          </p:cNvPr>
-          <p:cNvSpPr>
-            <a:spLocks noGrp="1"/>
-          </p:cNvSpPr>
-          <p:nvPr>
-            <p:ph type="title"/>
-          </p:nvPr>
-        </p:nvSpPr>
-        <p:spPr>
-          <a:xfrm>
-            <a:off x="1028697" y="348865"/>
-            <a:ext cx="7533018" cy="877729"/>
-          </a:xfrm>
-        </p:spPr>
-        <p:txBody>
-          <a:bodyPr anchor="ctr">
-            <a:normAutofit fontScale="90000"/>
-          </a:bodyPr>
-          <a:lstStyle/>
-          <a:p>
-            <a:r>
-              <a:rPr lang="en-US" sz="3600" dirty="0">
-                <a:solidFill>
-                  <a:schemeClr val="bg1"/>
-                </a:solidFill>
-              </a:rPr>
-              <a:t>Diminishing Returns on Marketing Spend</a:t>
-            </a:r>
-            <a:endParaRPr lang="en-US" sz="3500" dirty="0">
-              <a:solidFill>
-                <a:schemeClr val="bg1"/>
-              </a:solidFill>
-            </a:endParaRPr>
-          </a:p>
-        </p:txBody>
-      </p:sp>
-      <p:graphicFrame>
-        <p:nvGraphicFramePr>
-          <p:cNvPr id="5" name="Content Placeholder 2">
-            <a:extLst>
-              <a:ext uri="{FF2B5EF4-FFF2-40B4-BE49-F238E27FC236}">
-                <a16:creationId xmlns:a16="http://schemas.microsoft.com/office/drawing/2014/main" id="{A7B986E4-2F37-4DFC-58C4-8A75F25E91BD}"/>
-              </a:ext>
-            </a:extLst>
-          </p:cNvPr>
-          <p:cNvGraphicFramePr>
-            <a:graphicFrameLocks noGrp="1"/>
-          </p:cNvGraphicFramePr>
-          <p:nvPr>
-            <p:ph idx="1"/>
-            <p:extLst>
-              <p:ext uri="{D42A27DB-BD31-4B8C-83A1-F6EECF244321}">
-                <p14:modId xmlns:p14="http://schemas.microsoft.com/office/powerpoint/2010/main" val="836685429"/>
-              </p:ext>
-            </p:extLst>
-          </p:nvPr>
-        </p:nvGraphicFramePr>
-        <p:xfrm>
-          <a:off x="483042" y="2112579"/>
-          <a:ext cx="8195871" cy="4192805"/>
-        </p:xfrm>
-        <a:graphic>
-          <a:graphicData uri="http://schemas.openxmlformats.org/drawingml/2006/diagram">
-            <dgm:relIds xmlns:dgm="http://schemas.openxmlformats.org/drawingml/2006/diagram" xmlns:r="http://schemas.openxmlformats.org/officeDocument/2006/relationships" r:dm="rId2" r:lo="rId3" r:qs="rId4" r:cs="rId5"/>
-          </a:graphicData>
-        </a:graphic>
-      </p:graphicFrame>
-    </p:spTree>
-    <p:extLst>
-      <p:ext uri="{BB962C8B-B14F-4D97-AF65-F5344CB8AC3E}">
-        <p14:creationId xmlns:p14="http://schemas.microsoft.com/office/powerpoint/2010/main" val="162346022"/>
-      </p:ext>
-    </p:extLst>
-  </p:cSld>
-  <p:clrMapOvr>
-    <a:masterClrMapping/>
-  </p:clrMapOvr>
-</p:sld>
-</file>
-
-<file path=ppt/slides/slide5.xml><?xml version="1.0" encoding="utf-8"?>
-<p:sld xmlns:a="http://schemas.openxmlformats.org/drawingml/2006/main" xmlns:r="http://schemas.openxmlformats.org/officeDocument/2006/relationships" xmlns:p="http://schemas.openxmlformats.org/presentationml/2006/main">
-  <p:cSld>
-    <p:bg>
-      <p:bgPr>
-        <a:solidFill>
-          <a:schemeClr val="bg1"/>
-        </a:solidFill>
-        <a:effectLst/>
-      </p:bgPr>
-    </p:bg>
-    <p:spTree>
-      <p:nvGrpSpPr>
-        <p:cNvPr id="1" name=""/>
-        <p:cNvGrpSpPr/>
-        <p:nvPr/>
-      </p:nvGrpSpPr>
-      <p:grpSpPr>
-        <a:xfrm>
-          <a:off x="0" y="0"/>
-          <a:ext cx="0" cy="0"/>
-          <a:chOff x="0" y="0"/>
-          <a:chExt cx="0" cy="0"/>
-        </a:xfrm>
-      </p:grpSpPr>
-      <p:sp useBgFill="1">
-        <p:nvSpPr>
           <p:cNvPr id="10" name="Rectangle 9">
             <a:extLst>
               <a:ext uri="{FF2B5EF4-FFF2-40B4-BE49-F238E27FC236}">
@@ -15426,6 +15333,509 @@
           <a:p>
             <a:pPr algn="ctr"/>
             <a:endParaRPr lang="en-US"/>
+          </a:p>
+        </p:txBody>
+      </p:sp>
+    </p:spTree>
+  </p:cSld>
+  <p:clrMapOvr>
+    <a:masterClrMapping/>
+  </p:clrMapOvr>
+</p:sld>
+</file>
+
+<file path=ppt/slides/slide5.xml><?xml version="1.0" encoding="utf-8"?>
+<p:sld xmlns:a="http://schemas.openxmlformats.org/drawingml/2006/main" xmlns:r="http://schemas.openxmlformats.org/officeDocument/2006/relationships" xmlns:p="http://schemas.openxmlformats.org/presentationml/2006/main">
+  <p:cSld>
+    <p:bg>
+      <p:bgPr>
+        <a:solidFill>
+          <a:schemeClr val="bg1"/>
+        </a:solidFill>
+        <a:effectLst/>
+      </p:bgPr>
+    </p:bg>
+    <p:spTree>
+      <p:nvGrpSpPr>
+        <p:cNvPr id="1" name=""/>
+        <p:cNvGrpSpPr/>
+        <p:nvPr/>
+      </p:nvGrpSpPr>
+      <p:grpSpPr>
+        <a:xfrm>
+          <a:off x="0" y="0"/>
+          <a:ext cx="0" cy="0"/>
+          <a:chOff x="0" y="0"/>
+          <a:chExt cx="0" cy="0"/>
+        </a:xfrm>
+      </p:grpSpPr>
+      <p:sp useBgFill="1">
+        <p:nvSpPr>
+          <p:cNvPr id="41" name="Rectangle 40">
+            <a:extLst>
+              <a:ext uri="{FF2B5EF4-FFF2-40B4-BE49-F238E27FC236}">
+                <a16:creationId xmlns:a16="http://schemas.microsoft.com/office/drawing/2014/main" id="{7FEAE179-C525-48F3-AD47-0E9E2B6F2E2E}"/>
+              </a:ext>
+              <a:ext uri="{C183D7F6-B498-43B3-948B-1728B52AA6E4}">
+                <adec:decorative xmlns:adec="http://schemas.microsoft.com/office/drawing/2017/decorative" val="1"/>
+              </a:ext>
+            </a:extLst>
+          </p:cNvPr>
+          <p:cNvSpPr>
+            <a:spLocks noGrp="1" noRot="1" noChangeAspect="1" noMove="1" noResize="1" noEditPoints="1" noAdjustHandles="1" noChangeArrowheads="1" noChangeShapeType="1" noTextEdit="1"/>
+          </p:cNvSpPr>
+          <p:nvPr>
+            <p:extLst>
+              <p:ext uri="{386F3935-93C4-4BCD-93E2-E3B085C9AB24}">
+                <p16:designElem xmlns:p16="http://schemas.microsoft.com/office/powerpoint/2015/main" val="1"/>
+              </p:ext>
+            </p:extLst>
+          </p:nvPr>
+        </p:nvSpPr>
+        <p:spPr>
+          <a:xfrm>
+            <a:off x="0" y="0"/>
+            <a:ext cx="9143999" cy="6857365"/>
+          </a:xfrm>
+          <a:prstGeom prst="rect">
+            <a:avLst/>
+          </a:prstGeom>
+          <a:ln>
+            <a:noFill/>
+          </a:ln>
+        </p:spPr>
+        <p:style>
+          <a:lnRef idx="2">
+            <a:schemeClr val="accent1">
+              <a:shade val="50000"/>
+            </a:schemeClr>
+          </a:lnRef>
+          <a:fillRef idx="1">
+            <a:schemeClr val="accent1"/>
+          </a:fillRef>
+          <a:effectRef idx="0">
+            <a:schemeClr val="accent1"/>
+          </a:effectRef>
+          <a:fontRef idx="minor">
+            <a:schemeClr val="lt1"/>
+          </a:fontRef>
+        </p:style>
+        <p:txBody>
+          <a:bodyPr rtlCol="0" anchor="ctr"/>
+          <a:lstStyle/>
+          <a:p>
+            <a:r>
+              <a:t>Lagged Effects of Spend</a:t>
+            </a:r>
+          </a:p>
+          <a:p>
+            <a:endParaRPr/>
+          </a:p>
+          <a:p>
+            <a:r>
+              <a:t>- Positive lag: Impact appears with delay (awareness, brand campaigns).</a:t>
+            </a:r>
+          </a:p>
+          <a:p>
+            <a:r>
+              <a:t>- Negative lag: Revenue changes precede spend adjustments (reverse causality).</a:t>
+            </a:r>
+          </a:p>
+          <a:p>
+            <a:r>
+              <a:t>- Takeaway: Distinguish short-term vs. delayed channel impact when planning budgets.</a:t>
+            </a:r>
+          </a:p>
+        </p:txBody>
+      </p:sp>
+      <p:sp>
+        <p:nvSpPr>
+          <p:cNvPr id="8" name="Rectangle 1">
+            <a:extLst>
+              <a:ext uri="{FF2B5EF4-FFF2-40B4-BE49-F238E27FC236}">
+                <a16:creationId xmlns:a16="http://schemas.microsoft.com/office/drawing/2014/main" id="{99CE5530-6C8E-A95B-0E56-893FC040F251}"/>
+              </a:ext>
+            </a:extLst>
+          </p:cNvPr>
+          <p:cNvSpPr>
+            <a:spLocks noGrp="1" noChangeArrowheads="1"/>
+          </p:cNvSpPr>
+          <p:nvPr>
+            <p:ph type="title"/>
+          </p:nvPr>
+        </p:nvSpPr>
+        <p:spPr bwMode="auto">
+          <a:xfrm>
+            <a:off x="388416" y="4883544"/>
+            <a:ext cx="2907065" cy="1556907"/>
+          </a:xfrm>
+          <a:prstGeom prst="rect">
+            <a:avLst/>
+          </a:prstGeom>
+          <a:extLst>
+            <a:ext uri="{909E8E84-426E-40DD-AFC4-6F175D3DCCD1}">
+              <a14:hiddenFill xmlns:a14="http://schemas.microsoft.com/office/drawing/2010/main">
+                <a:solidFill>
+                  <a:schemeClr val="accent1"/>
+                </a:solidFill>
+              </a14:hiddenFill>
+            </a:ext>
+            <a:ext uri="{91240B29-F687-4F45-9708-019B960494DF}">
+              <a14:hiddenLine xmlns:a14="http://schemas.microsoft.com/office/drawing/2010/main" w="9525">
+                <a:solidFill>
+                  <a:schemeClr val="tx1"/>
+                </a:solidFill>
+                <a:miter lim="800000"/>
+                <a:headEnd/>
+                <a:tailEnd/>
+              </a14:hiddenLine>
+            </a:ext>
+            <a:ext uri="{AF507438-7753-43E0-B8FC-AC1667EBCBE1}">
+              <a14:hiddenEffects xmlns:a14="http://schemas.microsoft.com/office/drawing/2010/main">
+                <a:effectLst>
+                  <a:outerShdw dist="35921" dir="2700000" algn="ctr" rotWithShape="0">
+                    <a:schemeClr val="bg2"/>
+                  </a:outerShdw>
+                </a:effectLst>
+              </a14:hiddenEffects>
+            </a:ext>
+          </a:extLst>
+        </p:spPr>
+        <p:txBody>
+          <a:bodyPr vert="horz" lIns="91440" tIns="45720" rIns="91440" bIns="45720" numCol="1" anchor="ctr" anchorCtr="0" compatLnSpc="1">
+            <a:prstTxWarp prst="textNoShape">
+              <a:avLst/>
+            </a:prstTxWarp>
+            <a:normAutofit/>
+          </a:bodyPr>
+          <a:lstStyle/>
+          <a:p>
+            <a:pPr marL="0" marR="0" lvl="0" indent="0" defTabSz="914400" rtl="0" eaLnBrk="0" fontAlgn="base" latinLnBrk="0" hangingPunct="0">
+              <a:spcBef>
+                <a:spcPct val="0"/>
+              </a:spcBef>
+              <a:spcAft>
+                <a:spcPct val="0"/>
+              </a:spcAft>
+              <a:buClrTx/>
+              <a:buSzTx/>
+              <a:tabLst/>
+            </a:pPr>
+            <a:r>
+              <a:rPr kumimoji="0" lang="en-US" altLang="en-US" sz="2800" b="0" i="0" u="none" strike="noStrike" cap="none" normalizeH="0" baseline="0" dirty="0">
+                <a:ln>
+                  <a:noFill/>
+                </a:ln>
+                <a:effectLst/>
+                <a:latin typeface="Arial" panose="020B0604020202020204" pitchFamily="34" charset="0"/>
+              </a:rPr>
+              <a:t>Diminishing Returns</a:t>
+            </a:r>
+          </a:p>
+        </p:txBody>
+      </p:sp>
+      <p:sp>
+        <p:nvSpPr>
+          <p:cNvPr id="43" name="Rectangle 42">
+            <a:extLst>
+              <a:ext uri="{FF2B5EF4-FFF2-40B4-BE49-F238E27FC236}">
+                <a16:creationId xmlns:a16="http://schemas.microsoft.com/office/drawing/2014/main" id="{95C8260E-968F-44E8-A823-ABB431311926}"/>
+              </a:ext>
+              <a:ext uri="{C183D7F6-B498-43B3-948B-1728B52AA6E4}">
+                <adec:decorative xmlns:adec="http://schemas.microsoft.com/office/drawing/2017/decorative" val="1"/>
+              </a:ext>
+            </a:extLst>
+          </p:cNvPr>
+          <p:cNvSpPr>
+            <a:spLocks noGrp="1" noRot="1" noChangeAspect="1" noMove="1" noResize="1" noEditPoints="1" noAdjustHandles="1" noChangeArrowheads="1" noChangeShapeType="1" noTextEdit="1"/>
+          </p:cNvSpPr>
+          <p:nvPr>
+            <p:extLst>
+              <p:ext uri="{386F3935-93C4-4BCD-93E2-E3B085C9AB24}">
+                <p16:designElem xmlns:p16="http://schemas.microsoft.com/office/powerpoint/2015/main" val="1"/>
+              </p:ext>
+            </p:extLst>
+          </p:nvPr>
+        </p:nvSpPr>
+        <p:spPr>
+          <a:xfrm>
+            <a:off x="0" y="0"/>
+            <a:ext cx="9144000" cy="865848"/>
+          </a:xfrm>
+          <a:prstGeom prst="rect">
+            <a:avLst/>
+          </a:prstGeom>
+          <a:solidFill>
+            <a:schemeClr val="accent4"/>
+          </a:solidFill>
+          <a:ln>
+            <a:noFill/>
+          </a:ln>
+        </p:spPr>
+        <p:style>
+          <a:lnRef idx="2">
+            <a:schemeClr val="accent1">
+              <a:shade val="50000"/>
+            </a:schemeClr>
+          </a:lnRef>
+          <a:fillRef idx="1">
+            <a:schemeClr val="accent1"/>
+          </a:fillRef>
+          <a:effectRef idx="0">
+            <a:schemeClr val="accent1"/>
+          </a:effectRef>
+          <a:fontRef idx="minor">
+            <a:schemeClr val="lt1"/>
+          </a:fontRef>
+        </p:style>
+        <p:txBody>
+          <a:bodyPr rtlCol="0" anchor="ctr"/>
+          <a:lstStyle/>
+          <a:p>
+            <a:pPr algn="ctr"/>
+            <a:endParaRPr lang="en-US"/>
+          </a:p>
+        </p:txBody>
+      </p:sp>
+      <p:sp>
+        <p:nvSpPr>
+          <p:cNvPr id="45" name="Rectangle 44">
+            <a:extLst>
+              <a:ext uri="{FF2B5EF4-FFF2-40B4-BE49-F238E27FC236}">
+                <a16:creationId xmlns:a16="http://schemas.microsoft.com/office/drawing/2014/main" id="{2C1BBA94-3F40-40AA-8BB9-E69E25E537C1}"/>
+              </a:ext>
+              <a:ext uri="{C183D7F6-B498-43B3-948B-1728B52AA6E4}">
+                <adec:decorative xmlns:adec="http://schemas.microsoft.com/office/drawing/2017/decorative" val="1"/>
+              </a:ext>
+            </a:extLst>
+          </p:cNvPr>
+          <p:cNvSpPr>
+            <a:spLocks noGrp="1" noRot="1" noChangeAspect="1" noMove="1" noResize="1" noEditPoints="1" noAdjustHandles="1" noChangeArrowheads="1" noChangeShapeType="1" noTextEdit="1"/>
+          </p:cNvSpPr>
+          <p:nvPr>
+            <p:extLst>
+              <p:ext uri="{386F3935-93C4-4BCD-93E2-E3B085C9AB24}">
+                <p16:designElem xmlns:p16="http://schemas.microsoft.com/office/powerpoint/2015/main" val="1"/>
+              </p:ext>
+            </p:extLst>
+          </p:nvPr>
+        </p:nvSpPr>
+        <p:spPr>
+          <a:xfrm>
+            <a:off x="388416" y="0"/>
+            <a:ext cx="8423809" cy="4588184"/>
+          </a:xfrm>
+          <a:prstGeom prst="rect">
+            <a:avLst/>
+          </a:prstGeom>
+          <a:solidFill>
+            <a:schemeClr val="bg1"/>
+          </a:solidFill>
+          <a:ln>
+            <a:noFill/>
+          </a:ln>
+          <a:effectLst>
+            <a:outerShdw blurRad="139700" dist="127000" dir="5400000" algn="t" rotWithShape="0">
+              <a:prstClr val="black">
+                <a:alpha val="15000"/>
+              </a:prstClr>
+            </a:outerShdw>
+          </a:effectLst>
+        </p:spPr>
+        <p:style>
+          <a:lnRef idx="2">
+            <a:schemeClr val="accent1">
+              <a:shade val="50000"/>
+            </a:schemeClr>
+          </a:lnRef>
+          <a:fillRef idx="1">
+            <a:schemeClr val="accent1"/>
+          </a:fillRef>
+          <a:effectRef idx="0">
+            <a:schemeClr val="accent1"/>
+          </a:effectRef>
+          <a:fontRef idx="minor">
+            <a:schemeClr val="lt1"/>
+          </a:fontRef>
+        </p:style>
+        <p:txBody>
+          <a:bodyPr rtlCol="0" anchor="ctr"/>
+          <a:lstStyle/>
+          <a:p>
+            <a:pPr algn="ctr"/>
+            <a:endParaRPr lang="en-US"/>
+          </a:p>
+        </p:txBody>
+      </p:sp>
+      <p:pic>
+        <p:nvPicPr>
+          <p:cNvPr id="15" name="Picture 14" descr="A graph of a graph&#10;&#10;AI-generated content may be incorrect.">
+            <a:extLst>
+              <a:ext uri="{FF2B5EF4-FFF2-40B4-BE49-F238E27FC236}">
+                <a16:creationId xmlns:a16="http://schemas.microsoft.com/office/drawing/2014/main" id="{50E2F948-8509-E471-40F2-5D5A2C8B6C04}"/>
+              </a:ext>
+            </a:extLst>
+          </p:cNvPr>
+          <p:cNvPicPr>
+            <a:picLocks noChangeAspect="1"/>
+          </p:cNvPicPr>
+          <p:nvPr/>
+        </p:nvPicPr>
+        <p:blipFill>
+          <a:blip r:embed="rId2"/>
+          <a:srcRect b="530"/>
+          <a:stretch>
+            <a:fillRect/>
+          </a:stretch>
+        </p:blipFill>
+        <p:spPr>
+          <a:xfrm>
+            <a:off x="719403" y="364142"/>
+            <a:ext cx="7777234" cy="3867993"/>
+          </a:xfrm>
+          <a:prstGeom prst="rect">
+            <a:avLst/>
+          </a:prstGeom>
+        </p:spPr>
+      </p:pic>
+      <p:sp>
+        <p:nvSpPr>
+          <p:cNvPr id="47" name="Rectangle 46">
+            <a:extLst>
+              <a:ext uri="{FF2B5EF4-FFF2-40B4-BE49-F238E27FC236}">
+                <a16:creationId xmlns:a16="http://schemas.microsoft.com/office/drawing/2014/main" id="{FE43805F-24A6-46A4-B19B-54F28347355C}"/>
+              </a:ext>
+              <a:ext uri="{C183D7F6-B498-43B3-948B-1728B52AA6E4}">
+                <adec:decorative xmlns:adec="http://schemas.microsoft.com/office/drawing/2017/decorative" val="1"/>
+              </a:ext>
+            </a:extLst>
+          </p:cNvPr>
+          <p:cNvSpPr>
+            <a:spLocks noGrp="1" noRot="1" noChangeAspect="1" noMove="1" noResize="1" noEditPoints="1" noAdjustHandles="1" noChangeArrowheads="1" noChangeShapeType="1" noTextEdit="1"/>
+          </p:cNvSpPr>
+          <p:nvPr>
+            <p:extLst>
+              <p:ext uri="{386F3935-93C4-4BCD-93E2-E3B085C9AB24}">
+                <p16:designElem xmlns:p16="http://schemas.microsoft.com/office/powerpoint/2015/main" val="1"/>
+              </p:ext>
+            </p:extLst>
+          </p:nvPr>
+        </p:nvSpPr>
+        <p:spPr>
+          <a:xfrm rot="5400000" flipH="1">
+            <a:off x="2817950" y="5666847"/>
+            <a:ext cx="1463040" cy="34289"/>
+          </a:xfrm>
+          <a:prstGeom prst="rect">
+            <a:avLst/>
+          </a:prstGeom>
+          <a:solidFill>
+            <a:schemeClr val="accent4"/>
+          </a:solidFill>
+          <a:ln>
+            <a:noFill/>
+          </a:ln>
+        </p:spPr>
+        <p:style>
+          <a:lnRef idx="2">
+            <a:schemeClr val="accent1">
+              <a:shade val="50000"/>
+            </a:schemeClr>
+          </a:lnRef>
+          <a:fillRef idx="1">
+            <a:schemeClr val="accent1"/>
+          </a:fillRef>
+          <a:effectRef idx="0">
+            <a:schemeClr val="accent1"/>
+          </a:effectRef>
+          <a:fontRef idx="minor">
+            <a:schemeClr val="lt1"/>
+          </a:fontRef>
+        </p:style>
+        <p:txBody>
+          <a:bodyPr rtlCol="0" anchor="ctr"/>
+          <a:lstStyle/>
+          <a:p>
+            <a:pPr algn="ctr"/>
+            <a:endParaRPr lang="en-US"/>
+          </a:p>
+        </p:txBody>
+      </p:sp>
+      <p:sp>
+        <p:nvSpPr>
+          <p:cNvPr id="3" name="Content Placeholder 2"/>
+          <p:cNvSpPr>
+            <a:spLocks noGrp="1"/>
+          </p:cNvSpPr>
+          <p:nvPr>
+            <p:ph idx="1"/>
+          </p:nvPr>
+        </p:nvSpPr>
+        <p:spPr>
+          <a:xfrm>
+            <a:off x="3872039" y="4883544"/>
+            <a:ext cx="4940186" cy="1556907"/>
+          </a:xfrm>
+        </p:spPr>
+        <p:txBody>
+          <a:bodyPr anchor="ctr">
+            <a:normAutofit/>
+          </a:bodyPr>
+          <a:lstStyle/>
+          <a:p>
+            <a:pPr>
+              <a:lnSpc>
+                <a:spcPct val="90000"/>
+              </a:lnSpc>
+            </a:pPr>
+            <a:r>
+              <a:rPr lang="en-US" sz="1000" dirty="0"/>
+              <a:t>Advertising platforms report total revenue claims. Modeled revenue focuses on incremental lift. Extra dollars spent on saturated channels yield smaller gains.</a:t>
+            </a:r>
+          </a:p>
+          <a:p>
+            <a:pPr>
+              <a:lnSpc>
+                <a:spcPct val="90000"/>
+              </a:lnSpc>
+            </a:pPr>
+            <a:r>
+              <a:rPr lang="en-US" sz="1000" dirty="0"/>
+              <a:t>Some channels have much higher total spend than others.</a:t>
+            </a:r>
+          </a:p>
+          <a:p>
+            <a:pPr>
+              <a:lnSpc>
+                <a:spcPct val="90000"/>
+              </a:lnSpc>
+            </a:pPr>
+            <a:r>
+              <a:rPr lang="en-US" sz="1000" dirty="0"/>
+              <a:t>High spend levels often coincide with diminishing marginal returns—each additional dollar spent generates less incremental revenue.</a:t>
+            </a:r>
+          </a:p>
+          <a:p>
+            <a:pPr>
+              <a:lnSpc>
+                <a:spcPct val="90000"/>
+              </a:lnSpc>
+            </a:pPr>
+            <a:r>
+              <a:rPr lang="en-US" sz="1000" dirty="0"/>
+              <a:t>Channels with large spend may still have high total ROI historically, but the model shows current incremental efficiency is lower.</a:t>
+            </a:r>
+          </a:p>
+          <a:p>
+            <a:pPr>
+              <a:lnSpc>
+                <a:spcPct val="90000"/>
+              </a:lnSpc>
+            </a:pPr>
+            <a:r>
+              <a:rPr lang="en-US" sz="1000" dirty="0"/>
+              <a:t>This helps explain why modeled revenue &lt; reported revenue for these channels.</a:t>
+            </a:r>
           </a:p>
         </p:txBody>
       </p:sp>
@@ -15793,10 +16203,10 @@
       </p:grpSpPr>
       <p:sp useBgFill="1">
         <p:nvSpPr>
-          <p:cNvPr id="41" name="Rectangle 40">
+          <p:cNvPr id="9" name="Rectangle 8">
             <a:extLst>
               <a:ext uri="{FF2B5EF4-FFF2-40B4-BE49-F238E27FC236}">
-                <a16:creationId xmlns:a16="http://schemas.microsoft.com/office/drawing/2014/main" id="{7FEAE179-C525-48F3-AD47-0E9E2B6F2E2E}"/>
+                <a16:creationId xmlns:a16="http://schemas.microsoft.com/office/drawing/2014/main" id="{BACC6370-2D7E-4714-9D71-7542949D7D5D}"/>
               </a:ext>
               <a:ext uri="{C183D7F6-B498-43B3-948B-1728B52AA6E4}">
                 <adec:decorative xmlns:adec="http://schemas.microsoft.com/office/drawing/2017/decorative" val="1"/>
@@ -15817,11 +16227,131 @@
         <p:spPr>
           <a:xfrm>
             <a:off x="0" y="0"/>
-            <a:ext cx="9143999" cy="6857365"/>
+            <a:ext cx="9144000" cy="6858000"/>
           </a:xfrm>
           <a:prstGeom prst="rect">
             <a:avLst/>
           </a:prstGeom>
+          <a:ln w="12700" cap="flat" cmpd="sng" algn="ctr">
+            <a:noFill/>
+            <a:prstDash val="solid"/>
+            <a:miter lim="800000"/>
+          </a:ln>
+          <a:effectLst/>
+          <a:extLst>
+            <a:ext uri="{91240B29-F687-4F45-9708-019B960494DF}">
+              <a14:hiddenLine xmlns:a14="http://schemas.microsoft.com/office/drawing/2010/main" w="12700" cap="flat" cmpd="sng" algn="ctr">
+                <a:solidFill>
+                  <a:schemeClr val="accent1">
+                    <a:shade val="50000"/>
+                  </a:schemeClr>
+                </a:solidFill>
+                <a:prstDash val="solid"/>
+                <a:miter lim="800000"/>
+              </a14:hiddenLine>
+            </a:ext>
+          </a:extLst>
+        </p:spPr>
+        <p:style>
+          <a:lnRef idx="2">
+            <a:schemeClr val="accent1">
+              <a:shade val="50000"/>
+            </a:schemeClr>
+          </a:lnRef>
+          <a:fillRef idx="1">
+            <a:schemeClr val="accent1"/>
+          </a:fillRef>
+          <a:effectRef idx="0">
+            <a:schemeClr val="accent1"/>
+          </a:effectRef>
+          <a:fontRef idx="minor">
+            <a:schemeClr val="lt1"/>
+          </a:fontRef>
+        </p:style>
+        <p:txBody>
+          <a:bodyPr rtlCol="0" anchor="ctr"/>
+          <a:lstStyle/>
+          <a:p>
+            <a:r>
+              <a:t>Diminishing Returns on Marketing Spend</a:t>
+            </a:r>
+          </a:p>
+          <a:p>
+            <a:endParaRPr/>
+          </a:p>
+          <a:p>
+            <a:r>
+              <a:t>- Insight: As spend increases, marginal gains decline.</a:t>
+            </a:r>
+          </a:p>
+          <a:p>
+            <a:r>
+              <a:t>- Findings:</a:t>
+            </a:r>
+          </a:p>
+          <a:p>
+            <a:r>
+              <a:t>  • Channels like Amazon Ads, TikTok, AdWords, StackAdapt show high historical ROI but low incremental ROI.</a:t>
+            </a:r>
+          </a:p>
+          <a:p>
+            <a:r>
+              <a:t>  • Indicates saturation—each additional dollar yields less incremental revenue.</a:t>
+            </a:r>
+          </a:p>
+          <a:p>
+            <a:r>
+              <a:t>- Conclusion: Modeled revenue highlights reduced efficiency even in historically strong channels.</a:t>
+            </a:r>
+          </a:p>
+        </p:txBody>
+      </p:sp>
+      <p:sp>
+        <p:nvSpPr>
+          <p:cNvPr id="11" name="Rectangle 10">
+            <a:extLst>
+              <a:ext uri="{FF2B5EF4-FFF2-40B4-BE49-F238E27FC236}">
+                <a16:creationId xmlns:a16="http://schemas.microsoft.com/office/drawing/2014/main" id="{F68B3F68-107C-434F-AA38-110D5EA91B85}"/>
+              </a:ext>
+              <a:ext uri="{C183D7F6-B498-43B3-948B-1728B52AA6E4}">
+                <adec:decorative xmlns:adec="http://schemas.microsoft.com/office/drawing/2017/decorative" val="1"/>
+              </a:ext>
+            </a:extLst>
+          </p:cNvPr>
+          <p:cNvSpPr>
+            <a:spLocks noGrp="1" noRot="1" noChangeAspect="1" noMove="1" noResize="1" noEditPoints="1" noAdjustHandles="1" noChangeArrowheads="1" noChangeShapeType="1" noTextEdit="1"/>
+          </p:cNvSpPr>
+          <p:nvPr>
+            <p:extLst>
+              <p:ext uri="{386F3935-93C4-4BCD-93E2-E3B085C9AB24}">
+                <p16:designElem xmlns:p16="http://schemas.microsoft.com/office/powerpoint/2015/main" val="1"/>
+              </p:ext>
+            </p:extLst>
+          </p:nvPr>
+        </p:nvSpPr>
+        <p:spPr>
+          <a:xfrm flipH="1">
+            <a:off x="1" y="0"/>
+            <a:ext cx="9143999" cy="1575955"/>
+          </a:xfrm>
+          <a:prstGeom prst="rect">
+            <a:avLst/>
+          </a:prstGeom>
+          <a:gradFill>
+            <a:gsLst>
+              <a:gs pos="0">
+                <a:srgbClr val="000000">
+                  <a:alpha val="96000"/>
+                </a:srgbClr>
+              </a:gs>
+              <a:gs pos="100000">
+                <a:schemeClr val="accent1">
+                  <a:lumMod val="75000"/>
+                </a:schemeClr>
+              </a:gs>
+            </a:gsLst>
+            <a:lin ang="8400000" scaled="0"/>
+          </a:gradFill>
           <a:ln>
             <a:noFill/>
           </a:ln>
@@ -15846,122 +16376,17 @@
           <a:bodyPr rtlCol="0" anchor="ctr"/>
           <a:lstStyle/>
           <a:p>
-            <a:r>
-              <a:t>Lagged Effects of Spend</a:t>
-            </a:r>
-          </a:p>
-          <a:p>
-            <a:endParaRPr/>
-          </a:p>
-          <a:p>
-            <a:r>
-              <a:t>- Positive lag: Impact appears with delay (awareness, brand campaigns).</a:t>
-            </a:r>
-          </a:p>
-          <a:p>
-            <a:r>
-              <a:t>- Negative lag: Revenue changes precede spend adjustments (reverse causality).</a:t>
-            </a:r>
-          </a:p>
-          <a:p>
-            <a:r>
-              <a:t>- Takeaway: Distinguish short-term vs. delayed channel impact when planning budgets.</a:t>
-            </a:r>
+            <a:pPr algn="ctr"/>
+            <a:endParaRPr lang="en-US"/>
           </a:p>
         </p:txBody>
       </p:sp>
       <p:sp>
         <p:nvSpPr>
-          <p:cNvPr id="8" name="Rectangle 1">
+          <p:cNvPr id="13" name="Rectangle 12">
             <a:extLst>
               <a:ext uri="{FF2B5EF4-FFF2-40B4-BE49-F238E27FC236}">
-                <a16:creationId xmlns:a16="http://schemas.microsoft.com/office/drawing/2014/main" id="{99CE5530-6C8E-A95B-0E56-893FC040F251}"/>
-              </a:ext>
-            </a:extLst>
-          </p:cNvPr>
-          <p:cNvSpPr>
-            <a:spLocks noGrp="1" noChangeArrowheads="1"/>
-          </p:cNvSpPr>
-          <p:nvPr>
-            <p:ph type="title"/>
-          </p:nvPr>
-        </p:nvSpPr>
-        <p:spPr bwMode="auto">
-          <a:xfrm>
-            <a:off x="388416" y="4883544"/>
-            <a:ext cx="2907065" cy="1556907"/>
-          </a:xfrm>
-          <a:prstGeom prst="rect">
-            <a:avLst/>
-          </a:prstGeom>
-          <a:extLst>
-            <a:ext uri="{909E8E84-426E-40DD-AFC4-6F175D3DCCD1}">
-              <a14:hiddenFill xmlns:a14="http://schemas.microsoft.com/office/drawing/2010/main">
-                <a:solidFill>
-                  <a:schemeClr val="accent1"/>
-                </a:solidFill>
-              </a14:hiddenFill>
-            </a:ext>
-            <a:ext uri="{91240B29-F687-4F45-9708-019B960494DF}">
-              <a14:hiddenLine xmlns:a14="http://schemas.microsoft.com/office/drawing/2010/main" w="9525">
-                <a:solidFill>
-                  <a:schemeClr val="tx1"/>
-                </a:solidFill>
-                <a:miter lim="800000"/>
-                <a:headEnd/>
-                <a:tailEnd/>
-              </a14:hiddenLine>
-            </a:ext>
-            <a:ext uri="{AF507438-7753-43E0-B8FC-AC1667EBCBE1}">
-              <a14:hiddenEffects xmlns:a14="http://schemas.microsoft.com/office/drawing/2010/main">
-                <a:effectLst>
-                  <a:outerShdw dist="35921" dir="2700000" algn="ctr" rotWithShape="0">
-                    <a:schemeClr val="bg2"/>
-                  </a:outerShdw>
-                </a:effectLst>
-              </a14:hiddenEffects>
-            </a:ext>
-          </a:extLst>
-        </p:spPr>
-        <p:txBody>
-          <a:bodyPr vert="horz" lIns="91440" tIns="45720" rIns="91440" bIns="45720" numCol="1" anchor="ctr" anchorCtr="0" compatLnSpc="1">
-            <a:prstTxWarp prst="textNoShape">
-              <a:avLst/>
-            </a:prstTxWarp>
-            <a:normAutofit/>
-          </a:bodyPr>
-          <a:lstStyle/>
-          <a:p>
-            <a:pPr marL="0" marR="0" lvl="0" indent="0" defTabSz="914400" rtl="0" eaLnBrk="0" fontAlgn="base" latinLnBrk="0" hangingPunct="0">
-              <a:spcBef>
-                <a:spcPct val="0"/>
-              </a:spcBef>
-              <a:spcAft>
-                <a:spcPct val="0"/>
-              </a:spcAft>
-              <a:buClrTx/>
-              <a:buSzTx/>
-              <a:tabLst/>
-            </a:pPr>
-            <a:r>
-              <a:rPr kumimoji="0" lang="en-US" altLang="en-US" sz="2800" b="0" i="0" u="none" strike="noStrike" cap="none" normalizeH="0" baseline="0" dirty="0">
-                <a:ln>
-                  <a:noFill/>
-                </a:ln>
-                <a:effectLst/>
-                <a:latin typeface="Arial" panose="020B0604020202020204" pitchFamily="34" charset="0"/>
-              </a:rPr>
-              <a:t>Diminishing Returns</a:t>
-            </a:r>
-          </a:p>
-        </p:txBody>
-      </p:sp>
-      <p:sp>
-        <p:nvSpPr>
-          <p:cNvPr id="43" name="Rectangle 42">
-            <a:extLst>
-              <a:ext uri="{FF2B5EF4-FFF2-40B4-BE49-F238E27FC236}">
-                <a16:creationId xmlns:a16="http://schemas.microsoft.com/office/drawing/2014/main" id="{95C8260E-968F-44E8-A823-ABB431311926}"/>
+                <a16:creationId xmlns:a16="http://schemas.microsoft.com/office/drawing/2014/main" id="{AAD0DBB9-1A4B-4391-81D4-CB19F9AB918A}"/>
               </a:ext>
               <a:ext uri="{C183D7F6-B498-43B3-948B-1728B52AA6E4}">
                 <adec:decorative xmlns:adec="http://schemas.microsoft.com/office/drawing/2017/decorative" val="1"/>
@@ -15980,16 +16405,29 @@
           </p:nvPr>
         </p:nvSpPr>
         <p:spPr>
-          <a:xfrm>
-            <a:off x="0" y="0"/>
-            <a:ext cx="9144000" cy="865848"/>
+          <a:xfrm rot="10800000" flipH="1">
+            <a:off x="6096642" y="0"/>
+            <a:ext cx="3047358" cy="1576412"/>
           </a:xfrm>
           <a:prstGeom prst="rect">
             <a:avLst/>
           </a:prstGeom>
-          <a:solidFill>
-            <a:schemeClr val="accent4"/>
-          </a:solidFill>
+          <a:gradFill>
+            <a:gsLst>
+              <a:gs pos="19000">
+                <a:schemeClr val="accent1">
+                  <a:lumMod val="50000"/>
+                  <a:alpha val="68000"/>
+                </a:schemeClr>
+              </a:gs>
+              <a:gs pos="100000">
+                <a:schemeClr val="accent1">
+                  <a:alpha val="79000"/>
+                </a:schemeClr>
+              </a:gs>
+            </a:gsLst>
+            <a:lin ang="19200000" scaled="0"/>
+          </a:gradFill>
           <a:ln>
             <a:noFill/>
           </a:ln>
@@ -16021,10 +16459,10 @@
       </p:sp>
       <p:sp>
         <p:nvSpPr>
-          <p:cNvPr id="45" name="Rectangle 44">
+          <p:cNvPr id="15" name="Rectangle 14">
             <a:extLst>
               <a:ext uri="{FF2B5EF4-FFF2-40B4-BE49-F238E27FC236}">
-                <a16:creationId xmlns:a16="http://schemas.microsoft.com/office/drawing/2014/main" id="{2C1BBA94-3F40-40AA-8BB9-E69E25E537C1}"/>
+                <a16:creationId xmlns:a16="http://schemas.microsoft.com/office/drawing/2014/main" id="{063BBA22-50EA-4C4D-BE05-F1CE4E63AA56}"/>
               </a:ext>
               <a:ext uri="{C183D7F6-B498-43B3-948B-1728B52AA6E4}">
                 <adec:decorative xmlns:adec="http://schemas.microsoft.com/office/drawing/2017/decorative" val="1"/>
@@ -16043,117 +16481,28 @@
           </p:nvPr>
         </p:nvSpPr>
         <p:spPr>
-          <a:xfrm>
-            <a:off x="388416" y="0"/>
-            <a:ext cx="8423809" cy="4588184"/>
+          <a:xfrm rot="5400000">
+            <a:off x="3783777" y="-3783778"/>
+            <a:ext cx="1576446" cy="9144002"/>
           </a:xfrm>
           <a:prstGeom prst="rect">
             <a:avLst/>
           </a:prstGeom>
-          <a:solidFill>
-            <a:schemeClr val="bg1"/>
-          </a:solidFill>
-          <a:ln>
-            <a:noFill/>
-          </a:ln>
-          <a:effectLst>
-            <a:outerShdw blurRad="139700" dist="127000" dir="5400000" algn="t" rotWithShape="0">
-              <a:prstClr val="black">
-                <a:alpha val="15000"/>
-              </a:prstClr>
-            </a:outerShdw>
-          </a:effectLst>
-        </p:spPr>
-        <p:style>
-          <a:lnRef idx="2">
-            <a:schemeClr val="accent1">
-              <a:shade val="50000"/>
-            </a:schemeClr>
-          </a:lnRef>
-          <a:fillRef idx="1">
-            <a:schemeClr val="accent1"/>
-          </a:fillRef>
-          <a:effectRef idx="0">
-            <a:schemeClr val="accent1"/>
-          </a:effectRef>
-          <a:fontRef idx="minor">
-            <a:schemeClr val="lt1"/>
-          </a:fontRef>
-        </p:style>
-        <p:txBody>
-          <a:bodyPr rtlCol="0" anchor="ctr"/>
-          <a:lstStyle/>
-          <a:p>
-            <a:pPr algn="ctr"/>
-            <a:endParaRPr lang="en-US"/>
-          </a:p>
-        </p:txBody>
-      </p:sp>
-      <p:pic>
-        <p:nvPicPr>
-          <p:cNvPr id="15" name="Picture 14" descr="A graph of a graph&#10;&#10;AI-generated content may be incorrect.">
-            <a:extLst>
-              <a:ext uri="{FF2B5EF4-FFF2-40B4-BE49-F238E27FC236}">
-                <a16:creationId xmlns:a16="http://schemas.microsoft.com/office/drawing/2014/main" id="{50E2F948-8509-E471-40F2-5D5A2C8B6C04}"/>
-              </a:ext>
-            </a:extLst>
-          </p:cNvPr>
-          <p:cNvPicPr>
-            <a:picLocks noChangeAspect="1"/>
-          </p:cNvPicPr>
-          <p:nvPr/>
-        </p:nvPicPr>
-        <p:blipFill>
-          <a:blip r:embed="rId2"/>
-          <a:srcRect b="530"/>
-          <a:stretch>
-            <a:fillRect/>
-          </a:stretch>
-        </p:blipFill>
-        <p:spPr>
-          <a:xfrm>
-            <a:off x="719403" y="364142"/>
-            <a:ext cx="7777234" cy="3867993"/>
-          </a:xfrm>
-          <a:prstGeom prst="rect">
-            <a:avLst/>
-          </a:prstGeom>
-        </p:spPr>
-      </p:pic>
-      <p:sp>
-        <p:nvSpPr>
-          <p:cNvPr id="47" name="Rectangle 46">
-            <a:extLst>
-              <a:ext uri="{FF2B5EF4-FFF2-40B4-BE49-F238E27FC236}">
-                <a16:creationId xmlns:a16="http://schemas.microsoft.com/office/drawing/2014/main" id="{FE43805F-24A6-46A4-B19B-54F28347355C}"/>
-              </a:ext>
-              <a:ext uri="{C183D7F6-B498-43B3-948B-1728B52AA6E4}">
-                <adec:decorative xmlns:adec="http://schemas.microsoft.com/office/drawing/2017/decorative" val="1"/>
-              </a:ext>
-            </a:extLst>
-          </p:cNvPr>
-          <p:cNvSpPr>
-            <a:spLocks noGrp="1" noRot="1" noChangeAspect="1" noMove="1" noResize="1" noEditPoints="1" noAdjustHandles="1" noChangeArrowheads="1" noChangeShapeType="1" noTextEdit="1"/>
-          </p:cNvSpPr>
-          <p:nvPr>
-            <p:extLst>
-              <p:ext uri="{386F3935-93C4-4BCD-93E2-E3B085C9AB24}">
-                <p16:designElem xmlns:p16="http://schemas.microsoft.com/office/powerpoint/2015/main" val="1"/>
-              </p:ext>
-            </p:extLst>
-          </p:nvPr>
-        </p:nvSpPr>
-        <p:spPr>
-          <a:xfrm rot="5400000" flipH="1">
-            <a:off x="2817950" y="5666847"/>
-            <a:ext cx="1463040" cy="34289"/>
-          </a:xfrm>
-          <a:prstGeom prst="rect">
-            <a:avLst/>
-          </a:prstGeom>
-          <a:solidFill>
-            <a:schemeClr val="accent4"/>
-          </a:solidFill>
+          <a:gradFill>
+            <a:gsLst>
+              <a:gs pos="23000">
+                <a:schemeClr val="accent1">
+                  <a:alpha val="0"/>
+                </a:schemeClr>
+              </a:gs>
+              <a:gs pos="99000">
+                <a:srgbClr val="000000">
+                  <a:alpha val="74000"/>
+                </a:srgbClr>
+              </a:gs>
+            </a:gsLst>
+            <a:lin ang="20400000" scaled="0"/>
+          </a:gradFill>
           <a:ln>
             <a:noFill/>
           </a:ln>
@@ -16179,89 +16528,91 @@
           <a:lstStyle/>
           <a:p>
             <a:pPr algn="ctr"/>
-            <a:endParaRPr lang="en-US"/>
+            <a:endParaRPr lang="en-US" dirty="0"/>
           </a:p>
         </p:txBody>
       </p:sp>
       <p:sp>
         <p:nvSpPr>
-          <p:cNvPr id="3" name="Content Placeholder 2"/>
+          <p:cNvPr id="2" name="Title 1">
+            <a:extLst>
+              <a:ext uri="{FF2B5EF4-FFF2-40B4-BE49-F238E27FC236}">
+                <a16:creationId xmlns:a16="http://schemas.microsoft.com/office/drawing/2014/main" id="{0353CB4C-C8CC-8E47-8C61-70C286AB9A0C}"/>
+              </a:ext>
+            </a:extLst>
+          </p:cNvPr>
           <p:cNvSpPr>
             <a:spLocks noGrp="1"/>
           </p:cNvSpPr>
           <p:nvPr>
-            <p:ph idx="1"/>
+            <p:ph type="title"/>
           </p:nvPr>
         </p:nvSpPr>
         <p:spPr>
           <a:xfrm>
-            <a:off x="3872039" y="4883544"/>
-            <a:ext cx="4940186" cy="1556907"/>
+            <a:off x="1028697" y="348865"/>
+            <a:ext cx="7533018" cy="877729"/>
           </a:xfrm>
         </p:spPr>
         <p:txBody>
           <a:bodyPr anchor="ctr">
-            <a:normAutofit/>
+            <a:normAutofit fontScale="90000"/>
           </a:bodyPr>
           <a:lstStyle/>
           <a:p>
-            <a:pPr>
-              <a:lnSpc>
-                <a:spcPct val="90000"/>
-              </a:lnSpc>
-            </a:pPr>
             <a:r>
-              <a:rPr lang="en-US" sz="1000" dirty="0"/>
-              <a:t>Advertising platforms report total revenue claims. Modeled revenue focuses on incremental lift. Extra dollars spent on saturated channels yield smaller gains.</a:t>
+              <a:rPr lang="en-US" sz="3600" dirty="0">
+                <a:solidFill>
+                  <a:schemeClr val="bg1"/>
+                </a:solidFill>
+              </a:rPr>
+              <a:t>Diminishing Returns on Marketing Spend</a:t>
             </a:r>
-          </a:p>
-          <a:p>
-            <a:pPr>
-              <a:lnSpc>
-                <a:spcPct val="90000"/>
-              </a:lnSpc>
-            </a:pPr>
-            <a:r>
-              <a:rPr lang="en-US" sz="1000" dirty="0"/>
-              <a:t>Some channels have much higher total spend than others.</a:t>
-            </a:r>
-          </a:p>
-          <a:p>
-            <a:pPr>
-              <a:lnSpc>
-                <a:spcPct val="90000"/>
-              </a:lnSpc>
-            </a:pPr>
-            <a:r>
-              <a:rPr lang="en-US" sz="1000" dirty="0"/>
-              <a:t>High spend levels often coincide with diminishing marginal returns—each additional dollar spent generates less incremental revenue.</a:t>
-            </a:r>
-          </a:p>
-          <a:p>
-            <a:pPr>
-              <a:lnSpc>
-                <a:spcPct val="90000"/>
-              </a:lnSpc>
-            </a:pPr>
-            <a:r>
-              <a:rPr lang="en-US" sz="1000" dirty="0"/>
-              <a:t>Channels with large spend may still have high total ROI historically, but the model shows current incremental efficiency is lower.</a:t>
-            </a:r>
-          </a:p>
-          <a:p>
-            <a:pPr>
-              <a:lnSpc>
-                <a:spcPct val="90000"/>
-              </a:lnSpc>
-            </a:pPr>
-            <a:r>
-              <a:rPr lang="en-US" sz="1000" dirty="0"/>
-              <a:t>This helps explain why modeled revenue &lt; reported revenue for these channels.</a:t>
-            </a:r>
+            <a:endParaRPr lang="en-US" sz="3500" dirty="0">
+              <a:solidFill>
+                <a:schemeClr val="bg1"/>
+              </a:solidFill>
+            </a:endParaRPr>
           </a:p>
         </p:txBody>
       </p:sp>
+      <p:graphicFrame>
+        <p:nvGraphicFramePr>
+          <p:cNvPr id="5" name="Content Placeholder 2">
+            <a:extLst>
+              <a:ext uri="{FF2B5EF4-FFF2-40B4-BE49-F238E27FC236}">
+                <a16:creationId xmlns:a16="http://schemas.microsoft.com/office/drawing/2014/main" id="{A7B986E4-2F37-4DFC-58C4-8A75F25E91BD}"/>
+              </a:ext>
+            </a:extLst>
+          </p:cNvPr>
+          <p:cNvGraphicFramePr>
+            <a:graphicFrameLocks noGrp="1"/>
+          </p:cNvGraphicFramePr>
+          <p:nvPr>
+            <p:ph idx="1"/>
+            <p:extLst>
+              <p:ext uri="{D42A27DB-BD31-4B8C-83A1-F6EECF244321}">
+                <p14:modId xmlns:p14="http://schemas.microsoft.com/office/powerpoint/2010/main" val="836685429"/>
+              </p:ext>
+            </p:extLst>
+          </p:nvPr>
+        </p:nvGraphicFramePr>
+        <p:xfrm>
+          <a:off x="483042" y="2112579"/>
+          <a:ext cx="8195871" cy="4192805"/>
+        </p:xfrm>
+        <a:graphic>
+          <a:graphicData uri="http://schemas.openxmlformats.org/drawingml/2006/diagram">
+            <dgm:relIds xmlns:dgm="http://schemas.openxmlformats.org/drawingml/2006/diagram" xmlns:r="http://schemas.openxmlformats.org/officeDocument/2006/relationships" r:dm="rId2" r:lo="rId3" r:qs="rId4" r:cs="rId5"/>
+          </a:graphicData>
+        </a:graphic>
+      </p:graphicFrame>
     </p:spTree>
+    <p:extLst>
+      <p:ext uri="{BB962C8B-B14F-4D97-AF65-F5344CB8AC3E}">
+        <p14:creationId xmlns:p14="http://schemas.microsoft.com/office/powerpoint/2010/main" val="162346022"/>
+      </p:ext>
+    </p:extLst>
   </p:cSld>
   <p:clrMapOvr>
     <a:masterClrMapping/>
@@ -17128,13 +17479,13 @@
         </p:spPr>
         <p:txBody>
           <a:bodyPr anchor="b">
-            <a:normAutofit/>
+            <a:normAutofit fontScale="90000"/>
           </a:bodyPr>
           <a:lstStyle/>
           <a:p>
             <a:r>
-              <a:rPr lang="en-US" sz="3500"/>
-              <a:t>Variance Inflation Factor (VIF)</a:t>
+              <a:rPr lang="en-US" sz="3500" dirty="0"/>
+              <a:t>Collinearity: Variance Inflation Factor (VIF)</a:t>
             </a:r>
           </a:p>
         </p:txBody>
@@ -17162,7 +17513,7 @@
           <a:lstStyle/>
           <a:p>
             <a:r>
-              <a:rPr lang="en-US" sz="1700"/>
+              <a:rPr lang="en-US" sz="1700" dirty="0"/>
               <a:t>High VIF (&gt;10) indicates strong overlap in channel spend, explaining why modeled contributions may appear lower than reported revenue.</a:t>
             </a:r>
           </a:p>
